--- a/W4/3. W4S3 final/W4S3.pptx
+++ b/W4/3. W4S3 final/W4S3.pptx
@@ -5,7 +5,7 @@
     <p:sldMasterId id="2147483648" r:id="rId1"/>
   </p:sldMasterIdLst>
   <p:notesMasterIdLst>
-    <p:notesMasterId r:id="rId64"/>
+    <p:notesMasterId r:id="rId68"/>
   </p:notesMasterIdLst>
   <p:sldIdLst>
     <p:sldId id="377" r:id="rId2"/>
@@ -46,30 +46,34 @@
     <p:sldId id="407" r:id="rId37"/>
     <p:sldId id="603" r:id="rId38"/>
     <p:sldId id="604" r:id="rId39"/>
-    <p:sldId id="605" r:id="rId40"/>
-    <p:sldId id="606" r:id="rId41"/>
-    <p:sldId id="408" r:id="rId42"/>
-    <p:sldId id="607" r:id="rId43"/>
-    <p:sldId id="608" r:id="rId44"/>
-    <p:sldId id="402" r:id="rId45"/>
-    <p:sldId id="609" r:id="rId46"/>
-    <p:sldId id="622" r:id="rId47"/>
-    <p:sldId id="409" r:id="rId48"/>
-    <p:sldId id="610" r:id="rId49"/>
-    <p:sldId id="611" r:id="rId50"/>
-    <p:sldId id="612" r:id="rId51"/>
-    <p:sldId id="613" r:id="rId52"/>
-    <p:sldId id="614" r:id="rId53"/>
-    <p:sldId id="616" r:id="rId54"/>
-    <p:sldId id="617" r:id="rId55"/>
-    <p:sldId id="618" r:id="rId56"/>
-    <p:sldId id="410" r:id="rId57"/>
-    <p:sldId id="346" r:id="rId58"/>
-    <p:sldId id="583" r:id="rId59"/>
-    <p:sldId id="619" r:id="rId60"/>
-    <p:sldId id="584" r:id="rId61"/>
-    <p:sldId id="595" r:id="rId62"/>
-    <p:sldId id="266" r:id="rId63"/>
+    <p:sldId id="628" r:id="rId40"/>
+    <p:sldId id="605" r:id="rId41"/>
+    <p:sldId id="627" r:id="rId42"/>
+    <p:sldId id="606" r:id="rId43"/>
+    <p:sldId id="408" r:id="rId44"/>
+    <p:sldId id="607" r:id="rId45"/>
+    <p:sldId id="629" r:id="rId46"/>
+    <p:sldId id="630" r:id="rId47"/>
+    <p:sldId id="608" r:id="rId48"/>
+    <p:sldId id="402" r:id="rId49"/>
+    <p:sldId id="609" r:id="rId50"/>
+    <p:sldId id="622" r:id="rId51"/>
+    <p:sldId id="409" r:id="rId52"/>
+    <p:sldId id="610" r:id="rId53"/>
+    <p:sldId id="611" r:id="rId54"/>
+    <p:sldId id="612" r:id="rId55"/>
+    <p:sldId id="613" r:id="rId56"/>
+    <p:sldId id="614" r:id="rId57"/>
+    <p:sldId id="616" r:id="rId58"/>
+    <p:sldId id="617" r:id="rId59"/>
+    <p:sldId id="618" r:id="rId60"/>
+    <p:sldId id="410" r:id="rId61"/>
+    <p:sldId id="346" r:id="rId62"/>
+    <p:sldId id="583" r:id="rId63"/>
+    <p:sldId id="619" r:id="rId64"/>
+    <p:sldId id="584" r:id="rId65"/>
+    <p:sldId id="595" r:id="rId66"/>
+    <p:sldId id="266" r:id="rId67"/>
   </p:sldIdLst>
   <p:sldSz cx="12192000" cy="6858000"/>
   <p:notesSz cx="6858000" cy="9144000"/>
@@ -243,7 +247,9 @@
             <p14:sldId id="407"/>
             <p14:sldId id="603"/>
             <p14:sldId id="604"/>
+            <p14:sldId id="628"/>
             <p14:sldId id="605"/>
+            <p14:sldId id="627"/>
             <p14:sldId id="606"/>
           </p14:sldIdLst>
         </p14:section>
@@ -251,6 +257,8 @@
           <p14:sldIdLst>
             <p14:sldId id="408"/>
             <p14:sldId id="607"/>
+            <p14:sldId id="629"/>
+            <p14:sldId id="630"/>
             <p14:sldId id="608"/>
           </p14:sldIdLst>
         </p14:section>
@@ -305,7 +313,7 @@
 <file path=ppt/revisionInfo.xml><?xml version="1.0" encoding="utf-8"?>
 <p1510:revInfo xmlns:a="http://schemas.openxmlformats.org/drawingml/2006/main" xmlns:r="http://schemas.openxmlformats.org/officeDocument/2006/relationships" xmlns:p1510="http://schemas.microsoft.com/office/powerpoint/2015/10/main">
   <p1510:revLst>
-    <p1510:client id="{ACAA6EBB-6671-44BE-8694-3D1015DC5BF4}" v="7" dt="2026-02-18T12:10:36.113"/>
+    <p1510:client id="{ACAA6EBB-6671-44BE-8694-3D1015DC5BF4}" v="50" dt="2026-03-03T10:57:28.836"/>
   </p1510:revLst>
 </p1510:revInfo>
 </file>
@@ -314,8 +322,8 @@
 <pc:chgInfo xmlns:a="http://schemas.openxmlformats.org/drawingml/2006/main" xmlns:r="http://schemas.openxmlformats.org/officeDocument/2006/relationships" xmlns:ac="http://schemas.microsoft.com/office/drawing/2013/main/command" xmlns:pc="http://schemas.microsoft.com/office/powerpoint/2013/main/command">
   <pc:docChgLst>
     <pc:chgData name="Matthieu De Mari" userId="dfb708c9-d8dc-439f-9a3b-c772bf4a311c" providerId="ADAL" clId="{81E9B007-0C2C-493E-9B93-55A62C9C1F12}"/>
-    <pc:docChg chg="custSel addSld delSld modSld modSection">
-      <pc:chgData name="Matthieu De Mari" userId="dfb708c9-d8dc-439f-9a3b-c772bf4a311c" providerId="ADAL" clId="{81E9B007-0C2C-493E-9B93-55A62C9C1F12}" dt="2026-02-18T12:14:10.968" v="1437" actId="14100"/>
+    <pc:docChg chg="undo custSel addSld delSld modSld sldOrd modSection">
+      <pc:chgData name="Matthieu De Mari" userId="dfb708c9-d8dc-439f-9a3b-c772bf4a311c" providerId="ADAL" clId="{81E9B007-0C2C-493E-9B93-55A62C9C1F12}" dt="2026-03-03T10:58:19.174" v="2187" actId="20577"/>
       <pc:docMkLst>
         <pc:docMk/>
       </pc:docMkLst>
@@ -334,13 +342,6 @@
           </ac:spMkLst>
         </pc:spChg>
       </pc:sldChg>
-      <pc:sldChg chg="del">
-        <pc:chgData name="Matthieu De Mari" userId="dfb708c9-d8dc-439f-9a3b-c772bf4a311c" providerId="ADAL" clId="{81E9B007-0C2C-493E-9B93-55A62C9C1F12}" dt="2026-02-18T12:11:00.704" v="1332" actId="47"/>
-        <pc:sldMkLst>
-          <pc:docMk/>
-          <pc:sldMk cId="2169816204" sldId="405"/>
-        </pc:sldMkLst>
-      </pc:sldChg>
       <pc:sldChg chg="modSp mod">
         <pc:chgData name="Matthieu De Mari" userId="dfb708c9-d8dc-439f-9a3b-c772bf4a311c" providerId="ADAL" clId="{81E9B007-0C2C-493E-9B93-55A62C9C1F12}" dt="2026-02-18T12:12:01.776" v="1401" actId="20577"/>
         <pc:sldMkLst>
@@ -353,6 +354,21 @@
             <pc:docMk/>
             <pc:sldMk cId="2463962519" sldId="406"/>
             <ac:spMk id="3" creationId="{82C05F33-91D7-5C66-BA4E-D92C5AE204B9}"/>
+          </ac:spMkLst>
+        </pc:spChg>
+      </pc:sldChg>
+      <pc:sldChg chg="modSp mod">
+        <pc:chgData name="Matthieu De Mari" userId="dfb708c9-d8dc-439f-9a3b-c772bf4a311c" providerId="ADAL" clId="{81E9B007-0C2C-493E-9B93-55A62C9C1F12}" dt="2026-03-03T10:54:15.161" v="1922" actId="27636"/>
+        <pc:sldMkLst>
+          <pc:docMk/>
+          <pc:sldMk cId="3707245743" sldId="408"/>
+        </pc:sldMkLst>
+        <pc:spChg chg="mod">
+          <ac:chgData name="Matthieu De Mari" userId="dfb708c9-d8dc-439f-9a3b-c772bf4a311c" providerId="ADAL" clId="{81E9B007-0C2C-493E-9B93-55A62C9C1F12}" dt="2026-03-03T10:54:15.161" v="1922" actId="27636"/>
+          <ac:spMkLst>
+            <pc:docMk/>
+            <pc:sldMk cId="3707245743" sldId="408"/>
+            <ac:spMk id="3" creationId="{76CC8A9E-3FA2-3F63-119F-498C8E48D3FA}"/>
           </ac:spMkLst>
         </pc:spChg>
       </pc:sldChg>
@@ -463,12 +479,35 @@
           </ac:spMkLst>
         </pc:spChg>
       </pc:sldChg>
-      <pc:sldChg chg="del">
-        <pc:chgData name="Matthieu De Mari" userId="dfb708c9-d8dc-439f-9a3b-c772bf4a311c" providerId="ADAL" clId="{81E9B007-0C2C-493E-9B93-55A62C9C1F12}" dt="2026-02-18T12:11:04.702" v="1333" actId="47"/>
+      <pc:sldChg chg="modSp mod">
+        <pc:chgData name="Matthieu De Mari" userId="dfb708c9-d8dc-439f-9a3b-c772bf4a311c" providerId="ADAL" clId="{81E9B007-0C2C-493E-9B93-55A62C9C1F12}" dt="2026-03-03T10:53:58.280" v="1906" actId="20577"/>
         <pc:sldMkLst>
           <pc:docMk/>
-          <pc:sldMk cId="1934366758" sldId="588"/>
+          <pc:sldMk cId="76977210" sldId="607"/>
         </pc:sldMkLst>
+        <pc:spChg chg="mod">
+          <ac:chgData name="Matthieu De Mari" userId="dfb708c9-d8dc-439f-9a3b-c772bf4a311c" providerId="ADAL" clId="{81E9B007-0C2C-493E-9B93-55A62C9C1F12}" dt="2026-03-03T10:53:58.280" v="1906" actId="20577"/>
+          <ac:spMkLst>
+            <pc:docMk/>
+            <pc:sldMk cId="76977210" sldId="607"/>
+            <ac:spMk id="3" creationId="{76CC8A9E-3FA2-3F63-119F-498C8E48D3FA}"/>
+          </ac:spMkLst>
+        </pc:spChg>
+      </pc:sldChg>
+      <pc:sldChg chg="modSp mod">
+        <pc:chgData name="Matthieu De Mari" userId="dfb708c9-d8dc-439f-9a3b-c772bf4a311c" providerId="ADAL" clId="{81E9B007-0C2C-493E-9B93-55A62C9C1F12}" dt="2026-02-19T10:57:43.064" v="1447" actId="20577"/>
+        <pc:sldMkLst>
+          <pc:docMk/>
+          <pc:sldMk cId="4054278939" sldId="609"/>
+        </pc:sldMkLst>
+        <pc:spChg chg="mod">
+          <ac:chgData name="Matthieu De Mari" userId="dfb708c9-d8dc-439f-9a3b-c772bf4a311c" providerId="ADAL" clId="{81E9B007-0C2C-493E-9B93-55A62C9C1F12}" dt="2026-02-19T10:57:43.064" v="1447" actId="20577"/>
+          <ac:spMkLst>
+            <pc:docMk/>
+            <pc:sldMk cId="4054278939" sldId="609"/>
+            <ac:spMk id="3" creationId="{CC15B02E-4FC8-0A0E-E6EB-850476F34791}"/>
+          </ac:spMkLst>
+        </pc:spChg>
       </pc:sldChg>
       <pc:sldChg chg="modSp mod">
         <pc:chgData name="Matthieu De Mari" userId="dfb708c9-d8dc-439f-9a3b-c772bf4a311c" providerId="ADAL" clId="{81E9B007-0C2C-493E-9B93-55A62C9C1F12}" dt="2026-02-18T12:14:10.968" v="1437" actId="14100"/>
@@ -561,6 +600,106 @@
           </ac:spMkLst>
         </pc:spChg>
       </pc:sldChg>
+      <pc:sldChg chg="delSp modSp add mod ord">
+        <pc:chgData name="Matthieu De Mari" userId="dfb708c9-d8dc-439f-9a3b-c772bf4a311c" providerId="ADAL" clId="{81E9B007-0C2C-493E-9B93-55A62C9C1F12}" dt="2026-03-03T10:50:59.989" v="1777" actId="20577"/>
+        <pc:sldMkLst>
+          <pc:docMk/>
+          <pc:sldMk cId="622754831" sldId="627"/>
+        </pc:sldMkLst>
+        <pc:spChg chg="mod">
+          <ac:chgData name="Matthieu De Mari" userId="dfb708c9-d8dc-439f-9a3b-c772bf4a311c" providerId="ADAL" clId="{81E9B007-0C2C-493E-9B93-55A62C9C1F12}" dt="2026-03-03T10:46:32.272" v="1500" actId="207"/>
+          <ac:spMkLst>
+            <pc:docMk/>
+            <pc:sldMk cId="622754831" sldId="627"/>
+            <ac:spMk id="2" creationId="{62036F68-A5D8-577C-81C7-8ACBA8E6C80E}"/>
+          </ac:spMkLst>
+        </pc:spChg>
+        <pc:spChg chg="mod">
+          <ac:chgData name="Matthieu De Mari" userId="dfb708c9-d8dc-439f-9a3b-c772bf4a311c" providerId="ADAL" clId="{81E9B007-0C2C-493E-9B93-55A62C9C1F12}" dt="2026-03-03T10:50:59.989" v="1777" actId="20577"/>
+          <ac:spMkLst>
+            <pc:docMk/>
+            <pc:sldMk cId="622754831" sldId="627"/>
+            <ac:spMk id="4" creationId="{76E28ACE-9F17-186D-BD8A-ADCED80C3ADF}"/>
+          </ac:spMkLst>
+        </pc:spChg>
+        <pc:picChg chg="del">
+          <ac:chgData name="Matthieu De Mari" userId="dfb708c9-d8dc-439f-9a3b-c772bf4a311c" providerId="ADAL" clId="{81E9B007-0C2C-493E-9B93-55A62C9C1F12}" dt="2026-03-03T10:43:12.060" v="1449" actId="478"/>
+          <ac:picMkLst>
+            <pc:docMk/>
+            <pc:sldMk cId="622754831" sldId="627"/>
+            <ac:picMk id="8" creationId="{3643E417-DD86-D969-F75D-BD91E5DC4087}"/>
+          </ac:picMkLst>
+        </pc:picChg>
+      </pc:sldChg>
+      <pc:sldChg chg="addSp delSp modSp add mod chgLayout">
+        <pc:chgData name="Matthieu De Mari" userId="dfb708c9-d8dc-439f-9a3b-c772bf4a311c" providerId="ADAL" clId="{81E9B007-0C2C-493E-9B93-55A62C9C1F12}" dt="2026-03-03T10:44:50.545" v="1493" actId="20577"/>
+        <pc:sldMkLst>
+          <pc:docMk/>
+          <pc:sldMk cId="618793995" sldId="628"/>
+        </pc:sldMkLst>
+        <pc:spChg chg="mod ord">
+          <ac:chgData name="Matthieu De Mari" userId="dfb708c9-d8dc-439f-9a3b-c772bf4a311c" providerId="ADAL" clId="{81E9B007-0C2C-493E-9B93-55A62C9C1F12}" dt="2026-03-03T10:44:15.178" v="1456" actId="700"/>
+          <ac:spMkLst>
+            <pc:docMk/>
+            <pc:sldMk cId="618793995" sldId="628"/>
+            <ac:spMk id="2" creationId="{00585007-194B-946D-147C-7C393036DEEE}"/>
+          </ac:spMkLst>
+        </pc:spChg>
+        <pc:spChg chg="add mod ord">
+          <ac:chgData name="Matthieu De Mari" userId="dfb708c9-d8dc-439f-9a3b-c772bf4a311c" providerId="ADAL" clId="{81E9B007-0C2C-493E-9B93-55A62C9C1F12}" dt="2026-03-03T10:44:50.545" v="1493" actId="20577"/>
+          <ac:spMkLst>
+            <pc:docMk/>
+            <pc:sldMk cId="618793995" sldId="628"/>
+            <ac:spMk id="3" creationId="{EED7477D-43B6-94B8-41DC-40E5ADCB2773}"/>
+          </ac:spMkLst>
+        </pc:spChg>
+        <pc:spChg chg="mod ord">
+          <ac:chgData name="Matthieu De Mari" userId="dfb708c9-d8dc-439f-9a3b-c772bf4a311c" providerId="ADAL" clId="{81E9B007-0C2C-493E-9B93-55A62C9C1F12}" dt="2026-03-03T10:44:35.041" v="1474" actId="27636"/>
+          <ac:spMkLst>
+            <pc:docMk/>
+            <pc:sldMk cId="618793995" sldId="628"/>
+            <ac:spMk id="4" creationId="{38AEBE44-9AA0-0BD2-9DC3-65317E2DDB4F}"/>
+          </ac:spMkLst>
+        </pc:spChg>
+        <pc:picChg chg="del">
+          <ac:chgData name="Matthieu De Mari" userId="dfb708c9-d8dc-439f-9a3b-c772bf4a311c" providerId="ADAL" clId="{81E9B007-0C2C-493E-9B93-55A62C9C1F12}" dt="2026-03-03T10:44:11.775" v="1455" actId="478"/>
+          <ac:picMkLst>
+            <pc:docMk/>
+            <pc:sldMk cId="618793995" sldId="628"/>
+            <ac:picMk id="7" creationId="{9AC78AEE-88FF-E204-0618-9A70BC84D55B}"/>
+          </ac:picMkLst>
+        </pc:picChg>
+      </pc:sldChg>
+      <pc:sldChg chg="modSp add mod">
+        <pc:chgData name="Matthieu De Mari" userId="dfb708c9-d8dc-439f-9a3b-c772bf4a311c" providerId="ADAL" clId="{81E9B007-0C2C-493E-9B93-55A62C9C1F12}" dt="2026-03-03T10:56:56.031" v="2062" actId="27636"/>
+        <pc:sldMkLst>
+          <pc:docMk/>
+          <pc:sldMk cId="1859714976" sldId="629"/>
+        </pc:sldMkLst>
+        <pc:spChg chg="mod">
+          <ac:chgData name="Matthieu De Mari" userId="dfb708c9-d8dc-439f-9a3b-c772bf4a311c" providerId="ADAL" clId="{81E9B007-0C2C-493E-9B93-55A62C9C1F12}" dt="2026-03-03T10:56:56.031" v="2062" actId="27636"/>
+          <ac:spMkLst>
+            <pc:docMk/>
+            <pc:sldMk cId="1859714976" sldId="629"/>
+            <ac:spMk id="3" creationId="{6FE0DC42-A078-2D9A-98DC-AEF9FA0D3A70}"/>
+          </ac:spMkLst>
+        </pc:spChg>
+      </pc:sldChg>
+      <pc:sldChg chg="modSp add mod">
+        <pc:chgData name="Matthieu De Mari" userId="dfb708c9-d8dc-439f-9a3b-c772bf4a311c" providerId="ADAL" clId="{81E9B007-0C2C-493E-9B93-55A62C9C1F12}" dt="2026-03-03T10:58:19.174" v="2187" actId="20577"/>
+        <pc:sldMkLst>
+          <pc:docMk/>
+          <pc:sldMk cId="1770878454" sldId="630"/>
+        </pc:sldMkLst>
+        <pc:spChg chg="mod">
+          <ac:chgData name="Matthieu De Mari" userId="dfb708c9-d8dc-439f-9a3b-c772bf4a311c" providerId="ADAL" clId="{81E9B007-0C2C-493E-9B93-55A62C9C1F12}" dt="2026-03-03T10:58:19.174" v="2187" actId="20577"/>
+          <ac:spMkLst>
+            <pc:docMk/>
+            <pc:sldMk cId="1770878454" sldId="630"/>
+            <ac:spMk id="3" creationId="{953936E2-BD72-C2F4-FF2E-DF92549A3D0F}"/>
+          </ac:spMkLst>
+        </pc:spChg>
+      </pc:sldChg>
     </pc:docChg>
   </pc:docChgLst>
 </pc:chgInfo>
@@ -648,7 +787,7 @@
           <a:p>
             <a:fld id="{61478373-EB31-4867-8CF0-FA31364748A5}" type="datetimeFigureOut">
               <a:rPr lang="en-GB" smtClean="0"/>
-              <a:t>18/02/2026</a:t>
+              <a:t>03/03/2026</a:t>
             </a:fld>
             <a:endParaRPr lang="en-GB"/>
           </a:p>
@@ -1065,7 +1204,7 @@
           <a:p>
             <a:fld id="{E85DF616-B21E-4EF6-A6A5-95E2FB3EB1A1}" type="datetimeFigureOut">
               <a:rPr lang="en-GB" smtClean="0"/>
-              <a:t>18/02/2026</a:t>
+              <a:t>03/03/2026</a:t>
             </a:fld>
             <a:endParaRPr lang="en-GB"/>
           </a:p>
@@ -1265,7 +1404,7 @@
           <a:p>
             <a:fld id="{E85DF616-B21E-4EF6-A6A5-95E2FB3EB1A1}" type="datetimeFigureOut">
               <a:rPr lang="en-GB" smtClean="0"/>
-              <a:t>18/02/2026</a:t>
+              <a:t>03/03/2026</a:t>
             </a:fld>
             <a:endParaRPr lang="en-GB"/>
           </a:p>
@@ -1475,7 +1614,7 @@
           <a:p>
             <a:fld id="{E85DF616-B21E-4EF6-A6A5-95E2FB3EB1A1}" type="datetimeFigureOut">
               <a:rPr lang="en-GB" smtClean="0"/>
-              <a:t>18/02/2026</a:t>
+              <a:t>03/03/2026</a:t>
             </a:fld>
             <a:endParaRPr lang="en-GB"/>
           </a:p>
@@ -1675,7 +1814,7 @@
           <a:p>
             <a:fld id="{E85DF616-B21E-4EF6-A6A5-95E2FB3EB1A1}" type="datetimeFigureOut">
               <a:rPr lang="en-GB" smtClean="0"/>
-              <a:t>18/02/2026</a:t>
+              <a:t>03/03/2026</a:t>
             </a:fld>
             <a:endParaRPr lang="en-GB"/>
           </a:p>
@@ -1951,7 +2090,7 @@
           <a:p>
             <a:fld id="{E85DF616-B21E-4EF6-A6A5-95E2FB3EB1A1}" type="datetimeFigureOut">
               <a:rPr lang="en-GB" smtClean="0"/>
-              <a:t>18/02/2026</a:t>
+              <a:t>03/03/2026</a:t>
             </a:fld>
             <a:endParaRPr lang="en-GB"/>
           </a:p>
@@ -2219,7 +2358,7 @@
           <a:p>
             <a:fld id="{E85DF616-B21E-4EF6-A6A5-95E2FB3EB1A1}" type="datetimeFigureOut">
               <a:rPr lang="en-GB" smtClean="0"/>
-              <a:t>18/02/2026</a:t>
+              <a:t>03/03/2026</a:t>
             </a:fld>
             <a:endParaRPr lang="en-GB"/>
           </a:p>
@@ -2634,7 +2773,7 @@
           <a:p>
             <a:fld id="{E85DF616-B21E-4EF6-A6A5-95E2FB3EB1A1}" type="datetimeFigureOut">
               <a:rPr lang="en-GB" smtClean="0"/>
-              <a:t>18/02/2026</a:t>
+              <a:t>03/03/2026</a:t>
             </a:fld>
             <a:endParaRPr lang="en-GB"/>
           </a:p>
@@ -2776,7 +2915,7 @@
           <a:p>
             <a:fld id="{E85DF616-B21E-4EF6-A6A5-95E2FB3EB1A1}" type="datetimeFigureOut">
               <a:rPr lang="en-GB" smtClean="0"/>
-              <a:t>18/02/2026</a:t>
+              <a:t>03/03/2026</a:t>
             </a:fld>
             <a:endParaRPr lang="en-GB"/>
           </a:p>
@@ -2889,7 +3028,7 @@
           <a:p>
             <a:fld id="{E85DF616-B21E-4EF6-A6A5-95E2FB3EB1A1}" type="datetimeFigureOut">
               <a:rPr lang="en-GB" smtClean="0"/>
-              <a:t>18/02/2026</a:t>
+              <a:t>03/03/2026</a:t>
             </a:fld>
             <a:endParaRPr lang="en-GB"/>
           </a:p>
@@ -3202,7 +3341,7 @@
           <a:p>
             <a:fld id="{E85DF616-B21E-4EF6-A6A5-95E2FB3EB1A1}" type="datetimeFigureOut">
               <a:rPr lang="en-GB" smtClean="0"/>
-              <a:t>18/02/2026</a:t>
+              <a:t>03/03/2026</a:t>
             </a:fld>
             <a:endParaRPr lang="en-GB"/>
           </a:p>
@@ -3491,7 +3630,7 @@
           <a:p>
             <a:fld id="{E85DF616-B21E-4EF6-A6A5-95E2FB3EB1A1}" type="datetimeFigureOut">
               <a:rPr lang="en-GB" smtClean="0"/>
-              <a:t>18/02/2026</a:t>
+              <a:t>03/03/2026</a:t>
             </a:fld>
             <a:endParaRPr lang="en-GB"/>
           </a:p>
@@ -3734,7 +3873,7 @@
           <a:p>
             <a:fld id="{E85DF616-B21E-4EF6-A6A5-95E2FB3EB1A1}" type="datetimeFigureOut">
               <a:rPr lang="en-GB" smtClean="0"/>
-              <a:t>18/02/2026</a:t>
+              <a:t>03/03/2026</a:t>
             </a:fld>
             <a:endParaRPr lang="en-GB"/>
           </a:p>
@@ -6012,7 +6151,25 @@
                       <a:rPr lang="en-GB" i="1" dirty="0" smtClean="0">
                         <a:latin typeface="Cambria Math" panose="02040503050406030204" pitchFamily="18" charset="0"/>
                       </a:rPr>
-                      <m:t>256× 256 </m:t>
+                      <m:t>256</m:t>
+                    </m:r>
+                    <m:r>
+                      <a:rPr lang="en-GB" i="1" dirty="0" smtClean="0">
+                        <a:latin typeface="Cambria Math" panose="02040503050406030204" pitchFamily="18" charset="0"/>
+                      </a:rPr>
+                      <m:t>× </m:t>
+                    </m:r>
+                    <m:r>
+                      <a:rPr lang="en-GB" i="1" dirty="0" smtClean="0">
+                        <a:latin typeface="Cambria Math" panose="02040503050406030204" pitchFamily="18" charset="0"/>
+                      </a:rPr>
+                      <m:t>256</m:t>
+                    </m:r>
+                    <m:r>
+                      <a:rPr lang="en-GB" i="1" dirty="0" smtClean="0">
+                        <a:latin typeface="Cambria Math" panose="02040503050406030204" pitchFamily="18" charset="0"/>
+                      </a:rPr>
+                      <m:t> </m:t>
                     </m:r>
                   </m:oMath>
                 </a14:m>
@@ -10872,6 +11029,631 @@
   <p:cSld>
     <p:spTree>
       <p:nvGrpSpPr>
+        <p:cNvPr id="1" name="">
+          <a:extLst>
+            <a:ext uri="{FF2B5EF4-FFF2-40B4-BE49-F238E27FC236}">
+              <a16:creationId xmlns:a16="http://schemas.microsoft.com/office/drawing/2014/main" id="{CCC93AE8-2233-7FE2-DA1F-54DC219B9069}"/>
+            </a:ext>
+          </a:extLst>
+        </p:cNvPr>
+        <p:cNvGrpSpPr/>
+        <p:nvPr/>
+      </p:nvGrpSpPr>
+      <p:grpSpPr>
+        <a:xfrm>
+          <a:off x="0" y="0"/>
+          <a:ext cx="0" cy="0"/>
+          <a:chOff x="0" y="0"/>
+          <a:chExt cx="0" cy="0"/>
+        </a:xfrm>
+      </p:grpSpPr>
+      <p:sp>
+        <p:nvSpPr>
+          <p:cNvPr id="2" name="Title 1">
+            <a:extLst>
+              <a:ext uri="{FF2B5EF4-FFF2-40B4-BE49-F238E27FC236}">
+                <a16:creationId xmlns:a16="http://schemas.microsoft.com/office/drawing/2014/main" id="{00585007-194B-946D-147C-7C393036DEEE}"/>
+              </a:ext>
+            </a:extLst>
+          </p:cNvPr>
+          <p:cNvSpPr>
+            <a:spLocks noGrp="1"/>
+          </p:cNvSpPr>
+          <p:nvPr>
+            <p:ph type="title"/>
+          </p:nvPr>
+        </p:nvSpPr>
+        <p:spPr/>
+        <p:txBody>
+          <a:bodyPr/>
+          <a:lstStyle/>
+          <a:p>
+            <a:r>
+              <a:rPr lang="en-GB" dirty="0"/>
+              <a:t>The Inception model</a:t>
+            </a:r>
+            <a:endParaRPr lang="en-SG" dirty="0"/>
+          </a:p>
+        </p:txBody>
+      </p:sp>
+      <p:sp>
+        <p:nvSpPr>
+          <p:cNvPr id="4" name="Content Placeholder 3">
+            <a:extLst>
+              <a:ext uri="{FF2B5EF4-FFF2-40B4-BE49-F238E27FC236}">
+                <a16:creationId xmlns:a16="http://schemas.microsoft.com/office/drawing/2014/main" id="{38AEBE44-9AA0-0BD2-9DC3-65317E2DDB4F}"/>
+              </a:ext>
+            </a:extLst>
+          </p:cNvPr>
+          <p:cNvSpPr>
+            <a:spLocks noGrp="1"/>
+          </p:cNvSpPr>
+          <p:nvPr>
+            <p:ph sz="half" idx="1"/>
+          </p:nvPr>
+        </p:nvSpPr>
+        <p:spPr>
+          <a:xfrm>
+            <a:off x="838200" y="1825624"/>
+            <a:ext cx="5181600" cy="5032375"/>
+          </a:xfrm>
+        </p:spPr>
+        <p:txBody>
+          <a:bodyPr>
+            <a:normAutofit/>
+          </a:bodyPr>
+          <a:lstStyle/>
+          <a:p>
+            <a:pPr marL="0" indent="0">
+              <a:buNone/>
+            </a:pPr>
+            <a:r>
+              <a:rPr lang="en-GB" b="1" dirty="0"/>
+              <a:t>Definition (the </a:t>
+            </a:r>
+            <a:r>
+              <a:rPr lang="en-GB" b="1" dirty="0">
+                <a:solidFill>
+                  <a:srgbClr val="00B050"/>
+                </a:solidFill>
+              </a:rPr>
+              <a:t>Inception</a:t>
+            </a:r>
+            <a:r>
+              <a:rPr lang="en-GB" b="1" dirty="0"/>
+              <a:t> block):</a:t>
+            </a:r>
+          </a:p>
+          <a:p>
+            <a:pPr marL="0" indent="0">
+              <a:buNone/>
+            </a:pPr>
+            <a:r>
+              <a:rPr lang="en-GB" dirty="0"/>
+              <a:t>Introduced in [</a:t>
+            </a:r>
+            <a:r>
+              <a:rPr lang="en-SG" dirty="0"/>
+              <a:t>Szegedy2014</a:t>
+            </a:r>
+            <a:r>
+              <a:rPr lang="en-GB" dirty="0"/>
+              <a:t>], the </a:t>
+            </a:r>
+            <a:r>
+              <a:rPr lang="en-GB" b="1" dirty="0">
+                <a:solidFill>
+                  <a:srgbClr val="00B050"/>
+                </a:solidFill>
+              </a:rPr>
+              <a:t>Inception</a:t>
+            </a:r>
+            <a:r>
+              <a:rPr lang="en-GB" dirty="0"/>
+              <a:t> </a:t>
+            </a:r>
+            <a:r>
+              <a:rPr lang="en-GB" b="1" dirty="0"/>
+              <a:t>model</a:t>
+            </a:r>
+            <a:r>
+              <a:rPr lang="en-GB" dirty="0"/>
+              <a:t> proposes to use </a:t>
+            </a:r>
+            <a:r>
+              <a:rPr lang="en-GB" b="1" dirty="0"/>
+              <a:t>multiple Convolution filters, with different sizes, in parallel</a:t>
+            </a:r>
+            <a:r>
+              <a:rPr lang="en-GB" dirty="0"/>
+              <a:t>.</a:t>
+            </a:r>
+          </a:p>
+          <a:p>
+            <a:pPr marL="0" indent="0">
+              <a:buNone/>
+            </a:pPr>
+            <a:r>
+              <a:rPr lang="en-GB" dirty="0"/>
+              <a:t>Having different kernel sizes in parallel allows to process images with different salient sizes with the same network.</a:t>
+            </a:r>
+          </a:p>
+          <a:p>
+            <a:pPr marL="0" indent="0">
+              <a:buNone/>
+            </a:pPr>
+            <a:r>
+              <a:rPr lang="en-GB" dirty="0"/>
+              <a:t>A typical Inception block is shown on the right.</a:t>
+            </a:r>
+            <a:endParaRPr lang="en-SG" dirty="0"/>
+          </a:p>
+        </p:txBody>
+      </p:sp>
+      <p:sp>
+        <p:nvSpPr>
+          <p:cNvPr id="3" name="Content Placeholder 2">
+            <a:extLst>
+              <a:ext uri="{FF2B5EF4-FFF2-40B4-BE49-F238E27FC236}">
+                <a16:creationId xmlns:a16="http://schemas.microsoft.com/office/drawing/2014/main" id="{EED7477D-43B6-94B8-41DC-40E5ADCB2773}"/>
+              </a:ext>
+            </a:extLst>
+          </p:cNvPr>
+          <p:cNvSpPr>
+            <a:spLocks noGrp="1"/>
+          </p:cNvSpPr>
+          <p:nvPr>
+            <p:ph sz="half" idx="2"/>
+          </p:nvPr>
+        </p:nvSpPr>
+        <p:spPr>
+          <a:xfrm>
+            <a:off x="6172200" y="1825625"/>
+            <a:ext cx="5181600" cy="5032374"/>
+          </a:xfrm>
+        </p:spPr>
+        <p:txBody>
+          <a:bodyPr>
+            <a:normAutofit/>
+          </a:bodyPr>
+          <a:lstStyle/>
+          <a:p>
+            <a:pPr marL="0" indent="0">
+              <a:buNone/>
+            </a:pPr>
+            <a:r>
+              <a:rPr lang="en-GB" b="1" dirty="0">
+                <a:solidFill>
+                  <a:srgbClr val="00B050"/>
+                </a:solidFill>
+              </a:rPr>
+              <a:t>Inception</a:t>
+            </a:r>
+            <a:r>
+              <a:rPr lang="en-GB" dirty="0"/>
+              <a:t> is like asking multiple “experts” to look at images:</a:t>
+            </a:r>
+          </a:p>
+          <a:p>
+            <a:r>
+              <a:rPr lang="en-GB" dirty="0"/>
+              <a:t>One expert looks at very small details (1×1),</a:t>
+            </a:r>
+          </a:p>
+          <a:p>
+            <a:r>
+              <a:rPr lang="en-GB" dirty="0"/>
+              <a:t>One looks at local patterns (3×3),</a:t>
+            </a:r>
+          </a:p>
+          <a:p>
+            <a:r>
+              <a:rPr lang="en-GB" dirty="0"/>
+              <a:t>One looks at larger shapes (5×5),</a:t>
+            </a:r>
+          </a:p>
+          <a:p>
+            <a:r>
+              <a:rPr lang="en-GB" dirty="0"/>
+              <a:t>One summarizes information (pooling).</a:t>
+            </a:r>
+          </a:p>
+          <a:p>
+            <a:r>
+              <a:rPr lang="en-GB" dirty="0"/>
+              <a:t>Then, we concatenate/stack all their findings together into one richer representation.</a:t>
+            </a:r>
+          </a:p>
+          <a:p>
+            <a:endParaRPr lang="en-GB" dirty="0"/>
+          </a:p>
+        </p:txBody>
+      </p:sp>
+    </p:spTree>
+    <p:extLst>
+      <p:ext uri="{BB962C8B-B14F-4D97-AF65-F5344CB8AC3E}">
+        <p14:creationId xmlns:p14="http://schemas.microsoft.com/office/powerpoint/2010/main" val="618793995"/>
+      </p:ext>
+    </p:extLst>
+  </p:cSld>
+  <p:clrMapOvr>
+    <a:masterClrMapping/>
+  </p:clrMapOvr>
+</p:sld>
+</file>
+
+<file path=ppt/slides/slide4.xml><?xml version="1.0" encoding="utf-8"?>
+<p:sld xmlns:a="http://schemas.openxmlformats.org/drawingml/2006/main" xmlns:r="http://schemas.openxmlformats.org/officeDocument/2006/relationships" xmlns:p="http://schemas.openxmlformats.org/presentationml/2006/main">
+  <p:cSld>
+    <p:spTree>
+      <p:nvGrpSpPr>
+        <p:cNvPr id="1" name=""/>
+        <p:cNvGrpSpPr/>
+        <p:nvPr/>
+      </p:nvGrpSpPr>
+      <p:grpSpPr>
+        <a:xfrm>
+          <a:off x="0" y="0"/>
+          <a:ext cx="0" cy="0"/>
+          <a:chOff x="0" y="0"/>
+          <a:chExt cx="0" cy="0"/>
+        </a:xfrm>
+      </p:grpSpPr>
+      <p:sp>
+        <p:nvSpPr>
+          <p:cNvPr id="2" name="Title 1">
+            <a:extLst>
+              <a:ext uri="{FF2B5EF4-FFF2-40B4-BE49-F238E27FC236}">
+                <a16:creationId xmlns:a16="http://schemas.microsoft.com/office/drawing/2014/main" id="{49D40417-A4D3-4CE8-96E7-708E2439AE7B}"/>
+              </a:ext>
+            </a:extLst>
+          </p:cNvPr>
+          <p:cNvSpPr>
+            <a:spLocks noGrp="1"/>
+          </p:cNvSpPr>
+          <p:nvPr>
+            <p:ph type="title"/>
+          </p:nvPr>
+        </p:nvSpPr>
+        <p:spPr/>
+        <p:txBody>
+          <a:bodyPr/>
+          <a:lstStyle/>
+          <a:p>
+            <a:r>
+              <a:rPr lang="en-US" dirty="0"/>
+              <a:t>About this week (Week 4)</a:t>
+            </a:r>
+            <a:endParaRPr lang="en-GB" dirty="0"/>
+          </a:p>
+        </p:txBody>
+      </p:sp>
+      <p:sp>
+        <p:nvSpPr>
+          <p:cNvPr id="3" name="Content Placeholder 2">
+            <a:extLst>
+              <a:ext uri="{FF2B5EF4-FFF2-40B4-BE49-F238E27FC236}">
+                <a16:creationId xmlns:a16="http://schemas.microsoft.com/office/drawing/2014/main" id="{35995840-A9D9-479A-A34F-EA7DC229D38E}"/>
+              </a:ext>
+            </a:extLst>
+          </p:cNvPr>
+          <p:cNvSpPr>
+            <a:spLocks noGrp="1"/>
+          </p:cNvSpPr>
+          <p:nvPr>
+            <p:ph idx="1"/>
+          </p:nvPr>
+        </p:nvSpPr>
+        <p:spPr/>
+        <p:txBody>
+          <a:bodyPr/>
+          <a:lstStyle/>
+          <a:p>
+            <a:pPr marL="514350" indent="-514350">
+              <a:buFont typeface="+mj-lt"/>
+              <a:buAutoNum type="arabicPeriod" startAt="16"/>
+            </a:pPr>
+            <a:r>
+              <a:rPr lang="en-GB" dirty="0">
+                <a:solidFill>
+                  <a:schemeClr val="bg1">
+                    <a:lumMod val="65000"/>
+                  </a:schemeClr>
+                </a:solidFill>
+              </a:rPr>
+              <a:t>How to </a:t>
+            </a:r>
+            <a:r>
+              <a:rPr lang="en-GB" b="1" dirty="0">
+                <a:solidFill>
+                  <a:schemeClr val="bg1">
+                    <a:lumMod val="65000"/>
+                  </a:schemeClr>
+                </a:solidFill>
+              </a:rPr>
+              <a:t>train</a:t>
+            </a:r>
+            <a:r>
+              <a:rPr lang="en-GB" dirty="0">
+                <a:solidFill>
+                  <a:schemeClr val="bg1">
+                    <a:lumMod val="65000"/>
+                  </a:schemeClr>
+                </a:solidFill>
+              </a:rPr>
+              <a:t> our first Convolutional Neural Network on MNIST?</a:t>
+            </a:r>
+          </a:p>
+          <a:p>
+            <a:pPr marL="514350" indent="-514350">
+              <a:buFont typeface="+mj-lt"/>
+              <a:buAutoNum type="arabicPeriod" startAt="16"/>
+            </a:pPr>
+            <a:r>
+              <a:rPr lang="en-GB" dirty="0">
+                <a:solidFill>
+                  <a:schemeClr val="bg1">
+                    <a:lumMod val="65000"/>
+                  </a:schemeClr>
+                </a:solidFill>
+              </a:rPr>
+              <a:t>What are </a:t>
+            </a:r>
+            <a:r>
+              <a:rPr lang="en-GB" b="1" dirty="0">
+                <a:solidFill>
+                  <a:schemeClr val="bg1">
+                    <a:lumMod val="65000"/>
+                  </a:schemeClr>
+                </a:solidFill>
+              </a:rPr>
+              <a:t>other typical image processing layers </a:t>
+            </a:r>
+            <a:r>
+              <a:rPr lang="en-GB" dirty="0">
+                <a:solidFill>
+                  <a:schemeClr val="bg1">
+                    <a:lumMod val="65000"/>
+                  </a:schemeClr>
+                </a:solidFill>
+              </a:rPr>
+              <a:t>in Computer Vision and how are they implemented?</a:t>
+            </a:r>
+          </a:p>
+          <a:p>
+            <a:pPr marL="514350" indent="-514350">
+              <a:buFont typeface="+mj-lt"/>
+              <a:buAutoNum type="arabicPeriod" startAt="16"/>
+            </a:pPr>
+            <a:r>
+              <a:rPr lang="en-GB" dirty="0">
+                <a:solidFill>
+                  <a:schemeClr val="bg1">
+                    <a:lumMod val="65000"/>
+                  </a:schemeClr>
+                </a:solidFill>
+              </a:rPr>
+              <a:t>What is the </a:t>
+            </a:r>
+            <a:r>
+              <a:rPr lang="en-GB" b="1" dirty="0">
+                <a:solidFill>
+                  <a:schemeClr val="bg1">
+                    <a:lumMod val="65000"/>
+                  </a:schemeClr>
+                </a:solidFill>
+              </a:rPr>
+              <a:t>pooling layer</a:t>
+            </a:r>
+            <a:r>
+              <a:rPr lang="en-GB" dirty="0">
+                <a:solidFill>
+                  <a:schemeClr val="bg1">
+                    <a:lumMod val="65000"/>
+                  </a:schemeClr>
+                </a:solidFill>
+              </a:rPr>
+              <a:t>?</a:t>
+            </a:r>
+          </a:p>
+          <a:p>
+            <a:pPr marL="514350" indent="-514350">
+              <a:buFont typeface="+mj-lt"/>
+              <a:buAutoNum type="arabicPeriod" startAt="16"/>
+            </a:pPr>
+            <a:r>
+              <a:rPr lang="en-GB" dirty="0">
+                <a:solidFill>
+                  <a:schemeClr val="bg1">
+                    <a:lumMod val="65000"/>
+                  </a:schemeClr>
+                </a:solidFill>
+              </a:rPr>
+              <a:t>What is the </a:t>
+            </a:r>
+            <a:r>
+              <a:rPr lang="en-GB" b="1" dirty="0" err="1">
+                <a:solidFill>
+                  <a:schemeClr val="bg1">
+                    <a:lumMod val="65000"/>
+                  </a:schemeClr>
+                </a:solidFill>
+              </a:rPr>
+              <a:t>batchnorm</a:t>
+            </a:r>
+            <a:r>
+              <a:rPr lang="en-GB" dirty="0">
+                <a:solidFill>
+                  <a:schemeClr val="bg1">
+                    <a:lumMod val="65000"/>
+                  </a:schemeClr>
+                </a:solidFill>
+              </a:rPr>
+              <a:t> </a:t>
+            </a:r>
+            <a:r>
+              <a:rPr lang="en-GB" b="1" dirty="0">
+                <a:solidFill>
+                  <a:schemeClr val="bg1">
+                    <a:lumMod val="65000"/>
+                  </a:schemeClr>
+                </a:solidFill>
+              </a:rPr>
+              <a:t>layer</a:t>
+            </a:r>
+            <a:r>
+              <a:rPr lang="en-GB" dirty="0">
+                <a:solidFill>
+                  <a:schemeClr val="bg1">
+                    <a:lumMod val="65000"/>
+                  </a:schemeClr>
+                </a:solidFill>
+              </a:rPr>
+              <a:t>?</a:t>
+            </a:r>
+          </a:p>
+          <a:p>
+            <a:pPr marL="514350" indent="-514350">
+              <a:buFont typeface="+mj-lt"/>
+              <a:buAutoNum type="arabicPeriod" startAt="16"/>
+            </a:pPr>
+            <a:r>
+              <a:rPr lang="en-GB" dirty="0">
+                <a:solidFill>
+                  <a:schemeClr val="bg1">
+                    <a:lumMod val="65000"/>
+                  </a:schemeClr>
+                </a:solidFill>
+              </a:rPr>
+              <a:t>What is the </a:t>
+            </a:r>
+            <a:r>
+              <a:rPr lang="en-GB" b="1" dirty="0">
+                <a:solidFill>
+                  <a:schemeClr val="bg1">
+                    <a:lumMod val="65000"/>
+                  </a:schemeClr>
+                </a:solidFill>
+              </a:rPr>
+              <a:t>dropout</a:t>
+            </a:r>
+            <a:r>
+              <a:rPr lang="en-GB" dirty="0">
+                <a:solidFill>
+                  <a:schemeClr val="bg1">
+                    <a:lumMod val="65000"/>
+                  </a:schemeClr>
+                </a:solidFill>
+              </a:rPr>
+              <a:t> </a:t>
+            </a:r>
+            <a:r>
+              <a:rPr lang="en-GB" b="1" dirty="0">
+                <a:solidFill>
+                  <a:schemeClr val="bg1">
+                    <a:lumMod val="65000"/>
+                  </a:schemeClr>
+                </a:solidFill>
+              </a:rPr>
+              <a:t>layer</a:t>
+            </a:r>
+            <a:r>
+              <a:rPr lang="en-GB" dirty="0">
+                <a:solidFill>
+                  <a:schemeClr val="bg1">
+                    <a:lumMod val="65000"/>
+                  </a:schemeClr>
+                </a:solidFill>
+              </a:rPr>
+              <a:t>?</a:t>
+            </a:r>
+          </a:p>
+          <a:p>
+            <a:pPr marL="514350" indent="-514350">
+              <a:buFont typeface="+mj-lt"/>
+              <a:buAutoNum type="arabicPeriod" startAt="16"/>
+            </a:pPr>
+            <a:r>
+              <a:rPr lang="en-GB" dirty="0"/>
+              <a:t>What is </a:t>
+            </a:r>
+            <a:r>
+              <a:rPr lang="en-GB" b="1" dirty="0"/>
+              <a:t>data</a:t>
+            </a:r>
+            <a:r>
+              <a:rPr lang="en-GB" dirty="0"/>
+              <a:t> </a:t>
+            </a:r>
+            <a:r>
+              <a:rPr lang="en-GB" b="1" dirty="0"/>
+              <a:t>augmentation</a:t>
+            </a:r>
+            <a:r>
+              <a:rPr lang="en-GB" dirty="0"/>
+              <a:t> in Computer Vision?</a:t>
+            </a:r>
+          </a:p>
+          <a:p>
+            <a:pPr marL="514350" indent="-514350">
+              <a:buFont typeface="+mj-lt"/>
+              <a:buAutoNum type="arabicPeriod" startAt="16"/>
+            </a:pPr>
+            <a:r>
+              <a:rPr lang="en-GB" dirty="0"/>
+              <a:t>What are some </a:t>
+            </a:r>
+            <a:r>
+              <a:rPr lang="en-GB" b="1" dirty="0"/>
+              <a:t>milestone Computer Vision models </a:t>
+            </a:r>
+            <a:r>
+              <a:rPr lang="en-GB" dirty="0"/>
+              <a:t>and their </a:t>
+            </a:r>
+            <a:r>
+              <a:rPr lang="en-GB" b="1" dirty="0"/>
+              <a:t>contributions</a:t>
+            </a:r>
+            <a:r>
+              <a:rPr lang="en-GB" dirty="0"/>
+              <a:t> to the field of Deep Learning?</a:t>
+            </a:r>
+          </a:p>
+          <a:p>
+            <a:pPr marL="514350" indent="-514350">
+              <a:buFont typeface="+mj-lt"/>
+              <a:buAutoNum type="arabicPeriod" startAt="16"/>
+            </a:pPr>
+            <a:endParaRPr lang="en-GB" dirty="0"/>
+          </a:p>
+          <a:p>
+            <a:pPr marL="514350" indent="-514350">
+              <a:buFont typeface="+mj-lt"/>
+              <a:buAutoNum type="arabicPeriod" startAt="16"/>
+            </a:pPr>
+            <a:endParaRPr lang="en-GB" dirty="0"/>
+          </a:p>
+        </p:txBody>
+      </p:sp>
+    </p:spTree>
+    <p:extLst>
+      <p:ext uri="{BB962C8B-B14F-4D97-AF65-F5344CB8AC3E}">
+        <p14:creationId xmlns:p14="http://schemas.microsoft.com/office/powerpoint/2010/main" val="2274204591"/>
+      </p:ext>
+    </p:extLst>
+  </p:cSld>
+  <p:clrMapOvr>
+    <a:masterClrMapping/>
+  </p:clrMapOvr>
+</p:sld>
+</file>
+
+<file path=ppt/slides/slide40.xml><?xml version="1.0" encoding="utf-8"?>
+<p:sld xmlns:a="http://schemas.openxmlformats.org/drawingml/2006/main" xmlns:r="http://schemas.openxmlformats.org/officeDocument/2006/relationships" xmlns:p="http://schemas.openxmlformats.org/presentationml/2006/main">
+  <p:cSld>
+    <p:spTree>
+      <p:nvGrpSpPr>
         <p:cNvPr id="1" name=""/>
         <p:cNvGrpSpPr/>
         <p:nvPr/>
@@ -11087,12 +11869,18 @@
 </p:sld>
 </file>
 
-<file path=ppt/slides/slide4.xml><?xml version="1.0" encoding="utf-8"?>
+<file path=ppt/slides/slide41.xml><?xml version="1.0" encoding="utf-8"?>
 <p:sld xmlns:a="http://schemas.openxmlformats.org/drawingml/2006/main" xmlns:r="http://schemas.openxmlformats.org/officeDocument/2006/relationships" xmlns:p="http://schemas.openxmlformats.org/presentationml/2006/main">
   <p:cSld>
     <p:spTree>
       <p:nvGrpSpPr>
-        <p:cNvPr id="1" name=""/>
+        <p:cNvPr id="1" name="">
+          <a:extLst>
+            <a:ext uri="{FF2B5EF4-FFF2-40B4-BE49-F238E27FC236}">
+              <a16:creationId xmlns:a16="http://schemas.microsoft.com/office/drawing/2014/main" id="{BA7E7993-B7B6-DDAF-AC9A-91CD15A0121D}"/>
+            </a:ext>
+          </a:extLst>
+        </p:cNvPr>
         <p:cNvGrpSpPr/>
         <p:nvPr/>
       </p:nvGrpSpPr>
@@ -11109,7 +11897,7 @@
           <p:cNvPr id="2" name="Title 1">
             <a:extLst>
               <a:ext uri="{FF2B5EF4-FFF2-40B4-BE49-F238E27FC236}">
-                <a16:creationId xmlns:a16="http://schemas.microsoft.com/office/drawing/2014/main" id="{49D40417-A4D3-4CE8-96E7-708E2439AE7B}"/>
+                <a16:creationId xmlns:a16="http://schemas.microsoft.com/office/drawing/2014/main" id="{62036F68-A5D8-577C-81C7-8ACBA8E6C80E}"/>
               </a:ext>
             </a:extLst>
           </p:cNvPr>
@@ -11126,325 +11914,246 @@
           <a:lstStyle/>
           <a:p>
             <a:r>
-              <a:rPr lang="en-US" dirty="0"/>
-              <a:t>About this week (Week 4)</a:t>
-            </a:r>
-            <a:endParaRPr lang="en-GB" dirty="0"/>
-          </a:p>
-        </p:txBody>
-      </p:sp>
-      <p:sp>
-        <p:nvSpPr>
-          <p:cNvPr id="3" name="Content Placeholder 2">
-            <a:extLst>
-              <a:ext uri="{FF2B5EF4-FFF2-40B4-BE49-F238E27FC236}">
-                <a16:creationId xmlns:a16="http://schemas.microsoft.com/office/drawing/2014/main" id="{35995840-A9D9-479A-A34F-EA7DC229D38E}"/>
-              </a:ext>
-            </a:extLst>
-          </p:cNvPr>
-          <p:cNvSpPr>
-            <a:spLocks noGrp="1"/>
-          </p:cNvSpPr>
-          <p:nvPr>
-            <p:ph idx="1"/>
-          </p:nvPr>
-        </p:nvSpPr>
-        <p:spPr/>
-        <p:txBody>
-          <a:bodyPr/>
-          <a:lstStyle/>
-          <a:p>
-            <a:pPr marL="514350" indent="-514350">
-              <a:buFont typeface="+mj-lt"/>
-              <a:buAutoNum type="arabicPeriod" startAt="16"/>
-            </a:pPr>
-            <a:r>
-              <a:rPr lang="en-GB" dirty="0">
+              <a:rPr lang="en-GB" dirty="0"/>
+              <a:t>What Are the Multiple </a:t>
+            </a:r>
+            <a:r>
+              <a:rPr lang="en-GB" b="1" dirty="0">
                 <a:solidFill>
-                  <a:schemeClr val="bg1">
-                    <a:lumMod val="65000"/>
-                  </a:schemeClr>
+                  <a:srgbClr val="FFC000"/>
                 </a:solidFill>
               </a:rPr>
-              <a:t>How to </a:t>
-            </a:r>
-            <a:r>
-              <a:rPr lang="en-GB" b="1" dirty="0">
-                <a:solidFill>
-                  <a:schemeClr val="bg1">
-                    <a:lumMod val="65000"/>
-                  </a:schemeClr>
-                </a:solidFill>
-              </a:rPr>
-              <a:t>train</a:t>
-            </a:r>
-            <a:r>
-              <a:rPr lang="en-GB" dirty="0">
-                <a:solidFill>
-                  <a:schemeClr val="bg1">
-                    <a:lumMod val="65000"/>
-                  </a:schemeClr>
-                </a:solidFill>
-              </a:rPr>
-              <a:t> our first Convolutional Neural Network on MNIST?</a:t>
-            </a:r>
-          </a:p>
-          <a:p>
-            <a:pPr marL="514350" indent="-514350">
-              <a:buFont typeface="+mj-lt"/>
-              <a:buAutoNum type="arabicPeriod" startAt="16"/>
-            </a:pPr>
-            <a:r>
-              <a:rPr lang="en-GB" dirty="0">
-                <a:solidFill>
-                  <a:schemeClr val="bg1">
-                    <a:lumMod val="65000"/>
-                  </a:schemeClr>
-                </a:solidFill>
-              </a:rPr>
-              <a:t>What are </a:t>
-            </a:r>
-            <a:r>
-              <a:rPr lang="en-GB" b="1" dirty="0">
-                <a:solidFill>
-                  <a:schemeClr val="bg1">
-                    <a:lumMod val="65000"/>
-                  </a:schemeClr>
-                </a:solidFill>
-              </a:rPr>
-              <a:t>other typical image processing layers </a:t>
-            </a:r>
-            <a:r>
-              <a:rPr lang="en-GB" dirty="0">
-                <a:solidFill>
-                  <a:schemeClr val="bg1">
-                    <a:lumMod val="65000"/>
-                  </a:schemeClr>
-                </a:solidFill>
-              </a:rPr>
-              <a:t>in Computer Vision and how are they implemented?</a:t>
-            </a:r>
-          </a:p>
-          <a:p>
-            <a:pPr marL="514350" indent="-514350">
-              <a:buFont typeface="+mj-lt"/>
-              <a:buAutoNum type="arabicPeriod" startAt="16"/>
-            </a:pPr>
-            <a:r>
-              <a:rPr lang="en-GB" dirty="0">
-                <a:solidFill>
-                  <a:schemeClr val="bg1">
-                    <a:lumMod val="65000"/>
-                  </a:schemeClr>
-                </a:solidFill>
-              </a:rPr>
-              <a:t>What is the </a:t>
-            </a:r>
-            <a:r>
-              <a:rPr lang="en-GB" b="1" dirty="0">
-                <a:solidFill>
-                  <a:schemeClr val="bg1">
-                    <a:lumMod val="65000"/>
-                  </a:schemeClr>
-                </a:solidFill>
-              </a:rPr>
-              <a:t>pooling layer</a:t>
-            </a:r>
-            <a:r>
-              <a:rPr lang="en-GB" dirty="0">
-                <a:solidFill>
-                  <a:schemeClr val="bg1">
-                    <a:lumMod val="65000"/>
-                  </a:schemeClr>
-                </a:solidFill>
-              </a:rPr>
-              <a:t>?</a:t>
-            </a:r>
-          </a:p>
-          <a:p>
-            <a:pPr marL="514350" indent="-514350">
-              <a:buFont typeface="+mj-lt"/>
-              <a:buAutoNum type="arabicPeriod" startAt="16"/>
-            </a:pPr>
-            <a:r>
-              <a:rPr lang="en-GB" dirty="0">
-                <a:solidFill>
-                  <a:schemeClr val="bg1">
-                    <a:lumMod val="65000"/>
-                  </a:schemeClr>
-                </a:solidFill>
-              </a:rPr>
-              <a:t>What is the </a:t>
-            </a:r>
-            <a:r>
-              <a:rPr lang="en-GB" b="1" dirty="0" err="1">
-                <a:solidFill>
-                  <a:schemeClr val="bg1">
-                    <a:lumMod val="65000"/>
-                  </a:schemeClr>
-                </a:solidFill>
-              </a:rPr>
-              <a:t>batchnorm</a:t>
-            </a:r>
-            <a:r>
-              <a:rPr lang="en-GB" dirty="0">
-                <a:solidFill>
-                  <a:schemeClr val="bg1">
-                    <a:lumMod val="65000"/>
-                  </a:schemeClr>
-                </a:solidFill>
-              </a:rPr>
-              <a:t> </a:t>
-            </a:r>
-            <a:r>
-              <a:rPr lang="en-GB" b="1" dirty="0">
-                <a:solidFill>
-                  <a:schemeClr val="bg1">
-                    <a:lumMod val="65000"/>
-                  </a:schemeClr>
-                </a:solidFill>
-              </a:rPr>
-              <a:t>layer</a:t>
-            </a:r>
-            <a:r>
-              <a:rPr lang="en-GB" dirty="0">
-                <a:solidFill>
-                  <a:schemeClr val="bg1">
-                    <a:lumMod val="65000"/>
-                  </a:schemeClr>
-                </a:solidFill>
-              </a:rPr>
-              <a:t>?</a:t>
-            </a:r>
-          </a:p>
-          <a:p>
-            <a:pPr marL="514350" indent="-514350">
-              <a:buFont typeface="+mj-lt"/>
-              <a:buAutoNum type="arabicPeriod" startAt="16"/>
-            </a:pPr>
-            <a:r>
-              <a:rPr lang="en-GB" dirty="0">
-                <a:solidFill>
-                  <a:schemeClr val="bg1">
-                    <a:lumMod val="65000"/>
-                  </a:schemeClr>
-                </a:solidFill>
-              </a:rPr>
-              <a:t>What is the </a:t>
-            </a:r>
-            <a:r>
-              <a:rPr lang="en-GB" b="1" dirty="0">
-                <a:solidFill>
-                  <a:schemeClr val="bg1">
-                    <a:lumMod val="65000"/>
-                  </a:schemeClr>
-                </a:solidFill>
-              </a:rPr>
-              <a:t>dropout</a:t>
-            </a:r>
-            <a:r>
-              <a:rPr lang="en-GB" dirty="0">
-                <a:solidFill>
-                  <a:schemeClr val="bg1">
-                    <a:lumMod val="65000"/>
-                  </a:schemeClr>
-                </a:solidFill>
-              </a:rPr>
-              <a:t> </a:t>
-            </a:r>
-            <a:r>
-              <a:rPr lang="en-GB" b="1" dirty="0">
-                <a:solidFill>
-                  <a:schemeClr val="bg1">
-                    <a:lumMod val="65000"/>
-                  </a:schemeClr>
-                </a:solidFill>
-              </a:rPr>
-              <a:t>layer</a:t>
-            </a:r>
-            <a:r>
-              <a:rPr lang="en-GB" dirty="0">
-                <a:solidFill>
-                  <a:schemeClr val="bg1">
-                    <a:lumMod val="65000"/>
-                  </a:schemeClr>
-                </a:solidFill>
-              </a:rPr>
-              <a:t>?</a:t>
-            </a:r>
-          </a:p>
-          <a:p>
-            <a:pPr marL="514350" indent="-514350">
-              <a:buFont typeface="+mj-lt"/>
-              <a:buAutoNum type="arabicPeriod" startAt="16"/>
-            </a:pPr>
-            <a:r>
-              <a:rPr lang="en-GB" dirty="0"/>
-              <a:t>What is </a:t>
-            </a:r>
-            <a:r>
-              <a:rPr lang="en-GB" b="1" dirty="0"/>
-              <a:t>data</a:t>
-            </a:r>
-            <a:r>
-              <a:rPr lang="en-GB" dirty="0"/>
-              <a:t> </a:t>
-            </a:r>
-            <a:r>
-              <a:rPr lang="en-GB" b="1" dirty="0"/>
-              <a:t>augmentation</a:t>
-            </a:r>
-            <a:r>
-              <a:rPr lang="en-GB" dirty="0"/>
-              <a:t> in Computer Vision?</a:t>
-            </a:r>
-          </a:p>
-          <a:p>
-            <a:pPr marL="514350" indent="-514350">
-              <a:buFont typeface="+mj-lt"/>
-              <a:buAutoNum type="arabicPeriod" startAt="16"/>
-            </a:pPr>
-            <a:r>
-              <a:rPr lang="en-GB" dirty="0"/>
-              <a:t>What are some </a:t>
-            </a:r>
-            <a:r>
-              <a:rPr lang="en-GB" b="1" dirty="0"/>
-              <a:t>milestone Computer Vision models </a:t>
-            </a:r>
-            <a:r>
-              <a:rPr lang="en-GB" dirty="0"/>
-              <a:t>and their </a:t>
-            </a:r>
-            <a:r>
-              <a:rPr lang="en-GB" b="1" dirty="0"/>
-              <a:t>contributions</a:t>
-            </a:r>
-            <a:r>
-              <a:rPr lang="en-GB" dirty="0"/>
-              <a:t> to the field of Deep Learning?</a:t>
-            </a:r>
-          </a:p>
-          <a:p>
-            <a:pPr marL="514350" indent="-514350">
-              <a:buFont typeface="+mj-lt"/>
-              <a:buAutoNum type="arabicPeriod" startAt="16"/>
-            </a:pPr>
-            <a:endParaRPr lang="en-GB" dirty="0"/>
-          </a:p>
-          <a:p>
-            <a:pPr marL="514350" indent="-514350">
-              <a:buFont typeface="+mj-lt"/>
-              <a:buAutoNum type="arabicPeriod" startAt="16"/>
-            </a:pPr>
-            <a:endParaRPr lang="en-GB" dirty="0"/>
-          </a:p>
-        </p:txBody>
-      </p:sp>
+              <a:t>Yellow</a:t>
+            </a:r>
+            <a:r>
+              <a:rPr lang="en-GB" dirty="0"/>
+              <a:t> Outputs?</a:t>
+            </a:r>
+            <a:endParaRPr lang="en-SG" dirty="0"/>
+          </a:p>
+        </p:txBody>
+      </p:sp>
+      <mc:AlternateContent xmlns:mc="http://schemas.openxmlformats.org/markup-compatibility/2006">
+        <mc:Choice xmlns:a14="http://schemas.microsoft.com/office/drawing/2010/main" Requires="a14">
+          <p:sp>
+            <p:nvSpPr>
+              <p:cNvPr id="4" name="Content Placeholder 3">
+                <a:extLst>
+                  <a:ext uri="{FF2B5EF4-FFF2-40B4-BE49-F238E27FC236}">
+                    <a16:creationId xmlns:a16="http://schemas.microsoft.com/office/drawing/2014/main" id="{76E28ACE-9F17-186D-BD8A-ADCED80C3ADF}"/>
+                  </a:ext>
+                </a:extLst>
+              </p:cNvPr>
+              <p:cNvSpPr>
+                <a:spLocks noGrp="1"/>
+              </p:cNvSpPr>
+              <p:nvPr>
+                <p:ph idx="1"/>
+              </p:nvPr>
+            </p:nvSpPr>
+            <p:spPr>
+              <a:xfrm>
+                <a:off x="838200" y="1825624"/>
+                <a:ext cx="10515600" cy="5032375"/>
+              </a:xfrm>
+            </p:spPr>
+            <p:txBody>
+              <a:bodyPr>
+                <a:normAutofit/>
+              </a:bodyPr>
+              <a:lstStyle/>
+              <a:p>
+                <a:pPr marL="0" indent="0">
+                  <a:buNone/>
+                </a:pPr>
+                <a:r>
+                  <a:rPr lang="en-GB" b="1" dirty="0"/>
+                  <a:t>These </a:t>
+                </a:r>
+                <a:r>
+                  <a:rPr lang="en-GB" b="1" dirty="0">
+                    <a:solidFill>
+                      <a:srgbClr val="FFC000"/>
+                    </a:solidFill>
+                  </a:rPr>
+                  <a:t>yellow</a:t>
+                </a:r>
+                <a:r>
+                  <a:rPr lang="en-GB" b="1" dirty="0"/>
+                  <a:t> outputs are auxiliary classifiers, not predictions.</a:t>
+                </a:r>
+                <a:endParaRPr lang="en-GB" dirty="0"/>
+              </a:p>
+              <a:p>
+                <a:pPr marL="0" indent="0">
+                  <a:buNone/>
+                </a:pPr>
+                <a:r>
+                  <a:rPr lang="en-GB" dirty="0"/>
+                  <a:t>In Inception v1 (</a:t>
+                </a:r>
+                <a:r>
+                  <a:rPr lang="en-GB" dirty="0" err="1"/>
+                  <a:t>GoogLeNet</a:t>
+                </a:r>
+                <a:r>
+                  <a:rPr lang="en-GB" dirty="0"/>
+                  <a:t>), some intermediate layers produce temporary outputs. They act as a small classifier attached to intermediate layers, which compute an auxiliary loss during training. These can be used to improve gradient flow and stabilize learning</a:t>
+                </a:r>
+              </a:p>
+              <a:p>
+                <a:pPr marL="0" indent="0">
+                  <a:buNone/>
+                </a:pPr>
+                <a:r>
+                  <a:rPr lang="en-GB" b="1" dirty="0"/>
+                  <a:t>During training: </a:t>
+                </a:r>
+                <a:r>
+                  <a:rPr lang="en-GB" dirty="0"/>
+                  <a:t>We use a loss that includes two components for main output and auxiliary outputs, as </a:t>
+                </a:r>
+                <a14:m>
+                  <m:oMath xmlns:m="http://schemas.openxmlformats.org/officeDocument/2006/math">
+                    <m:r>
+                      <a:rPr lang="en-GB" i="1"/>
+                      <m:t>𝐿</m:t>
+                    </m:r>
+                    <m:r>
+                      <a:rPr lang="en-GB"/>
+                      <m:t>=</m:t>
+                    </m:r>
+                    <m:sSub>
+                      <m:sSubPr>
+                        <m:ctrlPr>
+                          <a:rPr lang="ar-AE" i="1"/>
+                        </m:ctrlPr>
+                      </m:sSubPr>
+                      <m:e>
+                        <m:r>
+                          <a:rPr lang="ar-AE" i="1"/>
+                          <m:t>𝐿</m:t>
+                        </m:r>
+                      </m:e>
+                      <m:sub>
+                        <m:r>
+                          <a:rPr lang="ar-AE" i="1"/>
+                          <m:t>𝑚𝑎𝑖𝑛</m:t>
+                        </m:r>
+                      </m:sub>
+                    </m:sSub>
+                    <m:r>
+                      <a:rPr lang="ar-AE"/>
+                      <m:t>+</m:t>
+                    </m:r>
+                    <m:r>
+                      <a:rPr lang="ar-AE" i="1"/>
+                      <m:t>𝛼</m:t>
+                    </m:r>
+                    <m:sSub>
+                      <m:sSubPr>
+                        <m:ctrlPr>
+                          <a:rPr lang="ar-AE" i="1"/>
+                        </m:ctrlPr>
+                      </m:sSubPr>
+                      <m:e>
+                        <m:r>
+                          <a:rPr lang="ar-AE" i="1"/>
+                          <m:t>𝐿</m:t>
+                        </m:r>
+                      </m:e>
+                      <m:sub>
+                        <m:r>
+                          <a:rPr lang="ar-AE" i="1"/>
+                          <m:t>𝑎𝑢𝑥</m:t>
+                        </m:r>
+                      </m:sub>
+                    </m:sSub>
+                  </m:oMath>
+                </a14:m>
+                <a:r>
+                  <a:rPr lang="fr-FR" dirty="0"/>
+                  <a:t>.</a:t>
+                </a:r>
+                <a:endParaRPr lang="ar-AE" dirty="0"/>
+              </a:p>
+              <a:p>
+                <a:pPr marL="0" indent="0">
+                  <a:buNone/>
+                </a:pPr>
+                <a:r>
+                  <a:rPr lang="en-GB" b="1" dirty="0"/>
+                  <a:t>During inference: </a:t>
+                </a:r>
+                <a:r>
+                  <a:rPr lang="en-GB" dirty="0"/>
+                  <a:t>Auxiliary heads removed, only final classifier is used.</a:t>
+                </a:r>
+              </a:p>
+              <a:p>
+                <a:pPr marL="0" indent="0">
+                  <a:buNone/>
+                </a:pPr>
+                <a:r>
+                  <a:rPr lang="en-GB" b="1" dirty="0"/>
+                  <a:t>Intuition: </a:t>
+                </a:r>
+                <a:r>
+                  <a:rPr lang="en-GB" dirty="0"/>
+                  <a:t>Like giving feedback halfway through the network instead of only at the end to help it train better.</a:t>
+                </a:r>
+              </a:p>
+            </p:txBody>
+          </p:sp>
+        </mc:Choice>
+        <mc:Fallback>
+          <p:sp>
+            <p:nvSpPr>
+              <p:cNvPr id="4" name="Content Placeholder 3">
+                <a:extLst>
+                  <a:ext uri="{FF2B5EF4-FFF2-40B4-BE49-F238E27FC236}">
+                    <a16:creationId xmlns:a16="http://schemas.microsoft.com/office/drawing/2014/main" id="{76E28ACE-9F17-186D-BD8A-ADCED80C3ADF}"/>
+                  </a:ext>
+                </a:extLst>
+              </p:cNvPr>
+              <p:cNvSpPr>
+                <a:spLocks noGrp="1" noRot="1" noChangeAspect="1" noMove="1" noResize="1" noEditPoints="1" noAdjustHandles="1" noChangeArrowheads="1" noChangeShapeType="1" noTextEdit="1"/>
+              </p:cNvSpPr>
+              <p:nvPr>
+                <p:ph idx="1"/>
+              </p:nvPr>
+            </p:nvSpPr>
+            <p:spPr>
+              <a:xfrm>
+                <a:off x="838200" y="1825624"/>
+                <a:ext cx="10515600" cy="5032375"/>
+              </a:xfrm>
+              <a:blipFill>
+                <a:blip r:embed="rId2"/>
+                <a:stretch>
+                  <a:fillRect l="-1217" t="-1937"/>
+                </a:stretch>
+              </a:blipFill>
+            </p:spPr>
+            <p:txBody>
+              <a:bodyPr/>
+              <a:lstStyle/>
+              <a:p>
+                <a:r>
+                  <a:rPr lang="en-GB">
+                    <a:noFill/>
+                  </a:rPr>
+                  <a:t> </a:t>
+                </a:r>
+              </a:p>
+            </p:txBody>
+          </p:sp>
+        </mc:Fallback>
+      </mc:AlternateContent>
     </p:spTree>
     <p:extLst>
       <p:ext uri="{BB962C8B-B14F-4D97-AF65-F5344CB8AC3E}">
-        <p14:creationId xmlns:p14="http://schemas.microsoft.com/office/powerpoint/2010/main" val="2274204591"/>
+        <p14:creationId xmlns:p14="http://schemas.microsoft.com/office/powerpoint/2010/main" val="622754831"/>
       </p:ext>
     </p:extLst>
   </p:cSld>
@@ -11454,7 +12163,7 @@
 </p:sld>
 </file>
 
-<file path=ppt/slides/slide40.xml><?xml version="1.0" encoding="utf-8"?>
+<file path=ppt/slides/slide42.xml><?xml version="1.0" encoding="utf-8"?>
 <p:sld xmlns:a="http://schemas.openxmlformats.org/drawingml/2006/main" xmlns:r="http://schemas.openxmlformats.org/officeDocument/2006/relationships" xmlns:p="http://schemas.openxmlformats.org/presentationml/2006/main">
   <p:cSld>
     <p:spTree>
@@ -11580,7 +12289,7 @@
 </p:sld>
 </file>
 
-<file path=ppt/slides/slide41.xml><?xml version="1.0" encoding="utf-8"?>
+<file path=ppt/slides/slide43.xml><?xml version="1.0" encoding="utf-8"?>
 <p:sld xmlns:a="http://schemas.openxmlformats.org/drawingml/2006/main" xmlns:r="http://schemas.openxmlformats.org/officeDocument/2006/relationships" xmlns:p="http://schemas.openxmlformats.org/presentationml/2006/main">
   <p:cSld>
     <p:spTree>
@@ -11652,8 +12361,8 @@
         </p:nvSpPr>
         <p:spPr>
           <a:xfrm>
-            <a:off x="838200" y="1825624"/>
-            <a:ext cx="10515600" cy="5032375"/>
+            <a:off x="838199" y="1825624"/>
+            <a:ext cx="10874829" cy="5032375"/>
           </a:xfrm>
         </p:spPr>
         <p:txBody>
@@ -11666,20 +12375,42 @@
               <a:buNone/>
             </a:pPr>
             <a:r>
-              <a:rPr lang="en-GB" dirty="0" err="1"/>
-              <a:t>EfficientNet</a:t>
-            </a:r>
-            <a:r>
-              <a:rPr lang="en-GB" dirty="0"/>
-              <a:t> followed up on the salient problem by proposing </a:t>
-            </a:r>
-            <a:r>
               <a:rPr lang="en-GB" b="1" dirty="0"/>
-              <a:t>a scaling method that uniformly scales all dimensions of depth, width and resolution </a:t>
-            </a:r>
-            <a:r>
-              <a:rPr lang="en-GB" dirty="0"/>
-              <a:t>using a compound coefficient.</a:t>
+              <a:t>Problem: </a:t>
+            </a:r>
+            <a:r>
+              <a:rPr lang="en-GB" dirty="0"/>
+              <a:t>When improving CNNs, we can typically scale:</a:t>
+            </a:r>
+          </a:p>
+          <a:p>
+            <a:r>
+              <a:rPr lang="en-GB" b="1" dirty="0"/>
+              <a:t>Depth</a:t>
+            </a:r>
+            <a:r>
+              <a:rPr lang="en-GB" dirty="0"/>
+              <a:t> → more layers in the network</a:t>
+            </a:r>
+          </a:p>
+          <a:p>
+            <a:r>
+              <a:rPr lang="en-GB" b="1" dirty="0"/>
+              <a:t>Width</a:t>
+            </a:r>
+            <a:r>
+              <a:rPr lang="en-GB" dirty="0"/>
+              <a:t> → more kernels per Conv layer, more neurons in Linear layers</a:t>
+            </a:r>
+          </a:p>
+          <a:p>
+            <a:r>
+              <a:rPr lang="en-GB" b="1" dirty="0"/>
+              <a:t>Resolution</a:t>
+            </a:r>
+            <a:r>
+              <a:rPr lang="en-GB" dirty="0"/>
+              <a:t> → larger input images</a:t>
             </a:r>
           </a:p>
           <a:p>
@@ -11688,15 +12419,25 @@
             </a:pPr>
             <a:r>
               <a:rPr lang="en-GB" dirty="0"/>
-              <a:t>The compound scaling method is justified by the intuition that </a:t>
-            </a:r>
-            <a:r>
-              <a:rPr lang="en-GB" b="1" dirty="0"/>
-              <a:t>if the input image is bigger, then the network needs more layers to increase the receptive field and more channels are needed to capture more fine-grained patterns on the bigger image</a:t>
-            </a:r>
-            <a:r>
-              <a:rPr lang="en-GB" dirty="0"/>
-              <a:t>.</a:t>
+              <a:t>But scaling only one dimension is inefficient:</a:t>
+            </a:r>
+          </a:p>
+          <a:p>
+            <a:r>
+              <a:rPr lang="en-GB" dirty="0"/>
+              <a:t>Only deeper → harder optimization, vanishing gradients</a:t>
+            </a:r>
+          </a:p>
+          <a:p>
+            <a:r>
+              <a:rPr lang="en-GB" dirty="0"/>
+              <a:t>Only wider → many parameters, diminishing returns</a:t>
+            </a:r>
+          </a:p>
+          <a:p>
+            <a:r>
+              <a:rPr lang="en-GB" dirty="0"/>
+              <a:t>Only higher resolution → huge compute cost</a:t>
             </a:r>
           </a:p>
           <a:p>
@@ -11704,9 +12445,35 @@
               <a:buNone/>
             </a:pPr>
             <a:r>
-              <a:rPr lang="en-GB" dirty="0"/>
-              <a:t>Different sizes for the pre-trained model were released, ranging from b0 (smaller) to b7 (larger).</a:t>
-            </a:r>
+              <a:rPr lang="en-GB" b="1" dirty="0"/>
+              <a:t>Key idea: </a:t>
+            </a:r>
+            <a:r>
+              <a:rPr lang="en-GB" dirty="0"/>
+              <a:t>Performance improves best when these three dimensions are scaled </a:t>
+            </a:r>
+            <a:r>
+              <a:rPr lang="en-GB" b="1" dirty="0"/>
+              <a:t>together</a:t>
+            </a:r>
+            <a:r>
+              <a:rPr lang="en-GB" dirty="0"/>
+              <a:t>, not independently. We need a </a:t>
+            </a:r>
+            <a:r>
+              <a:rPr lang="en-GB" b="1" dirty="0"/>
+              <a:t>balanced scaling strategy</a:t>
+            </a:r>
+            <a:r>
+              <a:rPr lang="en-GB" dirty="0"/>
+              <a:t>.</a:t>
+            </a:r>
+          </a:p>
+          <a:p>
+            <a:pPr marL="0" indent="0">
+              <a:buNone/>
+            </a:pPr>
+            <a:endParaRPr lang="en-GB" dirty="0"/>
           </a:p>
         </p:txBody>
       </p:sp>
@@ -11723,7 +12490,7 @@
 </p:sld>
 </file>
 
-<file path=ppt/slides/slide42.xml><?xml version="1.0" encoding="utf-8"?>
+<file path=ppt/slides/slide44.xml><?xml version="1.0" encoding="utf-8"?>
 <p:sld xmlns:a="http://schemas.openxmlformats.org/drawingml/2006/main" xmlns:r="http://schemas.openxmlformats.org/officeDocument/2006/relationships" xmlns:p="http://schemas.openxmlformats.org/presentationml/2006/main">
   <p:cSld>
     <p:spTree>
@@ -11839,7 +12606,7 @@
             </a:r>
             <a:r>
               <a:rPr lang="en-GB" dirty="0"/>
-              <a:t> model proposed a compound scaling method to adjust the size of the layers and the number of trainable parameters of the Neural Network, dynamically.</a:t>
+              <a:t> model proposed a compound scaling method to adjust the size of the layers and the number of trainable parameters of the Neural Network, jointly.</a:t>
             </a:r>
           </a:p>
           <a:p>
@@ -11883,7 +12650,658 @@
 </p:sld>
 </file>
 
-<file path=ppt/slides/slide43.xml><?xml version="1.0" encoding="utf-8"?>
+<file path=ppt/slides/slide45.xml><?xml version="1.0" encoding="utf-8"?>
+<p:sld xmlns:a="http://schemas.openxmlformats.org/drawingml/2006/main" xmlns:r="http://schemas.openxmlformats.org/officeDocument/2006/relationships" xmlns:p="http://schemas.openxmlformats.org/presentationml/2006/main">
+  <p:cSld>
+    <p:spTree>
+      <p:nvGrpSpPr>
+        <p:cNvPr id="1" name="">
+          <a:extLst>
+            <a:ext uri="{FF2B5EF4-FFF2-40B4-BE49-F238E27FC236}">
+              <a16:creationId xmlns:a16="http://schemas.microsoft.com/office/drawing/2014/main" id="{2FA63558-A2B1-5C0A-3964-FEE68B988646}"/>
+            </a:ext>
+          </a:extLst>
+        </p:cNvPr>
+        <p:cNvGrpSpPr/>
+        <p:nvPr/>
+      </p:nvGrpSpPr>
+      <p:grpSpPr>
+        <a:xfrm>
+          <a:off x="0" y="0"/>
+          <a:ext cx="0" cy="0"/>
+          <a:chOff x="0" y="0"/>
+          <a:chExt cx="0" cy="0"/>
+        </a:xfrm>
+      </p:grpSpPr>
+      <p:sp>
+        <p:nvSpPr>
+          <p:cNvPr id="2" name="Title 1">
+            <a:extLst>
+              <a:ext uri="{FF2B5EF4-FFF2-40B4-BE49-F238E27FC236}">
+                <a16:creationId xmlns:a16="http://schemas.microsoft.com/office/drawing/2014/main" id="{EB0D5098-2EC4-1A76-50A1-1FBE41B3E086}"/>
+              </a:ext>
+            </a:extLst>
+          </p:cNvPr>
+          <p:cNvSpPr>
+            <a:spLocks noGrp="1"/>
+          </p:cNvSpPr>
+          <p:nvPr>
+            <p:ph type="title"/>
+          </p:nvPr>
+        </p:nvSpPr>
+        <p:spPr/>
+        <p:txBody>
+          <a:bodyPr/>
+          <a:lstStyle/>
+          <a:p>
+            <a:r>
+              <a:rPr lang="en-GB" dirty="0"/>
+              <a:t>The </a:t>
+            </a:r>
+            <a:r>
+              <a:rPr lang="en-GB" dirty="0" err="1"/>
+              <a:t>EfficientNet</a:t>
+            </a:r>
+            <a:r>
+              <a:rPr lang="en-GB" dirty="0"/>
+              <a:t> model</a:t>
+            </a:r>
+            <a:endParaRPr lang="en-SG" dirty="0"/>
+          </a:p>
+        </p:txBody>
+      </p:sp>
+      <mc:AlternateContent xmlns:mc="http://schemas.openxmlformats.org/markup-compatibility/2006">
+        <mc:Choice xmlns:a14="http://schemas.microsoft.com/office/drawing/2010/main" Requires="a14">
+          <p:sp>
+            <p:nvSpPr>
+              <p:cNvPr id="3" name="Content Placeholder 2">
+                <a:extLst>
+                  <a:ext uri="{FF2B5EF4-FFF2-40B4-BE49-F238E27FC236}">
+                    <a16:creationId xmlns:a16="http://schemas.microsoft.com/office/drawing/2014/main" id="{6FE0DC42-A078-2D9A-98DC-AEF9FA0D3A70}"/>
+                  </a:ext>
+                </a:extLst>
+              </p:cNvPr>
+              <p:cNvSpPr>
+                <a:spLocks noGrp="1"/>
+              </p:cNvSpPr>
+              <p:nvPr>
+                <p:ph idx="1"/>
+              </p:nvPr>
+            </p:nvSpPr>
+            <p:spPr>
+              <a:xfrm>
+                <a:off x="838200" y="1825624"/>
+                <a:ext cx="10515600" cy="5032375"/>
+              </a:xfrm>
+            </p:spPr>
+            <p:txBody>
+              <a:bodyPr>
+                <a:normAutofit/>
+              </a:bodyPr>
+              <a:lstStyle/>
+              <a:p>
+                <a:pPr marL="0" indent="0">
+                  <a:buNone/>
+                </a:pPr>
+                <a:r>
+                  <a:rPr lang="en-GB" dirty="0"/>
+                  <a:t>EfficientNet introduces a scaling coefficient </a:t>
+                </a:r>
+                <a14:m>
+                  <m:oMath xmlns:m="http://schemas.openxmlformats.org/officeDocument/2006/math">
+                    <m:r>
+                      <a:rPr lang="en-GB" i="1"/>
+                      <m:t>𝜙</m:t>
+                    </m:r>
+                  </m:oMath>
+                </a14:m>
+                <a:r>
+                  <a:rPr lang="en-GB" dirty="0"/>
+                  <a:t>:</a:t>
+                </a:r>
+              </a:p>
+              <a:p>
+                <a14:m>
+                  <m:oMath xmlns:m="http://schemas.openxmlformats.org/officeDocument/2006/math">
+                    <m:r>
+                      <m:rPr>
+                        <m:nor/>
+                      </m:rPr>
+                      <a:rPr lang="en-GB" b="0"/>
+                      <m:t>depth</m:t>
+                    </m:r>
+                    <m:r>
+                      <a:rPr lang="en-GB"/>
+                      <m:t>=</m:t>
+                    </m:r>
+                    <m:sSup>
+                      <m:sSupPr>
+                        <m:ctrlPr>
+                          <a:rPr lang="ar-AE" i="1"/>
+                        </m:ctrlPr>
+                      </m:sSupPr>
+                      <m:e>
+                        <m:r>
+                          <a:rPr lang="ar-AE" i="1"/>
+                          <m:t>𝛼</m:t>
+                        </m:r>
+                      </m:e>
+                      <m:sup>
+                        <m:r>
+                          <a:rPr lang="ar-AE" i="1"/>
+                          <m:t>𝜙</m:t>
+                        </m:r>
+                      </m:sup>
+                    </m:sSup>
+                    <m:r>
+                      <a:rPr lang="ar-AE"/>
+                      <m:t>, </m:t>
+                    </m:r>
+                    <m:r>
+                      <m:rPr>
+                        <m:nor/>
+                      </m:rPr>
+                      <a:rPr lang="en-GB" i="1"/>
+                      <m:t>width</m:t>
+                    </m:r>
+                    <m:r>
+                      <a:rPr lang="en-GB"/>
+                      <m:t>=</m:t>
+                    </m:r>
+                    <m:sSup>
+                      <m:sSupPr>
+                        <m:ctrlPr>
+                          <a:rPr lang="ar-AE" i="1"/>
+                        </m:ctrlPr>
+                      </m:sSupPr>
+                      <m:e>
+                        <m:r>
+                          <a:rPr lang="ar-AE" i="1"/>
+                          <m:t>𝛽</m:t>
+                        </m:r>
+                      </m:e>
+                      <m:sup>
+                        <m:r>
+                          <a:rPr lang="ar-AE" i="1"/>
+                          <m:t>𝜙</m:t>
+                        </m:r>
+                      </m:sup>
+                    </m:sSup>
+                    <m:r>
+                      <a:rPr lang="ar-AE"/>
+                      <m:t>, </m:t>
+                    </m:r>
+                    <m:r>
+                      <m:rPr>
+                        <m:nor/>
+                      </m:rPr>
+                      <a:rPr lang="en-GB" i="1"/>
+                      <m:t>resolution</m:t>
+                    </m:r>
+                    <m:r>
+                      <a:rPr lang="en-GB"/>
+                      <m:t>=</m:t>
+                    </m:r>
+                    <m:sSup>
+                      <m:sSupPr>
+                        <m:ctrlPr>
+                          <a:rPr lang="ar-AE" i="1"/>
+                        </m:ctrlPr>
+                      </m:sSupPr>
+                      <m:e>
+                        <m:r>
+                          <a:rPr lang="ar-AE" i="1"/>
+                          <m:t>𝛾</m:t>
+                        </m:r>
+                      </m:e>
+                      <m:sup>
+                        <m:r>
+                          <a:rPr lang="ar-AE" i="1"/>
+                          <m:t>𝜙</m:t>
+                        </m:r>
+                      </m:sup>
+                    </m:sSup>
+                    <m:r>
+                      <a:rPr lang="fr-FR" b="0" i="1" smtClean="0">
+                        <a:latin typeface="Cambria Math" panose="02040503050406030204" pitchFamily="18" charset="0"/>
+                      </a:rPr>
+                      <m:t>, </m:t>
+                    </m:r>
+                  </m:oMath>
+                </a14:m>
+                <a:r>
+                  <a:rPr lang="fr-FR" dirty="0"/>
+                  <a:t>with </a:t>
+                </a:r>
+                <a14:m>
+                  <m:oMath xmlns:m="http://schemas.openxmlformats.org/officeDocument/2006/math">
+                    <m:r>
+                      <a:rPr lang="en-GB" i="1">
+                        <a:latin typeface="Cambria Math" panose="02040503050406030204" pitchFamily="18" charset="0"/>
+                      </a:rPr>
+                      <m:t>𝛼</m:t>
+                    </m:r>
+                    <m:r>
+                      <a:rPr lang="en-GB">
+                        <a:latin typeface="Cambria Math" panose="02040503050406030204" pitchFamily="18" charset="0"/>
+                      </a:rPr>
+                      <m:t>⋅</m:t>
+                    </m:r>
+                    <m:sSup>
+                      <m:sSupPr>
+                        <m:ctrlPr>
+                          <a:rPr lang="ar-AE" i="1">
+                            <a:latin typeface="Cambria Math" panose="02040503050406030204" pitchFamily="18" charset="0"/>
+                          </a:rPr>
+                        </m:ctrlPr>
+                      </m:sSupPr>
+                      <m:e>
+                        <m:r>
+                          <a:rPr lang="ar-AE" i="1">
+                            <a:latin typeface="Cambria Math" panose="02040503050406030204" pitchFamily="18" charset="0"/>
+                          </a:rPr>
+                          <m:t>𝛽</m:t>
+                        </m:r>
+                      </m:e>
+                      <m:sup>
+                        <m:r>
+                          <a:rPr lang="ar-AE">
+                            <a:latin typeface="Cambria Math" panose="02040503050406030204" pitchFamily="18" charset="0"/>
+                          </a:rPr>
+                          <m:t>2</m:t>
+                        </m:r>
+                      </m:sup>
+                    </m:sSup>
+                    <m:r>
+                      <a:rPr lang="ar-AE">
+                        <a:latin typeface="Cambria Math" panose="02040503050406030204" pitchFamily="18" charset="0"/>
+                      </a:rPr>
+                      <m:t>⋅</m:t>
+                    </m:r>
+                    <m:sSup>
+                      <m:sSupPr>
+                        <m:ctrlPr>
+                          <a:rPr lang="ar-AE" i="1">
+                            <a:latin typeface="Cambria Math" panose="02040503050406030204" pitchFamily="18" charset="0"/>
+                          </a:rPr>
+                        </m:ctrlPr>
+                      </m:sSupPr>
+                      <m:e>
+                        <m:r>
+                          <a:rPr lang="ar-AE" i="1">
+                            <a:latin typeface="Cambria Math" panose="02040503050406030204" pitchFamily="18" charset="0"/>
+                          </a:rPr>
+                          <m:t>𝛾</m:t>
+                        </m:r>
+                      </m:e>
+                      <m:sup>
+                        <m:r>
+                          <a:rPr lang="ar-AE">
+                            <a:latin typeface="Cambria Math" panose="02040503050406030204" pitchFamily="18" charset="0"/>
+                          </a:rPr>
+                          <m:t>2</m:t>
+                        </m:r>
+                      </m:sup>
+                    </m:sSup>
+                    <m:r>
+                      <a:rPr lang="ar-AE">
+                        <a:latin typeface="Cambria Math" panose="02040503050406030204" pitchFamily="18" charset="0"/>
+                      </a:rPr>
+                      <m:t>≈</m:t>
+                    </m:r>
+                    <m:r>
+                      <a:rPr lang="ar-AE">
+                        <a:latin typeface="Cambria Math" panose="02040503050406030204" pitchFamily="18" charset="0"/>
+                      </a:rPr>
+                      <m:t>2</m:t>
+                    </m:r>
+                    <m:r>
+                      <a:rPr lang="fr-FR" b="0" i="0" smtClean="0">
+                        <a:latin typeface="Cambria Math" panose="02040503050406030204" pitchFamily="18" charset="0"/>
+                      </a:rPr>
+                      <m:t>.</m:t>
+                    </m:r>
+                  </m:oMath>
+                </a14:m>
+                <a:endParaRPr lang="ar-AE" dirty="0"/>
+              </a:p>
+              <a:p>
+                <a:pPr marL="0" indent="0">
+                  <a:buNone/>
+                </a:pPr>
+                <a:r>
+                  <a:rPr lang="en-GB" dirty="0"/>
+                  <a:t>This means that increasing </a:t>
+                </a:r>
+                <a14:m>
+                  <m:oMath xmlns:m="http://schemas.openxmlformats.org/officeDocument/2006/math">
+                    <m:r>
+                      <a:rPr lang="en-GB" i="1"/>
+                      <m:t>𝜙</m:t>
+                    </m:r>
+                  </m:oMath>
+                </a14:m>
+                <a:r>
+                  <a:rPr lang="en-GB" dirty="0"/>
+                  <a:t> scales </a:t>
+                </a:r>
+                <a:r>
+                  <a:rPr lang="en-GB" b="1" dirty="0"/>
+                  <a:t>all three dimensions proportionally, </a:t>
+                </a:r>
+                <a:r>
+                  <a:rPr lang="en-GB" dirty="0"/>
+                  <a:t>and each step roughly doubles computation in a controlled way</a:t>
+                </a:r>
+              </a:p>
+              <a:p>
+                <a:r>
+                  <a:rPr lang="en-GB" dirty="0"/>
+                  <a:t>Follows our intuition from earlier that: if </a:t>
+                </a:r>
+                <a:r>
+                  <a:rPr lang="en-GB" b="1" dirty="0"/>
+                  <a:t>resolution increases</a:t>
+                </a:r>
+                <a:r>
+                  <a:rPr lang="en-GB" dirty="0"/>
+                  <a:t>, then we need </a:t>
+                </a:r>
+                <a:r>
+                  <a:rPr lang="en-GB" b="1" dirty="0"/>
+                  <a:t>more depth</a:t>
+                </a:r>
+                <a:r>
+                  <a:rPr lang="en-GB" dirty="0"/>
+                  <a:t> to enlarge receptive field and we need </a:t>
+                </a:r>
+                <a:r>
+                  <a:rPr lang="en-GB" b="1" dirty="0"/>
+                  <a:t>more width</a:t>
+                </a:r>
+                <a:r>
+                  <a:rPr lang="en-GB" dirty="0"/>
+                  <a:t> to capture finer patterns.</a:t>
+                </a:r>
+              </a:p>
+              <a:p>
+                <a:r>
+                  <a:rPr lang="en-GB" dirty="0"/>
+                  <a:t>Otherwise, the network becomes </a:t>
+                </a:r>
+                <a:r>
+                  <a:rPr lang="en-GB" b="1" dirty="0">
+                    <a:solidFill>
+                      <a:srgbClr val="7030A0"/>
+                    </a:solidFill>
+                  </a:rPr>
+                  <a:t>bottlenecked</a:t>
+                </a:r>
+                <a:r>
+                  <a:rPr lang="en-GB" dirty="0"/>
+                  <a:t>.</a:t>
+                </a:r>
+              </a:p>
+            </p:txBody>
+          </p:sp>
+        </mc:Choice>
+        <mc:Fallback>
+          <p:sp>
+            <p:nvSpPr>
+              <p:cNvPr id="3" name="Content Placeholder 2">
+                <a:extLst>
+                  <a:ext uri="{FF2B5EF4-FFF2-40B4-BE49-F238E27FC236}">
+                    <a16:creationId xmlns:a16="http://schemas.microsoft.com/office/drawing/2014/main" id="{6FE0DC42-A078-2D9A-98DC-AEF9FA0D3A70}"/>
+                  </a:ext>
+                </a:extLst>
+              </p:cNvPr>
+              <p:cNvSpPr>
+                <a:spLocks noGrp="1" noRot="1" noChangeAspect="1" noMove="1" noResize="1" noEditPoints="1" noAdjustHandles="1" noChangeArrowheads="1" noChangeShapeType="1" noTextEdit="1"/>
+              </p:cNvSpPr>
+              <p:nvPr>
+                <p:ph idx="1"/>
+              </p:nvPr>
+            </p:nvSpPr>
+            <p:spPr>
+              <a:xfrm>
+                <a:off x="838200" y="1825624"/>
+                <a:ext cx="10515600" cy="5032375"/>
+              </a:xfrm>
+              <a:blipFill>
+                <a:blip r:embed="rId2"/>
+                <a:stretch>
+                  <a:fillRect l="-1217" t="-1937"/>
+                </a:stretch>
+              </a:blipFill>
+            </p:spPr>
+            <p:txBody>
+              <a:bodyPr/>
+              <a:lstStyle/>
+              <a:p>
+                <a:r>
+                  <a:rPr lang="en-GB">
+                    <a:noFill/>
+                  </a:rPr>
+                  <a:t> </a:t>
+                </a:r>
+              </a:p>
+            </p:txBody>
+          </p:sp>
+        </mc:Fallback>
+      </mc:AlternateContent>
+    </p:spTree>
+    <p:extLst>
+      <p:ext uri="{BB962C8B-B14F-4D97-AF65-F5344CB8AC3E}">
+        <p14:creationId xmlns:p14="http://schemas.microsoft.com/office/powerpoint/2010/main" val="1859714976"/>
+      </p:ext>
+    </p:extLst>
+  </p:cSld>
+  <p:clrMapOvr>
+    <a:masterClrMapping/>
+  </p:clrMapOvr>
+</p:sld>
+</file>
+
+<file path=ppt/slides/slide46.xml><?xml version="1.0" encoding="utf-8"?>
+<p:sld xmlns:a="http://schemas.openxmlformats.org/drawingml/2006/main" xmlns:r="http://schemas.openxmlformats.org/officeDocument/2006/relationships" xmlns:p="http://schemas.openxmlformats.org/presentationml/2006/main">
+  <p:cSld>
+    <p:spTree>
+      <p:nvGrpSpPr>
+        <p:cNvPr id="1" name="">
+          <a:extLst>
+            <a:ext uri="{FF2B5EF4-FFF2-40B4-BE49-F238E27FC236}">
+              <a16:creationId xmlns:a16="http://schemas.microsoft.com/office/drawing/2014/main" id="{D765E02F-D69D-4687-4933-B09FF9BF0C31}"/>
+            </a:ext>
+          </a:extLst>
+        </p:cNvPr>
+        <p:cNvGrpSpPr/>
+        <p:nvPr/>
+      </p:nvGrpSpPr>
+      <p:grpSpPr>
+        <a:xfrm>
+          <a:off x="0" y="0"/>
+          <a:ext cx="0" cy="0"/>
+          <a:chOff x="0" y="0"/>
+          <a:chExt cx="0" cy="0"/>
+        </a:xfrm>
+      </p:grpSpPr>
+      <p:sp>
+        <p:nvSpPr>
+          <p:cNvPr id="2" name="Title 1">
+            <a:extLst>
+              <a:ext uri="{FF2B5EF4-FFF2-40B4-BE49-F238E27FC236}">
+                <a16:creationId xmlns:a16="http://schemas.microsoft.com/office/drawing/2014/main" id="{64C183F0-BC7C-0029-BB92-3AEAEA5E29F9}"/>
+              </a:ext>
+            </a:extLst>
+          </p:cNvPr>
+          <p:cNvSpPr>
+            <a:spLocks noGrp="1"/>
+          </p:cNvSpPr>
+          <p:nvPr>
+            <p:ph type="title"/>
+          </p:nvPr>
+        </p:nvSpPr>
+        <p:spPr/>
+        <p:txBody>
+          <a:bodyPr/>
+          <a:lstStyle/>
+          <a:p>
+            <a:r>
+              <a:rPr lang="en-GB" dirty="0"/>
+              <a:t>The </a:t>
+            </a:r>
+            <a:r>
+              <a:rPr lang="en-GB" dirty="0" err="1"/>
+              <a:t>EfficientNet</a:t>
+            </a:r>
+            <a:r>
+              <a:rPr lang="en-GB" dirty="0"/>
+              <a:t> model</a:t>
+            </a:r>
+            <a:endParaRPr lang="en-SG" dirty="0"/>
+          </a:p>
+        </p:txBody>
+      </p:sp>
+      <p:sp>
+        <p:nvSpPr>
+          <p:cNvPr id="3" name="Content Placeholder 2">
+            <a:extLst>
+              <a:ext uri="{FF2B5EF4-FFF2-40B4-BE49-F238E27FC236}">
+                <a16:creationId xmlns:a16="http://schemas.microsoft.com/office/drawing/2014/main" id="{953936E2-BD72-C2F4-FF2E-DF92549A3D0F}"/>
+              </a:ext>
+            </a:extLst>
+          </p:cNvPr>
+          <p:cNvSpPr>
+            <a:spLocks noGrp="1"/>
+          </p:cNvSpPr>
+          <p:nvPr>
+            <p:ph idx="1"/>
+          </p:nvPr>
+        </p:nvSpPr>
+        <p:spPr>
+          <a:xfrm>
+            <a:off x="838200" y="1825624"/>
+            <a:ext cx="10515600" cy="5032375"/>
+          </a:xfrm>
+        </p:spPr>
+        <p:txBody>
+          <a:bodyPr>
+            <a:normAutofit/>
+          </a:bodyPr>
+          <a:lstStyle/>
+          <a:p>
+            <a:pPr marL="0" indent="0">
+              <a:buNone/>
+            </a:pPr>
+            <a:r>
+              <a:rPr lang="fr-FR" dirty="0" err="1"/>
+              <a:t>What</a:t>
+            </a:r>
+            <a:r>
+              <a:rPr lang="fr-FR" dirty="0"/>
+              <a:t> </a:t>
+            </a:r>
+            <a:r>
+              <a:rPr lang="fr-FR" dirty="0" err="1"/>
+              <a:t>does</a:t>
+            </a:r>
+            <a:r>
+              <a:rPr lang="fr-FR" dirty="0"/>
+              <a:t> </a:t>
+            </a:r>
+            <a:r>
+              <a:rPr lang="en-GB" b="1" dirty="0">
+                <a:solidFill>
+                  <a:srgbClr val="7030A0"/>
+                </a:solidFill>
+              </a:rPr>
+              <a:t>“bottlenecked” </a:t>
+            </a:r>
+            <a:r>
+              <a:rPr lang="en-GB" dirty="0"/>
+              <a:t>mean here?</a:t>
+            </a:r>
+          </a:p>
+          <a:p>
+            <a:r>
+              <a:rPr lang="en-GB" dirty="0"/>
+              <a:t>If you increase image resolution but keep the network too shallow, the receptive field may be too small to capture global structure. </a:t>
+            </a:r>
+            <a:br>
+              <a:rPr lang="en-GB" dirty="0"/>
+            </a:br>
+            <a:r>
+              <a:rPr lang="en-GB" dirty="0"/>
+              <a:t>The network cannot “see enough” of the larger image.</a:t>
+            </a:r>
+          </a:p>
+          <a:p>
+            <a:r>
+              <a:rPr lang="en-GB" dirty="0"/>
+              <a:t>If you increase resolution but keep the network too narrow, there are not enough channels to represent the richer fine-grained patterns.</a:t>
+            </a:r>
+          </a:p>
+          <a:p>
+            <a:r>
+              <a:rPr lang="en-GB" dirty="0"/>
+              <a:t>So even though the input contains more information, the network does not have enough depth or width to process it effectively.</a:t>
+            </a:r>
+          </a:p>
+          <a:p>
+            <a:pPr marL="0" indent="0">
+              <a:buNone/>
+            </a:pPr>
+            <a:r>
+              <a:rPr lang="en-GB" dirty="0"/>
+              <a:t>This produces model families for </a:t>
+            </a:r>
+            <a:r>
+              <a:rPr lang="en-GB" dirty="0" err="1"/>
+              <a:t>EfficientNet</a:t>
+            </a:r>
+            <a:r>
+              <a:rPr lang="en-GB" dirty="0"/>
+              <a:t> models denoted </a:t>
+            </a:r>
+            <a:r>
+              <a:rPr lang="en-GB" b="1" dirty="0"/>
+              <a:t>B0 → B7</a:t>
+            </a:r>
+            <a:r>
+              <a:rPr lang="en-GB" dirty="0"/>
+              <a:t>, </a:t>
+            </a:r>
+            <a:r>
+              <a:rPr lang="en-GB"/>
+              <a:t>which are progressively </a:t>
+            </a:r>
+            <a:r>
+              <a:rPr lang="en-GB" dirty="0"/>
+              <a:t>larger but efficiently scaled.</a:t>
+            </a:r>
+          </a:p>
+          <a:p>
+            <a:pPr marL="0" indent="0">
+              <a:buNone/>
+            </a:pPr>
+            <a:endParaRPr lang="en-GB" dirty="0"/>
+          </a:p>
+        </p:txBody>
+      </p:sp>
+    </p:spTree>
+    <p:extLst>
+      <p:ext uri="{BB962C8B-B14F-4D97-AF65-F5344CB8AC3E}">
+        <p14:creationId xmlns:p14="http://schemas.microsoft.com/office/powerpoint/2010/main" val="1770878454"/>
+      </p:ext>
+    </p:extLst>
+  </p:cSld>
+  <p:clrMapOvr>
+    <a:masterClrMapping/>
+  </p:clrMapOvr>
+</p:sld>
+</file>
+
+<file path=ppt/slides/slide47.xml><?xml version="1.0" encoding="utf-8"?>
 <p:sld xmlns:a="http://schemas.openxmlformats.org/drawingml/2006/main" xmlns:r="http://schemas.openxmlformats.org/officeDocument/2006/relationships" xmlns:p="http://schemas.openxmlformats.org/presentationml/2006/main">
   <p:cSld>
     <p:spTree>
@@ -11980,7 +13398,7 @@
 </p:sld>
 </file>
 
-<file path=ppt/slides/slide44.xml><?xml version="1.0" encoding="utf-8"?>
+<file path=ppt/slides/slide48.xml><?xml version="1.0" encoding="utf-8"?>
 <p:sld xmlns:a="http://schemas.openxmlformats.org/drawingml/2006/main" xmlns:r="http://schemas.openxmlformats.org/officeDocument/2006/relationships" xmlns:p="http://schemas.openxmlformats.org/presentationml/2006/main">
   <p:cSld>
     <p:spTree>
@@ -12125,7 +13543,7 @@
 </p:sld>
 </file>
 
-<file path=ppt/slides/slide45.xml><?xml version="1.0" encoding="utf-8"?>
+<file path=ppt/slides/slide49.xml><?xml version="1.0" encoding="utf-8"?>
 <p:sld xmlns:a="http://schemas.openxmlformats.org/drawingml/2006/main" xmlns:r="http://schemas.openxmlformats.org/officeDocument/2006/relationships" xmlns:p="http://schemas.openxmlformats.org/presentationml/2006/main">
   <p:cSld>
     <p:spTree>
@@ -12230,14 +13648,19 @@
           <a:p>
             <a:r>
               <a:rPr lang="en-GB" dirty="0"/>
-              <a:t>We will NOT discuss the practical implementation of previous models, and gladly leave it to the Term 7 Computer Vision course at SUTD!</a:t>
-            </a:r>
-          </a:p>
-          <a:p>
-            <a:r>
-              <a:rPr lang="en-GB" dirty="0"/>
-              <a:t>Strongly advise you to continue your training on Term 7!</a:t>
-            </a:r>
+              <a:t>We will NOT discuss the practical implementation of previous models, and gladly leave it to the Term 6-8 Computer Vision course at SUTD!</a:t>
+            </a:r>
+          </a:p>
+          <a:p>
+            <a:r>
+              <a:rPr lang="en-GB" dirty="0"/>
+              <a:t>Strongly advise you to continue your training on </a:t>
+            </a:r>
+            <a:r>
+              <a:rPr lang="en-GB"/>
+              <a:t>Term 6-8!</a:t>
+            </a:r>
+            <a:endParaRPr lang="en-GB" dirty="0"/>
           </a:p>
           <a:p>
             <a:pPr marL="0" indent="0">
@@ -12266,7 +13689,310 @@
 </p:sld>
 </file>
 
-<file path=ppt/slides/slide46.xml><?xml version="1.0" encoding="utf-8"?>
+<file path=ppt/slides/slide5.xml><?xml version="1.0" encoding="utf-8"?>
+<p:sld xmlns:a="http://schemas.openxmlformats.org/drawingml/2006/main" xmlns:r="http://schemas.openxmlformats.org/officeDocument/2006/relationships" xmlns:p="http://schemas.openxmlformats.org/presentationml/2006/main">
+  <p:cSld>
+    <p:spTree>
+      <p:nvGrpSpPr>
+        <p:cNvPr id="1" name=""/>
+        <p:cNvGrpSpPr/>
+        <p:nvPr/>
+      </p:nvGrpSpPr>
+      <p:grpSpPr>
+        <a:xfrm>
+          <a:off x="0" y="0"/>
+          <a:ext cx="0" cy="0"/>
+          <a:chOff x="0" y="0"/>
+          <a:chExt cx="0" cy="0"/>
+        </a:xfrm>
+      </p:grpSpPr>
+      <p:sp>
+        <p:nvSpPr>
+          <p:cNvPr id="2" name="Title 1">
+            <a:extLst>
+              <a:ext uri="{FF2B5EF4-FFF2-40B4-BE49-F238E27FC236}">
+                <a16:creationId xmlns:a16="http://schemas.microsoft.com/office/drawing/2014/main" id="{49D40417-A4D3-4CE8-96E7-708E2439AE7B}"/>
+              </a:ext>
+            </a:extLst>
+          </p:cNvPr>
+          <p:cNvSpPr>
+            <a:spLocks noGrp="1"/>
+          </p:cNvSpPr>
+          <p:nvPr>
+            <p:ph type="title"/>
+          </p:nvPr>
+        </p:nvSpPr>
+        <p:spPr/>
+        <p:txBody>
+          <a:bodyPr/>
+          <a:lstStyle/>
+          <a:p>
+            <a:r>
+              <a:rPr lang="en-US" dirty="0"/>
+              <a:t>About this week (Week 4)</a:t>
+            </a:r>
+            <a:endParaRPr lang="en-GB" dirty="0"/>
+          </a:p>
+        </p:txBody>
+      </p:sp>
+      <p:sp>
+        <p:nvSpPr>
+          <p:cNvPr id="3" name="Content Placeholder 2">
+            <a:extLst>
+              <a:ext uri="{FF2B5EF4-FFF2-40B4-BE49-F238E27FC236}">
+                <a16:creationId xmlns:a16="http://schemas.microsoft.com/office/drawing/2014/main" id="{35995840-A9D9-479A-A34F-EA7DC229D38E}"/>
+              </a:ext>
+            </a:extLst>
+          </p:cNvPr>
+          <p:cNvSpPr>
+            <a:spLocks noGrp="1"/>
+          </p:cNvSpPr>
+          <p:nvPr>
+            <p:ph idx="1"/>
+          </p:nvPr>
+        </p:nvSpPr>
+        <p:spPr/>
+        <p:txBody>
+          <a:bodyPr/>
+          <a:lstStyle/>
+          <a:p>
+            <a:pPr marL="514350" indent="-514350">
+              <a:buFont typeface="+mj-lt"/>
+              <a:buAutoNum type="arabicPeriod" startAt="23"/>
+            </a:pPr>
+            <a:r>
+              <a:rPr lang="en-GB" dirty="0"/>
+              <a:t>What are the </a:t>
+            </a:r>
+            <a:r>
+              <a:rPr lang="en-GB" b="1" dirty="0" err="1"/>
+              <a:t>AlexNet</a:t>
+            </a:r>
+            <a:r>
+              <a:rPr lang="en-GB" dirty="0"/>
+              <a:t> and </a:t>
+            </a:r>
+            <a:r>
+              <a:rPr lang="en-GB" b="1" dirty="0"/>
+              <a:t>VGG</a:t>
+            </a:r>
+            <a:r>
+              <a:rPr lang="en-GB" dirty="0"/>
+              <a:t> </a:t>
+            </a:r>
+            <a:r>
+              <a:rPr lang="en-GB" b="1" dirty="0"/>
+              <a:t>models</a:t>
+            </a:r>
+            <a:r>
+              <a:rPr lang="en-GB" dirty="0"/>
+              <a:t>?</a:t>
+            </a:r>
+          </a:p>
+          <a:p>
+            <a:pPr marL="514350" indent="-514350">
+              <a:buFont typeface="+mj-lt"/>
+              <a:buAutoNum type="arabicPeriod" startAt="23"/>
+            </a:pPr>
+            <a:r>
+              <a:rPr lang="en-GB" dirty="0"/>
+              <a:t>What is a </a:t>
+            </a:r>
+            <a:r>
+              <a:rPr lang="en-GB" b="1" dirty="0"/>
+              <a:t>skip</a:t>
+            </a:r>
+            <a:r>
+              <a:rPr lang="en-GB" dirty="0"/>
+              <a:t> </a:t>
+            </a:r>
+            <a:r>
+              <a:rPr lang="en-GB" b="1" dirty="0"/>
+              <a:t>connection</a:t>
+            </a:r>
+            <a:r>
+              <a:rPr lang="en-GB" dirty="0"/>
+              <a:t>/</a:t>
+            </a:r>
+            <a:r>
+              <a:rPr lang="en-GB" b="1" dirty="0"/>
+              <a:t>residual</a:t>
+            </a:r>
+            <a:r>
+              <a:rPr lang="en-GB" dirty="0"/>
+              <a:t>? What is its effect on a Neural Network and </a:t>
+            </a:r>
+            <a:r>
+              <a:rPr lang="en-GB" b="1" dirty="0"/>
+              <a:t>how does it help with vanishing gradient problems</a:t>
+            </a:r>
+            <a:r>
+              <a:rPr lang="en-GB" dirty="0"/>
+              <a:t>?</a:t>
+            </a:r>
+          </a:p>
+          <a:p>
+            <a:pPr marL="514350" indent="-514350">
+              <a:buFont typeface="+mj-lt"/>
+              <a:buAutoNum type="arabicPeriod" startAt="23"/>
+            </a:pPr>
+            <a:r>
+              <a:rPr lang="en-GB" dirty="0"/>
+              <a:t>What are </a:t>
+            </a:r>
+            <a:r>
+              <a:rPr lang="en-GB" b="1" dirty="0" err="1"/>
+              <a:t>ResNet</a:t>
+            </a:r>
+            <a:r>
+              <a:rPr lang="en-GB" dirty="0"/>
+              <a:t> and </a:t>
+            </a:r>
+            <a:r>
+              <a:rPr lang="en-GB" b="1" dirty="0" err="1"/>
+              <a:t>DenseNet</a:t>
+            </a:r>
+            <a:r>
+              <a:rPr lang="en-GB" dirty="0"/>
+              <a:t> </a:t>
+            </a:r>
+            <a:r>
+              <a:rPr lang="en-GB" b="1" dirty="0"/>
+              <a:t>models</a:t>
+            </a:r>
+            <a:r>
+              <a:rPr lang="en-GB" dirty="0"/>
+              <a:t>?</a:t>
+            </a:r>
+          </a:p>
+          <a:p>
+            <a:pPr marL="514350" indent="-514350">
+              <a:buFont typeface="+mj-lt"/>
+              <a:buAutoNum type="arabicPeriod" startAt="23"/>
+            </a:pPr>
+            <a:r>
+              <a:rPr lang="en-GB" dirty="0"/>
+              <a:t>What is the </a:t>
+            </a:r>
+            <a:r>
+              <a:rPr lang="en-GB" b="1" dirty="0"/>
+              <a:t>Inception</a:t>
+            </a:r>
+            <a:r>
+              <a:rPr lang="en-GB" dirty="0"/>
+              <a:t> </a:t>
+            </a:r>
+            <a:r>
+              <a:rPr lang="en-GB" b="1" dirty="0"/>
+              <a:t>model</a:t>
+            </a:r>
+            <a:r>
+              <a:rPr lang="en-GB" dirty="0"/>
+              <a:t>?</a:t>
+            </a:r>
+          </a:p>
+          <a:p>
+            <a:pPr marL="514350" indent="-514350">
+              <a:buFont typeface="+mj-lt"/>
+              <a:buAutoNum type="arabicPeriod" startAt="23"/>
+            </a:pPr>
+            <a:r>
+              <a:rPr lang="en-GB" dirty="0"/>
+              <a:t>What is the </a:t>
+            </a:r>
+            <a:r>
+              <a:rPr lang="en-GB" b="1" dirty="0" err="1"/>
+              <a:t>EfficientNet</a:t>
+            </a:r>
+            <a:r>
+              <a:rPr lang="en-GB" dirty="0"/>
+              <a:t> </a:t>
+            </a:r>
+            <a:r>
+              <a:rPr lang="en-GB" b="1" dirty="0"/>
+              <a:t>model</a:t>
+            </a:r>
+            <a:r>
+              <a:rPr lang="en-GB" dirty="0"/>
+              <a:t>?</a:t>
+            </a:r>
+          </a:p>
+          <a:p>
+            <a:pPr marL="514350" indent="-514350">
+              <a:buFont typeface="+mj-lt"/>
+              <a:buAutoNum type="arabicPeriod" startAt="23"/>
+            </a:pPr>
+            <a:r>
+              <a:rPr lang="en-GB" dirty="0"/>
+              <a:t>What is </a:t>
+            </a:r>
+            <a:r>
+              <a:rPr lang="en-GB" b="1" dirty="0"/>
+              <a:t>transfer</a:t>
+            </a:r>
+            <a:r>
+              <a:rPr lang="en-GB" dirty="0"/>
+              <a:t> </a:t>
+            </a:r>
+            <a:r>
+              <a:rPr lang="en-GB" b="1" dirty="0"/>
+              <a:t>learning</a:t>
+            </a:r>
+            <a:r>
+              <a:rPr lang="en-GB" dirty="0"/>
+              <a:t> and its uses?</a:t>
+            </a:r>
+          </a:p>
+          <a:p>
+            <a:pPr marL="514350" indent="-514350">
+              <a:buFont typeface="+mj-lt"/>
+              <a:buAutoNum type="arabicPeriod" startAt="23"/>
+            </a:pPr>
+            <a:r>
+              <a:rPr lang="en-GB" dirty="0"/>
+              <a:t>How to </a:t>
+            </a:r>
+            <a:r>
+              <a:rPr lang="en-GB" b="1" dirty="0"/>
+              <a:t>freeze</a:t>
+            </a:r>
+            <a:r>
+              <a:rPr lang="en-GB" dirty="0"/>
+              <a:t> and </a:t>
+            </a:r>
+            <a:r>
+              <a:rPr lang="en-GB" b="1" dirty="0"/>
+              <a:t>fine-tune</a:t>
+            </a:r>
+            <a:r>
+              <a:rPr lang="en-GB" dirty="0"/>
+              <a:t> </a:t>
+            </a:r>
+            <a:r>
+              <a:rPr lang="en-GB" b="1" dirty="0"/>
+              <a:t>layers</a:t>
+            </a:r>
+            <a:r>
+              <a:rPr lang="en-GB" dirty="0"/>
+              <a:t> in a Neural Network?</a:t>
+            </a:r>
+          </a:p>
+        </p:txBody>
+      </p:sp>
+    </p:spTree>
+    <p:extLst>
+      <p:ext uri="{BB962C8B-B14F-4D97-AF65-F5344CB8AC3E}">
+        <p14:creationId xmlns:p14="http://schemas.microsoft.com/office/powerpoint/2010/main" val="2868029262"/>
+      </p:ext>
+    </p:extLst>
+  </p:cSld>
+  <p:clrMapOvr>
+    <a:masterClrMapping/>
+  </p:clrMapOvr>
+</p:sld>
+</file>
+
+<file path=ppt/slides/slide50.xml><?xml version="1.0" encoding="utf-8"?>
 <p:sld xmlns:a="http://schemas.openxmlformats.org/drawingml/2006/main" xmlns:r="http://schemas.openxmlformats.org/officeDocument/2006/relationships" xmlns:p="http://schemas.openxmlformats.org/presentationml/2006/main">
   <p:cSld>
     <p:spTree>
@@ -12507,7 +14233,7 @@
 </p:sld>
 </file>
 
-<file path=ppt/slides/slide47.xml><?xml version="1.0" encoding="utf-8"?>
+<file path=ppt/slides/slide51.xml><?xml version="1.0" encoding="utf-8"?>
 <p:sld xmlns:a="http://schemas.openxmlformats.org/drawingml/2006/main" xmlns:r="http://schemas.openxmlformats.org/officeDocument/2006/relationships" xmlns:p="http://schemas.openxmlformats.org/presentationml/2006/main">
   <p:cSld>
     <p:spTree>
@@ -12690,7 +14416,7 @@
 </p:sld>
 </file>
 
-<file path=ppt/slides/slide48.xml><?xml version="1.0" encoding="utf-8"?>
+<file path=ppt/slides/slide52.xml><?xml version="1.0" encoding="utf-8"?>
 <p:sld xmlns:a="http://schemas.openxmlformats.org/drawingml/2006/main" xmlns:r="http://schemas.openxmlformats.org/officeDocument/2006/relationships" xmlns:p="http://schemas.openxmlformats.org/presentationml/2006/main">
   <p:cSld>
     <p:spTree>
@@ -12829,7 +14555,7 @@
 </p:sld>
 </file>
 
-<file path=ppt/slides/slide49.xml><?xml version="1.0" encoding="utf-8"?>
+<file path=ppt/slides/slide53.xml><?xml version="1.0" encoding="utf-8"?>
 <p:sld xmlns:a="http://schemas.openxmlformats.org/drawingml/2006/main" xmlns:r="http://schemas.openxmlformats.org/officeDocument/2006/relationships" xmlns:p="http://schemas.openxmlformats.org/presentationml/2006/main">
   <p:cSld>
     <p:spTree>
@@ -13014,310 +14740,7 @@
 </p:sld>
 </file>
 
-<file path=ppt/slides/slide5.xml><?xml version="1.0" encoding="utf-8"?>
-<p:sld xmlns:a="http://schemas.openxmlformats.org/drawingml/2006/main" xmlns:r="http://schemas.openxmlformats.org/officeDocument/2006/relationships" xmlns:p="http://schemas.openxmlformats.org/presentationml/2006/main">
-  <p:cSld>
-    <p:spTree>
-      <p:nvGrpSpPr>
-        <p:cNvPr id="1" name=""/>
-        <p:cNvGrpSpPr/>
-        <p:nvPr/>
-      </p:nvGrpSpPr>
-      <p:grpSpPr>
-        <a:xfrm>
-          <a:off x="0" y="0"/>
-          <a:ext cx="0" cy="0"/>
-          <a:chOff x="0" y="0"/>
-          <a:chExt cx="0" cy="0"/>
-        </a:xfrm>
-      </p:grpSpPr>
-      <p:sp>
-        <p:nvSpPr>
-          <p:cNvPr id="2" name="Title 1">
-            <a:extLst>
-              <a:ext uri="{FF2B5EF4-FFF2-40B4-BE49-F238E27FC236}">
-                <a16:creationId xmlns:a16="http://schemas.microsoft.com/office/drawing/2014/main" id="{49D40417-A4D3-4CE8-96E7-708E2439AE7B}"/>
-              </a:ext>
-            </a:extLst>
-          </p:cNvPr>
-          <p:cNvSpPr>
-            <a:spLocks noGrp="1"/>
-          </p:cNvSpPr>
-          <p:nvPr>
-            <p:ph type="title"/>
-          </p:nvPr>
-        </p:nvSpPr>
-        <p:spPr/>
-        <p:txBody>
-          <a:bodyPr/>
-          <a:lstStyle/>
-          <a:p>
-            <a:r>
-              <a:rPr lang="en-US" dirty="0"/>
-              <a:t>About this week (Week 4)</a:t>
-            </a:r>
-            <a:endParaRPr lang="en-GB" dirty="0"/>
-          </a:p>
-        </p:txBody>
-      </p:sp>
-      <p:sp>
-        <p:nvSpPr>
-          <p:cNvPr id="3" name="Content Placeholder 2">
-            <a:extLst>
-              <a:ext uri="{FF2B5EF4-FFF2-40B4-BE49-F238E27FC236}">
-                <a16:creationId xmlns:a16="http://schemas.microsoft.com/office/drawing/2014/main" id="{35995840-A9D9-479A-A34F-EA7DC229D38E}"/>
-              </a:ext>
-            </a:extLst>
-          </p:cNvPr>
-          <p:cNvSpPr>
-            <a:spLocks noGrp="1"/>
-          </p:cNvSpPr>
-          <p:nvPr>
-            <p:ph idx="1"/>
-          </p:nvPr>
-        </p:nvSpPr>
-        <p:spPr/>
-        <p:txBody>
-          <a:bodyPr/>
-          <a:lstStyle/>
-          <a:p>
-            <a:pPr marL="514350" indent="-514350">
-              <a:buFont typeface="+mj-lt"/>
-              <a:buAutoNum type="arabicPeriod" startAt="23"/>
-            </a:pPr>
-            <a:r>
-              <a:rPr lang="en-GB" dirty="0"/>
-              <a:t>What are the </a:t>
-            </a:r>
-            <a:r>
-              <a:rPr lang="en-GB" b="1" dirty="0" err="1"/>
-              <a:t>AlexNet</a:t>
-            </a:r>
-            <a:r>
-              <a:rPr lang="en-GB" dirty="0"/>
-              <a:t> and </a:t>
-            </a:r>
-            <a:r>
-              <a:rPr lang="en-GB" b="1" dirty="0"/>
-              <a:t>VGG</a:t>
-            </a:r>
-            <a:r>
-              <a:rPr lang="en-GB" dirty="0"/>
-              <a:t> </a:t>
-            </a:r>
-            <a:r>
-              <a:rPr lang="en-GB" b="1" dirty="0"/>
-              <a:t>models</a:t>
-            </a:r>
-            <a:r>
-              <a:rPr lang="en-GB" dirty="0"/>
-              <a:t>?</a:t>
-            </a:r>
-          </a:p>
-          <a:p>
-            <a:pPr marL="514350" indent="-514350">
-              <a:buFont typeface="+mj-lt"/>
-              <a:buAutoNum type="arabicPeriod" startAt="23"/>
-            </a:pPr>
-            <a:r>
-              <a:rPr lang="en-GB" dirty="0"/>
-              <a:t>What is a </a:t>
-            </a:r>
-            <a:r>
-              <a:rPr lang="en-GB" b="1" dirty="0"/>
-              <a:t>skip</a:t>
-            </a:r>
-            <a:r>
-              <a:rPr lang="en-GB" dirty="0"/>
-              <a:t> </a:t>
-            </a:r>
-            <a:r>
-              <a:rPr lang="en-GB" b="1" dirty="0"/>
-              <a:t>connection</a:t>
-            </a:r>
-            <a:r>
-              <a:rPr lang="en-GB" dirty="0"/>
-              <a:t>/</a:t>
-            </a:r>
-            <a:r>
-              <a:rPr lang="en-GB" b="1" dirty="0"/>
-              <a:t>residual</a:t>
-            </a:r>
-            <a:r>
-              <a:rPr lang="en-GB" dirty="0"/>
-              <a:t>? What is its effect on a Neural Network and </a:t>
-            </a:r>
-            <a:r>
-              <a:rPr lang="en-GB" b="1" dirty="0"/>
-              <a:t>how does it help with vanishing gradient problems</a:t>
-            </a:r>
-            <a:r>
-              <a:rPr lang="en-GB" dirty="0"/>
-              <a:t>?</a:t>
-            </a:r>
-          </a:p>
-          <a:p>
-            <a:pPr marL="514350" indent="-514350">
-              <a:buFont typeface="+mj-lt"/>
-              <a:buAutoNum type="arabicPeriod" startAt="23"/>
-            </a:pPr>
-            <a:r>
-              <a:rPr lang="en-GB" dirty="0"/>
-              <a:t>What are </a:t>
-            </a:r>
-            <a:r>
-              <a:rPr lang="en-GB" b="1" dirty="0" err="1"/>
-              <a:t>ResNet</a:t>
-            </a:r>
-            <a:r>
-              <a:rPr lang="en-GB" dirty="0"/>
-              <a:t> and </a:t>
-            </a:r>
-            <a:r>
-              <a:rPr lang="en-GB" b="1" dirty="0" err="1"/>
-              <a:t>DenseNet</a:t>
-            </a:r>
-            <a:r>
-              <a:rPr lang="en-GB" dirty="0"/>
-              <a:t> </a:t>
-            </a:r>
-            <a:r>
-              <a:rPr lang="en-GB" b="1" dirty="0"/>
-              <a:t>models</a:t>
-            </a:r>
-            <a:r>
-              <a:rPr lang="en-GB" dirty="0"/>
-              <a:t>?</a:t>
-            </a:r>
-          </a:p>
-          <a:p>
-            <a:pPr marL="514350" indent="-514350">
-              <a:buFont typeface="+mj-lt"/>
-              <a:buAutoNum type="arabicPeriod" startAt="23"/>
-            </a:pPr>
-            <a:r>
-              <a:rPr lang="en-GB" dirty="0"/>
-              <a:t>What is the </a:t>
-            </a:r>
-            <a:r>
-              <a:rPr lang="en-GB" b="1" dirty="0"/>
-              <a:t>Inception</a:t>
-            </a:r>
-            <a:r>
-              <a:rPr lang="en-GB" dirty="0"/>
-              <a:t> </a:t>
-            </a:r>
-            <a:r>
-              <a:rPr lang="en-GB" b="1" dirty="0"/>
-              <a:t>model</a:t>
-            </a:r>
-            <a:r>
-              <a:rPr lang="en-GB" dirty="0"/>
-              <a:t>?</a:t>
-            </a:r>
-          </a:p>
-          <a:p>
-            <a:pPr marL="514350" indent="-514350">
-              <a:buFont typeface="+mj-lt"/>
-              <a:buAutoNum type="arabicPeriod" startAt="23"/>
-            </a:pPr>
-            <a:r>
-              <a:rPr lang="en-GB" dirty="0"/>
-              <a:t>What is the </a:t>
-            </a:r>
-            <a:r>
-              <a:rPr lang="en-GB" b="1" dirty="0" err="1"/>
-              <a:t>EfficientNet</a:t>
-            </a:r>
-            <a:r>
-              <a:rPr lang="en-GB" dirty="0"/>
-              <a:t> </a:t>
-            </a:r>
-            <a:r>
-              <a:rPr lang="en-GB" b="1" dirty="0"/>
-              <a:t>model</a:t>
-            </a:r>
-            <a:r>
-              <a:rPr lang="en-GB" dirty="0"/>
-              <a:t>?</a:t>
-            </a:r>
-          </a:p>
-          <a:p>
-            <a:pPr marL="514350" indent="-514350">
-              <a:buFont typeface="+mj-lt"/>
-              <a:buAutoNum type="arabicPeriod" startAt="23"/>
-            </a:pPr>
-            <a:r>
-              <a:rPr lang="en-GB" dirty="0"/>
-              <a:t>What is </a:t>
-            </a:r>
-            <a:r>
-              <a:rPr lang="en-GB" b="1" dirty="0"/>
-              <a:t>transfer</a:t>
-            </a:r>
-            <a:r>
-              <a:rPr lang="en-GB" dirty="0"/>
-              <a:t> </a:t>
-            </a:r>
-            <a:r>
-              <a:rPr lang="en-GB" b="1" dirty="0"/>
-              <a:t>learning</a:t>
-            </a:r>
-            <a:r>
-              <a:rPr lang="en-GB" dirty="0"/>
-              <a:t> and its uses?</a:t>
-            </a:r>
-          </a:p>
-          <a:p>
-            <a:pPr marL="514350" indent="-514350">
-              <a:buFont typeface="+mj-lt"/>
-              <a:buAutoNum type="arabicPeriod" startAt="23"/>
-            </a:pPr>
-            <a:r>
-              <a:rPr lang="en-GB" dirty="0"/>
-              <a:t>How to </a:t>
-            </a:r>
-            <a:r>
-              <a:rPr lang="en-GB" b="1" dirty="0"/>
-              <a:t>freeze</a:t>
-            </a:r>
-            <a:r>
-              <a:rPr lang="en-GB" dirty="0"/>
-              <a:t> and </a:t>
-            </a:r>
-            <a:r>
-              <a:rPr lang="en-GB" b="1" dirty="0"/>
-              <a:t>fine-tune</a:t>
-            </a:r>
-            <a:r>
-              <a:rPr lang="en-GB" dirty="0"/>
-              <a:t> </a:t>
-            </a:r>
-            <a:r>
-              <a:rPr lang="en-GB" b="1" dirty="0"/>
-              <a:t>layers</a:t>
-            </a:r>
-            <a:r>
-              <a:rPr lang="en-GB" dirty="0"/>
-              <a:t> in a Neural Network?</a:t>
-            </a:r>
-          </a:p>
-        </p:txBody>
-      </p:sp>
-    </p:spTree>
-    <p:extLst>
-      <p:ext uri="{BB962C8B-B14F-4D97-AF65-F5344CB8AC3E}">
-        <p14:creationId xmlns:p14="http://schemas.microsoft.com/office/powerpoint/2010/main" val="2868029262"/>
-      </p:ext>
-    </p:extLst>
-  </p:cSld>
-  <p:clrMapOvr>
-    <a:masterClrMapping/>
-  </p:clrMapOvr>
-</p:sld>
-</file>
-
-<file path=ppt/slides/slide50.xml><?xml version="1.0" encoding="utf-8"?>
+<file path=ppt/slides/slide54.xml><?xml version="1.0" encoding="utf-8"?>
 <p:sld xmlns:a="http://schemas.openxmlformats.org/drawingml/2006/main" xmlns:r="http://schemas.openxmlformats.org/officeDocument/2006/relationships" xmlns:p="http://schemas.openxmlformats.org/presentationml/2006/main">
   <p:cSld>
     <p:spTree>
@@ -13525,7 +14948,7 @@
 </p:sld>
 </file>
 
-<file path=ppt/slides/slide51.xml><?xml version="1.0" encoding="utf-8"?>
+<file path=ppt/slides/slide55.xml><?xml version="1.0" encoding="utf-8"?>
 <p:sld xmlns:a="http://schemas.openxmlformats.org/drawingml/2006/main" xmlns:r="http://schemas.openxmlformats.org/officeDocument/2006/relationships" xmlns:p="http://schemas.openxmlformats.org/presentationml/2006/main">
   <p:cSld>
     <p:spTree>
@@ -13751,7 +15174,7 @@
 </p:sld>
 </file>
 
-<file path=ppt/slides/slide52.xml><?xml version="1.0" encoding="utf-8"?>
+<file path=ppt/slides/slide56.xml><?xml version="1.0" encoding="utf-8"?>
 <p:sld xmlns:a="http://schemas.openxmlformats.org/drawingml/2006/main" xmlns:r="http://schemas.openxmlformats.org/officeDocument/2006/relationships" xmlns:p="http://schemas.openxmlformats.org/presentationml/2006/main">
   <p:cSld>
     <p:spTree>
@@ -13979,7 +15402,7 @@
 </p:sld>
 </file>
 
-<file path=ppt/slides/slide53.xml><?xml version="1.0" encoding="utf-8"?>
+<file path=ppt/slides/slide57.xml><?xml version="1.0" encoding="utf-8"?>
 <p:sld xmlns:a="http://schemas.openxmlformats.org/drawingml/2006/main" xmlns:r="http://schemas.openxmlformats.org/officeDocument/2006/relationships" xmlns:p="http://schemas.openxmlformats.org/presentationml/2006/main">
   <p:cSld>
     <p:spTree>
@@ -14219,771 +15642,6 @@
 </p:sld>
 </file>
 
-<file path=ppt/slides/slide54.xml><?xml version="1.0" encoding="utf-8"?>
-<p:sld xmlns:a="http://schemas.openxmlformats.org/drawingml/2006/main" xmlns:r="http://schemas.openxmlformats.org/officeDocument/2006/relationships" xmlns:p="http://schemas.openxmlformats.org/presentationml/2006/main">
-  <p:cSld>
-    <p:spTree>
-      <p:nvGrpSpPr>
-        <p:cNvPr id="1" name=""/>
-        <p:cNvGrpSpPr/>
-        <p:nvPr/>
-      </p:nvGrpSpPr>
-      <p:grpSpPr>
-        <a:xfrm>
-          <a:off x="0" y="0"/>
-          <a:ext cx="0" cy="0"/>
-          <a:chOff x="0" y="0"/>
-          <a:chExt cx="0" cy="0"/>
-        </a:xfrm>
-      </p:grpSpPr>
-      <p:sp>
-        <p:nvSpPr>
-          <p:cNvPr id="2" name="Title 1">
-            <a:extLst>
-              <a:ext uri="{FF2B5EF4-FFF2-40B4-BE49-F238E27FC236}">
-                <a16:creationId xmlns:a16="http://schemas.microsoft.com/office/drawing/2014/main" id="{8403C2D5-263C-6431-9E3B-012C163E3451}"/>
-              </a:ext>
-            </a:extLst>
-          </p:cNvPr>
-          <p:cNvSpPr>
-            <a:spLocks noGrp="1"/>
-          </p:cNvSpPr>
-          <p:nvPr>
-            <p:ph type="title"/>
-          </p:nvPr>
-        </p:nvSpPr>
-        <p:spPr/>
-        <p:txBody>
-          <a:bodyPr/>
-          <a:lstStyle/>
-          <a:p>
-            <a:r>
-              <a:rPr lang="en-GB" dirty="0"/>
-              <a:t>Transfer Learning of </a:t>
-            </a:r>
-            <a:r>
-              <a:rPr lang="en-GB" dirty="0" err="1"/>
-              <a:t>ResNet</a:t>
-            </a:r>
-            <a:r>
-              <a:rPr lang="en-GB" dirty="0"/>
-              <a:t> to MNIST</a:t>
-            </a:r>
-            <a:endParaRPr lang="en-SG" dirty="0"/>
-          </a:p>
-        </p:txBody>
-      </p:sp>
-      <p:sp>
-        <p:nvSpPr>
-          <p:cNvPr id="4" name="Content Placeholder 3">
-            <a:extLst>
-              <a:ext uri="{FF2B5EF4-FFF2-40B4-BE49-F238E27FC236}">
-                <a16:creationId xmlns:a16="http://schemas.microsoft.com/office/drawing/2014/main" id="{7D3C4361-39ED-8455-F41E-48593F709DE8}"/>
-              </a:ext>
-            </a:extLst>
-          </p:cNvPr>
-          <p:cNvSpPr>
-            <a:spLocks noGrp="1"/>
-          </p:cNvSpPr>
-          <p:nvPr>
-            <p:ph sz="half" idx="1"/>
-          </p:nvPr>
-        </p:nvSpPr>
-        <p:spPr>
-          <a:xfrm>
-            <a:off x="838200" y="1825624"/>
-            <a:ext cx="5181600" cy="5032375"/>
-          </a:xfrm>
-        </p:spPr>
-        <p:txBody>
-          <a:bodyPr>
-            <a:normAutofit/>
-          </a:bodyPr>
-          <a:lstStyle/>
-          <a:p>
-            <a:pPr marL="0" indent="0">
-              <a:buNone/>
-            </a:pPr>
-            <a:r>
-              <a:rPr lang="en-GB" dirty="0"/>
-              <a:t>Let us</a:t>
-            </a:r>
-          </a:p>
-          <a:p>
-            <a:pPr marL="514350" indent="-514350">
-              <a:buFont typeface="+mj-lt"/>
-              <a:buAutoNum type="arabicPeriod"/>
-            </a:pPr>
-            <a:r>
-              <a:rPr lang="en-GB" dirty="0"/>
-              <a:t>Prepare the MNIST dataset,</a:t>
-            </a:r>
-          </a:p>
-          <a:p>
-            <a:pPr marL="514350" indent="-514350">
-              <a:buFont typeface="+mj-lt"/>
-              <a:buAutoNum type="arabicPeriod"/>
-            </a:pPr>
-            <a:r>
-              <a:rPr lang="en-GB" dirty="0"/>
-              <a:t>Download the pre-trained version of a </a:t>
-            </a:r>
-            <a:r>
-              <a:rPr lang="en-GB" dirty="0" err="1"/>
-              <a:t>ResNet</a:t>
-            </a:r>
-            <a:r>
-              <a:rPr lang="en-GB" dirty="0"/>
-              <a:t>,</a:t>
-            </a:r>
-          </a:p>
-          <a:p>
-            <a:pPr marL="514350" indent="-514350">
-              <a:buFont typeface="+mj-lt"/>
-              <a:buAutoNum type="arabicPeriod"/>
-            </a:pPr>
-            <a:r>
-              <a:rPr lang="en-GB" dirty="0"/>
-              <a:t>Replace the initial layer so network uses MNIST images,</a:t>
-            </a:r>
-          </a:p>
-          <a:p>
-            <a:pPr marL="514350" indent="-514350">
-              <a:buFont typeface="+mj-lt"/>
-              <a:buAutoNum type="arabicPeriod"/>
-            </a:pPr>
-            <a:r>
-              <a:rPr lang="en-GB" dirty="0"/>
-              <a:t>Replace final layer to match number of MNIST classes,</a:t>
-            </a:r>
-          </a:p>
-          <a:p>
-            <a:pPr marL="514350" indent="-514350">
-              <a:buFont typeface="+mj-lt"/>
-              <a:buAutoNum type="arabicPeriod"/>
-            </a:pPr>
-            <a:r>
-              <a:rPr lang="en-SG" b="1" dirty="0"/>
-              <a:t>Freeze</a:t>
-            </a:r>
-            <a:r>
-              <a:rPr lang="en-SG" dirty="0"/>
-              <a:t> all layers except the new ones!</a:t>
-            </a:r>
-          </a:p>
-          <a:p>
-            <a:pPr marL="0" indent="0">
-              <a:buNone/>
-            </a:pPr>
-            <a:endParaRPr lang="en-SG" dirty="0"/>
-          </a:p>
-        </p:txBody>
-      </p:sp>
-      <p:sp>
-        <p:nvSpPr>
-          <p:cNvPr id="7" name="Content Placeholder 6">
-            <a:extLst>
-              <a:ext uri="{FF2B5EF4-FFF2-40B4-BE49-F238E27FC236}">
-                <a16:creationId xmlns:a16="http://schemas.microsoft.com/office/drawing/2014/main" id="{75C1F860-85BD-A03B-AF25-C7AE8458FD58}"/>
-              </a:ext>
-            </a:extLst>
-          </p:cNvPr>
-          <p:cNvSpPr>
-            <a:spLocks noGrp="1"/>
-          </p:cNvSpPr>
-          <p:nvPr>
-            <p:ph sz="half" idx="2"/>
-          </p:nvPr>
-        </p:nvSpPr>
-        <p:spPr/>
-        <p:txBody>
-          <a:bodyPr>
-            <a:normAutofit/>
-          </a:bodyPr>
-          <a:lstStyle/>
-          <a:p>
-            <a:pPr marL="514350" indent="-514350">
-              <a:buFont typeface="+mj-lt"/>
-              <a:buAutoNum type="arabicPeriod" startAt="6"/>
-            </a:pPr>
-            <a:r>
-              <a:rPr lang="en-GB" b="1" dirty="0"/>
-              <a:t>And finally, train these new layers that currently have random values in their trainable parameters, using the MNIST dataset!</a:t>
-            </a:r>
-          </a:p>
-          <a:p>
-            <a:pPr marL="0" indent="0">
-              <a:buNone/>
-            </a:pPr>
-            <a:endParaRPr lang="en-SG" dirty="0"/>
-          </a:p>
-        </p:txBody>
-      </p:sp>
-    </p:spTree>
-    <p:extLst>
-      <p:ext uri="{BB962C8B-B14F-4D97-AF65-F5344CB8AC3E}">
-        <p14:creationId xmlns:p14="http://schemas.microsoft.com/office/powerpoint/2010/main" val="2000086281"/>
-      </p:ext>
-    </p:extLst>
-  </p:cSld>
-  <p:clrMapOvr>
-    <a:masterClrMapping/>
-  </p:clrMapOvr>
-</p:sld>
-</file>
-
-<file path=ppt/slides/slide55.xml><?xml version="1.0" encoding="utf-8"?>
-<p:sld xmlns:a="http://schemas.openxmlformats.org/drawingml/2006/main" xmlns:r="http://schemas.openxmlformats.org/officeDocument/2006/relationships" xmlns:p="http://schemas.openxmlformats.org/presentationml/2006/main">
-  <p:cSld>
-    <p:spTree>
-      <p:nvGrpSpPr>
-        <p:cNvPr id="1" name=""/>
-        <p:cNvGrpSpPr/>
-        <p:nvPr/>
-      </p:nvGrpSpPr>
-      <p:grpSpPr>
-        <a:xfrm>
-          <a:off x="0" y="0"/>
-          <a:ext cx="0" cy="0"/>
-          <a:chOff x="0" y="0"/>
-          <a:chExt cx="0" cy="0"/>
-        </a:xfrm>
-      </p:grpSpPr>
-      <p:pic>
-        <p:nvPicPr>
-          <p:cNvPr id="10" name="Picture 9">
-            <a:extLst>
-              <a:ext uri="{FF2B5EF4-FFF2-40B4-BE49-F238E27FC236}">
-                <a16:creationId xmlns:a16="http://schemas.microsoft.com/office/drawing/2014/main" id="{4883BC96-1309-6EBF-7307-A16A308242A3}"/>
-              </a:ext>
-            </a:extLst>
-          </p:cNvPr>
-          <p:cNvPicPr>
-            <a:picLocks noChangeAspect="1"/>
-          </p:cNvPicPr>
-          <p:nvPr/>
-        </p:nvPicPr>
-        <p:blipFill>
-          <a:blip r:embed="rId2"/>
-          <a:stretch>
-            <a:fillRect/>
-          </a:stretch>
-        </p:blipFill>
-        <p:spPr>
-          <a:xfrm>
-            <a:off x="1287567" y="0"/>
-            <a:ext cx="9616865" cy="6858000"/>
-          </a:xfrm>
-          <a:prstGeom prst="rect">
-            <a:avLst/>
-          </a:prstGeom>
-        </p:spPr>
-      </p:pic>
-      <p:pic>
-        <p:nvPicPr>
-          <p:cNvPr id="14" name="Picture 13">
-            <a:extLst>
-              <a:ext uri="{FF2B5EF4-FFF2-40B4-BE49-F238E27FC236}">
-                <a16:creationId xmlns:a16="http://schemas.microsoft.com/office/drawing/2014/main" id="{643A04D3-C578-F514-E7D3-1A76D2B5A513}"/>
-              </a:ext>
-            </a:extLst>
-          </p:cNvPr>
-          <p:cNvPicPr>
-            <a:picLocks noChangeAspect="1"/>
-          </p:cNvPicPr>
-          <p:nvPr/>
-        </p:nvPicPr>
-        <p:blipFill>
-          <a:blip r:embed="rId3"/>
-          <a:stretch>
-            <a:fillRect/>
-          </a:stretch>
-        </p:blipFill>
-        <p:spPr>
-          <a:xfrm>
-            <a:off x="6838461" y="5447966"/>
-            <a:ext cx="3953427" cy="1276528"/>
-          </a:xfrm>
-          <a:prstGeom prst="rect">
-            <a:avLst/>
-          </a:prstGeom>
-        </p:spPr>
-      </p:pic>
-      <p:sp>
-        <p:nvSpPr>
-          <p:cNvPr id="15" name="TextBox 14">
-            <a:extLst>
-              <a:ext uri="{FF2B5EF4-FFF2-40B4-BE49-F238E27FC236}">
-                <a16:creationId xmlns:a16="http://schemas.microsoft.com/office/drawing/2014/main" id="{E6BCB383-605C-A7E9-70CB-A41DD640BCA9}"/>
-              </a:ext>
-            </a:extLst>
-          </p:cNvPr>
-          <p:cNvSpPr txBox="1"/>
-          <p:nvPr/>
-        </p:nvSpPr>
-        <p:spPr>
-          <a:xfrm>
-            <a:off x="6966837" y="4483463"/>
-            <a:ext cx="4044874" cy="830997"/>
-          </a:xfrm>
-          <a:prstGeom prst="rect">
-            <a:avLst/>
-          </a:prstGeom>
-          <a:noFill/>
-        </p:spPr>
-        <p:txBody>
-          <a:bodyPr wrap="square" rtlCol="0">
-            <a:spAutoFit/>
-          </a:bodyPr>
-          <a:lstStyle/>
-          <a:p>
-            <a:pPr algn="ctr"/>
-            <a:r>
-              <a:rPr lang="en-GB" sz="2400" b="1" dirty="0">
-                <a:solidFill>
-                  <a:schemeClr val="accent2"/>
-                </a:solidFill>
-              </a:rPr>
-              <a:t>Wait that works very nicely?!</a:t>
-            </a:r>
-          </a:p>
-          <a:p>
-            <a:pPr algn="ctr"/>
-            <a:r>
-              <a:rPr lang="en-GB" sz="2400" b="1" dirty="0">
-                <a:solidFill>
-                  <a:schemeClr val="accent2"/>
-                </a:solidFill>
-              </a:rPr>
-              <a:t>That feels borderline illegal!</a:t>
-            </a:r>
-            <a:endParaRPr lang="en-SG" sz="2400" b="1" dirty="0">
-              <a:solidFill>
-                <a:schemeClr val="accent2"/>
-              </a:solidFill>
-            </a:endParaRPr>
-          </a:p>
-        </p:txBody>
-      </p:sp>
-    </p:spTree>
-    <p:extLst>
-      <p:ext uri="{BB962C8B-B14F-4D97-AF65-F5344CB8AC3E}">
-        <p14:creationId xmlns:p14="http://schemas.microsoft.com/office/powerpoint/2010/main" val="2143040470"/>
-      </p:ext>
-    </p:extLst>
-  </p:cSld>
-  <p:clrMapOvr>
-    <a:masterClrMapping/>
-  </p:clrMapOvr>
-</p:sld>
-</file>
-
-<file path=ppt/slides/slide56.xml><?xml version="1.0" encoding="utf-8"?>
-<p:sld xmlns:a="http://schemas.openxmlformats.org/drawingml/2006/main" xmlns:r="http://schemas.openxmlformats.org/officeDocument/2006/relationships" xmlns:p="http://schemas.openxmlformats.org/presentationml/2006/main">
-  <p:cSld>
-    <p:spTree>
-      <p:nvGrpSpPr>
-        <p:cNvPr id="1" name=""/>
-        <p:cNvGrpSpPr/>
-        <p:nvPr/>
-      </p:nvGrpSpPr>
-      <p:grpSpPr>
-        <a:xfrm>
-          <a:off x="0" y="0"/>
-          <a:ext cx="0" cy="0"/>
-          <a:chOff x="0" y="0"/>
-          <a:chExt cx="0" cy="0"/>
-        </a:xfrm>
-      </p:grpSpPr>
-      <p:sp>
-        <p:nvSpPr>
-          <p:cNvPr id="2" name="Title 1">
-            <a:extLst>
-              <a:ext uri="{FF2B5EF4-FFF2-40B4-BE49-F238E27FC236}">
-                <a16:creationId xmlns:a16="http://schemas.microsoft.com/office/drawing/2014/main" id="{E432D4A4-02EB-726C-FC94-DD69E4E76295}"/>
-              </a:ext>
-            </a:extLst>
-          </p:cNvPr>
-          <p:cNvSpPr>
-            <a:spLocks noGrp="1"/>
-          </p:cNvSpPr>
-          <p:nvPr>
-            <p:ph type="title"/>
-          </p:nvPr>
-        </p:nvSpPr>
-        <p:spPr/>
-        <p:txBody>
-          <a:bodyPr/>
-          <a:lstStyle/>
-          <a:p>
-            <a:r>
-              <a:rPr lang="en-GB" dirty="0"/>
-              <a:t>Finetuning and unfreezing layers</a:t>
-            </a:r>
-            <a:endParaRPr lang="en-SG" dirty="0"/>
-          </a:p>
-        </p:txBody>
-      </p:sp>
-      <p:sp>
-        <p:nvSpPr>
-          <p:cNvPr id="3" name="Content Placeholder 2">
-            <a:extLst>
-              <a:ext uri="{FF2B5EF4-FFF2-40B4-BE49-F238E27FC236}">
-                <a16:creationId xmlns:a16="http://schemas.microsoft.com/office/drawing/2014/main" id="{9BBF8595-437B-05D4-0FCE-C31C3FD4C3C6}"/>
-              </a:ext>
-            </a:extLst>
-          </p:cNvPr>
-          <p:cNvSpPr>
-            <a:spLocks noGrp="1"/>
-          </p:cNvSpPr>
-          <p:nvPr>
-            <p:ph idx="1"/>
-          </p:nvPr>
-        </p:nvSpPr>
-        <p:spPr>
-          <a:xfrm>
-            <a:off x="838200" y="1825624"/>
-            <a:ext cx="10515600" cy="5032375"/>
-          </a:xfrm>
-        </p:spPr>
-        <p:txBody>
-          <a:bodyPr>
-            <a:normAutofit/>
-          </a:bodyPr>
-          <a:lstStyle/>
-          <a:p>
-            <a:pPr marL="0" indent="0">
-              <a:buNone/>
-            </a:pPr>
-            <a:r>
-              <a:rPr lang="en-GB" b="1" dirty="0"/>
-              <a:t>Definition (</a:t>
-            </a:r>
-            <a:r>
-              <a:rPr lang="en-GB" b="1" dirty="0">
-                <a:solidFill>
-                  <a:srgbClr val="00B050"/>
-                </a:solidFill>
-              </a:rPr>
-              <a:t>fine-tuning</a:t>
-            </a:r>
-            <a:r>
-              <a:rPr lang="en-GB" b="1" dirty="0"/>
-              <a:t> and </a:t>
-            </a:r>
-            <a:r>
-              <a:rPr lang="en-GB" b="1" dirty="0">
-                <a:solidFill>
-                  <a:srgbClr val="00B050"/>
-                </a:solidFill>
-              </a:rPr>
-              <a:t>unfreezing</a:t>
-            </a:r>
-            <a:r>
-              <a:rPr lang="en-GB" b="1" dirty="0"/>
-              <a:t> layers):</a:t>
-            </a:r>
-          </a:p>
-          <a:p>
-            <a:pPr marL="0" indent="0">
-              <a:buNone/>
-            </a:pPr>
-            <a:r>
-              <a:rPr lang="en-GB" dirty="0"/>
-              <a:t>Introduced in [Yosinski2014], </a:t>
-            </a:r>
-            <a:r>
-              <a:rPr lang="en-GB" b="1" dirty="0">
-                <a:solidFill>
-                  <a:srgbClr val="00B050"/>
-                </a:solidFill>
-              </a:rPr>
-              <a:t>fine-tuning</a:t>
-            </a:r>
-            <a:r>
-              <a:rPr lang="en-GB" dirty="0"/>
-              <a:t>, suggests to use a pre-trained network as a starting point, as before.</a:t>
-            </a:r>
-          </a:p>
-          <a:p>
-            <a:pPr marL="0" indent="0">
-              <a:buNone/>
-            </a:pPr>
-            <a:r>
-              <a:rPr lang="en-GB" dirty="0"/>
-              <a:t>However, the network is further trained by progressively </a:t>
-            </a:r>
-            <a:r>
-              <a:rPr lang="en-GB" b="1" dirty="0"/>
-              <a:t>unfreezing</a:t>
-            </a:r>
-            <a:r>
-              <a:rPr lang="en-GB" dirty="0"/>
-              <a:t> </a:t>
-            </a:r>
-            <a:r>
-              <a:rPr lang="en-GB" b="1" dirty="0"/>
-              <a:t>some</a:t>
-            </a:r>
-            <a:r>
-              <a:rPr lang="en-GB" dirty="0"/>
-              <a:t> </a:t>
-            </a:r>
-            <a:r>
-              <a:rPr lang="en-GB" b="1" dirty="0"/>
-              <a:t>of</a:t>
-            </a:r>
-            <a:r>
-              <a:rPr lang="en-GB" dirty="0"/>
-              <a:t> </a:t>
-            </a:r>
-            <a:r>
-              <a:rPr lang="en-GB" b="1" dirty="0"/>
-              <a:t>its</a:t>
-            </a:r>
-            <a:r>
-              <a:rPr lang="en-GB" dirty="0"/>
-              <a:t> </a:t>
-            </a:r>
-            <a:r>
-              <a:rPr lang="en-GB" b="1" dirty="0"/>
-              <a:t>layers</a:t>
-            </a:r>
-            <a:r>
-              <a:rPr lang="en-GB" dirty="0"/>
-              <a:t>, therefore allowing the weights in those layers to be updated during re-training.</a:t>
-            </a:r>
-          </a:p>
-          <a:p>
-            <a:pPr marL="0" indent="0">
-              <a:buNone/>
-            </a:pPr>
-            <a:r>
-              <a:rPr lang="en-GB" dirty="0"/>
-              <a:t>Usually, we will start by freezing all layers except the last few ones, and will progressively retrain layers, unfreezing more and more of them.</a:t>
-            </a:r>
-          </a:p>
-          <a:p>
-            <a:pPr marL="0" indent="0">
-              <a:buNone/>
-            </a:pPr>
-            <a:r>
-              <a:rPr lang="en-GB" dirty="0"/>
-              <a:t>Doing so, the network can be adapted to the new problem and often achieve better performance.</a:t>
-            </a:r>
-          </a:p>
-          <a:p>
-            <a:pPr marL="0" indent="0">
-              <a:buNone/>
-            </a:pPr>
-            <a:r>
-              <a:rPr lang="en-GB" i="1" dirty="0"/>
-              <a:t>(Works, but we leave it to students to try it out!)</a:t>
-            </a:r>
-            <a:endParaRPr lang="en-SG" i="1" dirty="0"/>
-          </a:p>
-        </p:txBody>
-      </p:sp>
-    </p:spTree>
-    <p:extLst>
-      <p:ext uri="{BB962C8B-B14F-4D97-AF65-F5344CB8AC3E}">
-        <p14:creationId xmlns:p14="http://schemas.microsoft.com/office/powerpoint/2010/main" val="4063861739"/>
-      </p:ext>
-    </p:extLst>
-  </p:cSld>
-  <p:clrMapOvr>
-    <a:masterClrMapping/>
-  </p:clrMapOvr>
-</p:sld>
-</file>
-
-<file path=ppt/slides/slide57.xml><?xml version="1.0" encoding="utf-8"?>
-<p:sld xmlns:a="http://schemas.openxmlformats.org/drawingml/2006/main" xmlns:r="http://schemas.openxmlformats.org/officeDocument/2006/relationships" xmlns:p="http://schemas.openxmlformats.org/presentationml/2006/main">
-  <p:cSld>
-    <p:spTree>
-      <p:nvGrpSpPr>
-        <p:cNvPr id="1" name=""/>
-        <p:cNvGrpSpPr/>
-        <p:nvPr/>
-      </p:nvGrpSpPr>
-      <p:grpSpPr>
-        <a:xfrm>
-          <a:off x="0" y="0"/>
-          <a:ext cx="0" cy="0"/>
-          <a:chOff x="0" y="0"/>
-          <a:chExt cx="0" cy="0"/>
-        </a:xfrm>
-      </p:grpSpPr>
-      <p:sp>
-        <p:nvSpPr>
-          <p:cNvPr id="2" name="Title 1">
-            <a:extLst>
-              <a:ext uri="{FF2B5EF4-FFF2-40B4-BE49-F238E27FC236}">
-                <a16:creationId xmlns:a16="http://schemas.microsoft.com/office/drawing/2014/main" id="{11A08BA8-9DEC-4471-8590-434E8D8BB4A0}"/>
-              </a:ext>
-            </a:extLst>
-          </p:cNvPr>
-          <p:cNvSpPr>
-            <a:spLocks noGrp="1"/>
-          </p:cNvSpPr>
-          <p:nvPr>
-            <p:ph type="title"/>
-          </p:nvPr>
-        </p:nvSpPr>
-        <p:spPr/>
-        <p:txBody>
-          <a:bodyPr/>
-          <a:lstStyle/>
-          <a:p>
-            <a:r>
-              <a:rPr lang="en-US" dirty="0"/>
-              <a:t>Conclusion (Week 4)</a:t>
-            </a:r>
-            <a:endParaRPr lang="en-GB" dirty="0"/>
-          </a:p>
-        </p:txBody>
-      </p:sp>
-      <p:sp>
-        <p:nvSpPr>
-          <p:cNvPr id="3" name="Content Placeholder 2">
-            <a:extLst>
-              <a:ext uri="{FF2B5EF4-FFF2-40B4-BE49-F238E27FC236}">
-                <a16:creationId xmlns:a16="http://schemas.microsoft.com/office/drawing/2014/main" id="{47E3549C-D723-41E6-8478-270ACE043694}"/>
-              </a:ext>
-            </a:extLst>
-          </p:cNvPr>
-          <p:cNvSpPr>
-            <a:spLocks noGrp="1"/>
-          </p:cNvSpPr>
-          <p:nvPr>
-            <p:ph sz="half" idx="1"/>
-          </p:nvPr>
-        </p:nvSpPr>
-        <p:spPr>
-          <a:xfrm>
-            <a:off x="838200" y="1825624"/>
-            <a:ext cx="5257800" cy="5032375"/>
-          </a:xfrm>
-        </p:spPr>
-        <p:txBody>
-          <a:bodyPr>
-            <a:normAutofit/>
-          </a:bodyPr>
-          <a:lstStyle/>
-          <a:p>
-            <a:r>
-              <a:rPr lang="en-US" dirty="0"/>
-              <a:t>Encoding images as matrices and tensors</a:t>
-            </a:r>
-          </a:p>
-          <a:p>
-            <a:r>
-              <a:rPr lang="en-US" dirty="0"/>
-              <a:t>The convolution operation, in full (kernel, padding, stride, dilation)</a:t>
-            </a:r>
-          </a:p>
-          <a:p>
-            <a:r>
-              <a:rPr lang="en-US" dirty="0"/>
-              <a:t>Image processing using convolutions</a:t>
-            </a:r>
-          </a:p>
-          <a:p>
-            <a:r>
-              <a:rPr lang="en-US" dirty="0"/>
-              <a:t>Building a convolutional layer and a Convolution Neural Network.</a:t>
-            </a:r>
-          </a:p>
-          <a:p>
-            <a:r>
-              <a:rPr lang="en-US" dirty="0"/>
-              <a:t>On the performance of Convolution vs. Linear</a:t>
-            </a:r>
-            <a:endParaRPr lang="en-GB" dirty="0"/>
-          </a:p>
-        </p:txBody>
-      </p:sp>
-      <p:sp>
-        <p:nvSpPr>
-          <p:cNvPr id="4" name="Content Placeholder 3">
-            <a:extLst>
-              <a:ext uri="{FF2B5EF4-FFF2-40B4-BE49-F238E27FC236}">
-                <a16:creationId xmlns:a16="http://schemas.microsoft.com/office/drawing/2014/main" id="{7E420A50-DCDA-4FEF-986F-775F53063E3A}"/>
-              </a:ext>
-            </a:extLst>
-          </p:cNvPr>
-          <p:cNvSpPr>
-            <a:spLocks noGrp="1"/>
-          </p:cNvSpPr>
-          <p:nvPr>
-            <p:ph sz="half" idx="2"/>
-          </p:nvPr>
-        </p:nvSpPr>
-        <p:spPr>
-          <a:xfrm>
-            <a:off x="6172200" y="1825624"/>
-            <a:ext cx="5181600" cy="5032375"/>
-          </a:xfrm>
-        </p:spPr>
-        <p:txBody>
-          <a:bodyPr>
-            <a:normAutofit/>
-          </a:bodyPr>
-          <a:lstStyle/>
-          <a:p>
-            <a:r>
-              <a:rPr lang="en-US" dirty="0"/>
-              <a:t>More operations on images (pooling, </a:t>
-            </a:r>
-            <a:r>
-              <a:rPr lang="en-US" dirty="0" err="1"/>
-              <a:t>batchnorm</a:t>
-            </a:r>
-            <a:r>
-              <a:rPr lang="en-US" dirty="0"/>
-              <a:t>, dropout)</a:t>
-            </a:r>
-          </a:p>
-          <a:p>
-            <a:r>
-              <a:rPr lang="en-US" dirty="0"/>
-              <a:t>Data augmentation</a:t>
-            </a:r>
-          </a:p>
-          <a:p>
-            <a:r>
-              <a:rPr lang="en-US" dirty="0"/>
-              <a:t>Some milestone models and their key ideas (residuals, parallelizing, dynamic scaling, etc.)</a:t>
-            </a:r>
-          </a:p>
-          <a:p>
-            <a:r>
-              <a:rPr lang="en-US" dirty="0"/>
-              <a:t>A ramp to 50.035 Computer Vision on Term 7!</a:t>
-            </a:r>
-          </a:p>
-          <a:p>
-            <a:r>
-              <a:rPr lang="en-US" dirty="0"/>
-              <a:t>Transfer learning and fine-tuning</a:t>
-            </a:r>
-            <a:endParaRPr lang="en-GB" dirty="0"/>
-          </a:p>
-        </p:txBody>
-      </p:sp>
-    </p:spTree>
-    <p:extLst>
-      <p:ext uri="{BB962C8B-B14F-4D97-AF65-F5344CB8AC3E}">
-        <p14:creationId xmlns:p14="http://schemas.microsoft.com/office/powerpoint/2010/main" val="1036081419"/>
-      </p:ext>
-    </p:extLst>
-  </p:cSld>
-  <p:clrMapOvr>
-    <a:masterClrMapping/>
-  </p:clrMapOvr>
-</p:sld>
-</file>
-
 <file path=ppt/slides/slide58.xml><?xml version="1.0" encoding="utf-8"?>
 <p:sld xmlns:a="http://schemas.openxmlformats.org/drawingml/2006/main" xmlns:r="http://schemas.openxmlformats.org/officeDocument/2006/relationships" xmlns:p="http://schemas.openxmlformats.org/presentationml/2006/main">
   <p:cSld>
@@ -15006,7 +15664,7 @@
           <p:cNvPr id="2" name="Title 1">
             <a:extLst>
               <a:ext uri="{FF2B5EF4-FFF2-40B4-BE49-F238E27FC236}">
-                <a16:creationId xmlns:a16="http://schemas.microsoft.com/office/drawing/2014/main" id="{F6E33F64-ACBF-414C-8E71-06E4F9517B15}"/>
+                <a16:creationId xmlns:a16="http://schemas.microsoft.com/office/drawing/2014/main" id="{8403C2D5-263C-6431-9E3B-012C163E3451}"/>
               </a:ext>
             </a:extLst>
           </p:cNvPr>
@@ -15023,19 +15681,27 @@
           <a:lstStyle/>
           <a:p>
             <a:r>
-              <a:rPr lang="en-US" dirty="0"/>
-              <a:t>Learn more about these topics</a:t>
-            </a:r>
-            <a:endParaRPr lang="en-GB" dirty="0"/>
-          </a:p>
-        </p:txBody>
-      </p:sp>
-      <p:sp>
-        <p:nvSpPr>
-          <p:cNvPr id="3" name="Content Placeholder 2">
-            <a:extLst>
-              <a:ext uri="{FF2B5EF4-FFF2-40B4-BE49-F238E27FC236}">
-                <a16:creationId xmlns:a16="http://schemas.microsoft.com/office/drawing/2014/main" id="{C71C8DD6-14D1-44DF-9843-EFEDF44E39A2}"/>
+              <a:rPr lang="en-GB" dirty="0"/>
+              <a:t>Transfer Learning of </a:t>
+            </a:r>
+            <a:r>
+              <a:rPr lang="en-GB" dirty="0" err="1"/>
+              <a:t>ResNet</a:t>
+            </a:r>
+            <a:r>
+              <a:rPr lang="en-GB" dirty="0"/>
+              <a:t> to MNIST</a:t>
+            </a:r>
+            <a:endParaRPr lang="en-SG" dirty="0"/>
+          </a:p>
+        </p:txBody>
+      </p:sp>
+      <p:sp>
+        <p:nvSpPr>
+          <p:cNvPr id="4" name="Content Placeholder 3">
+            <a:extLst>
+              <a:ext uri="{FF2B5EF4-FFF2-40B4-BE49-F238E27FC236}">
+                <a16:creationId xmlns:a16="http://schemas.microsoft.com/office/drawing/2014/main" id="{7D3C4361-39ED-8455-F41E-48593F709DE8}"/>
               </a:ext>
             </a:extLst>
           </p:cNvPr>
@@ -15043,13 +15709,13 @@
             <a:spLocks noGrp="1"/>
           </p:cNvSpPr>
           <p:nvPr>
-            <p:ph idx="1"/>
+            <p:ph sz="half" idx="1"/>
           </p:nvPr>
         </p:nvSpPr>
         <p:spPr>
           <a:xfrm>
             <a:off x="838200" y="1825624"/>
-            <a:ext cx="10916138" cy="5032375"/>
+            <a:ext cx="5181600" cy="5032375"/>
           </a:xfrm>
         </p:spPr>
         <p:txBody>
@@ -15062,165 +15728,124 @@
               <a:buNone/>
             </a:pPr>
             <a:r>
-              <a:rPr lang="en-US" dirty="0"/>
-              <a:t>Out of class, supporting papers, for those of you who are curious.</a:t>
-            </a:r>
-          </a:p>
-          <a:p>
-            <a:r>
-              <a:rPr lang="en-GB" dirty="0"/>
-              <a:t>[Krizhevsky2012] A. </a:t>
-            </a:r>
-            <a:r>
-              <a:rPr lang="en-GB" b="1" dirty="0" err="1">
-                <a:solidFill>
-                  <a:schemeClr val="accent2">
-                    <a:lumMod val="50000"/>
-                  </a:schemeClr>
-                </a:solidFill>
-              </a:rPr>
-              <a:t>Krizhevsky</a:t>
-            </a:r>
-            <a:r>
-              <a:rPr lang="en-GB" dirty="0"/>
-              <a:t>, I. </a:t>
-            </a:r>
-            <a:r>
-              <a:rPr lang="en-GB" b="1" dirty="0" err="1">
-                <a:solidFill>
-                  <a:schemeClr val="accent2">
-                    <a:lumMod val="50000"/>
-                  </a:schemeClr>
-                </a:solidFill>
-              </a:rPr>
-              <a:t>Sutskever</a:t>
-            </a:r>
-            <a:r>
-              <a:rPr lang="en-GB" dirty="0"/>
-              <a:t>, and G. </a:t>
-            </a:r>
-            <a:r>
-              <a:rPr lang="en-GB" b="1" dirty="0">
-                <a:solidFill>
-                  <a:schemeClr val="accent2">
-                    <a:lumMod val="50000"/>
-                  </a:schemeClr>
-                </a:solidFill>
-              </a:rPr>
-              <a:t>Hinton</a:t>
-            </a:r>
-            <a:r>
-              <a:rPr lang="en-GB" dirty="0"/>
-              <a:t>, “ImageNet Classification with Deep Convolutional Neural Networks”, 2012.</a:t>
-            </a:r>
-            <a:endParaRPr lang="en-US" dirty="0"/>
-          </a:p>
-          <a:p>
-            <a:r>
-              <a:rPr lang="en-US" dirty="0"/>
-              <a:t>[</a:t>
-            </a:r>
-            <a:r>
-              <a:rPr lang="en-GB" dirty="0"/>
-              <a:t>Simonyan2014</a:t>
-            </a:r>
-            <a:r>
-              <a:rPr lang="en-US" dirty="0"/>
-              <a:t>] </a:t>
-            </a:r>
-            <a:r>
-              <a:rPr lang="en-GB" dirty="0"/>
-              <a:t>K. </a:t>
-            </a:r>
-            <a:r>
-              <a:rPr lang="en-GB" b="1" dirty="0" err="1">
-                <a:solidFill>
-                  <a:schemeClr val="accent2">
-                    <a:lumMod val="50000"/>
-                  </a:schemeClr>
-                </a:solidFill>
-              </a:rPr>
-              <a:t>Simonyan</a:t>
-            </a:r>
-            <a:r>
-              <a:rPr lang="en-GB" dirty="0"/>
-              <a:t> and A. </a:t>
-            </a:r>
-            <a:r>
-              <a:rPr lang="en-GB" b="1" dirty="0">
-                <a:solidFill>
-                  <a:schemeClr val="accent2">
-                    <a:lumMod val="50000"/>
-                  </a:schemeClr>
-                </a:solidFill>
-              </a:rPr>
-              <a:t>Zisserman</a:t>
-            </a:r>
-            <a:r>
-              <a:rPr lang="en-GB" dirty="0"/>
-              <a:t> “Very Deep Convolutional Networks for Large-Scale Image Recognition”, 2014.</a:t>
-            </a:r>
-          </a:p>
-          <a:p>
-            <a:r>
-              <a:rPr lang="en-GB" dirty="0"/>
-              <a:t>[He2015] K. </a:t>
-            </a:r>
-            <a:r>
-              <a:rPr lang="en-GB" b="1" dirty="0">
-                <a:solidFill>
-                  <a:schemeClr val="accent2">
-                    <a:lumMod val="50000"/>
-                  </a:schemeClr>
-                </a:solidFill>
-              </a:rPr>
-              <a:t>He</a:t>
-            </a:r>
-            <a:r>
-              <a:rPr lang="en-GB" dirty="0"/>
-              <a:t>, X. Zhang, S. </a:t>
-            </a:r>
-            <a:r>
-              <a:rPr lang="en-GB" b="1" dirty="0">
-                <a:solidFill>
-                  <a:schemeClr val="accent2">
-                    <a:lumMod val="50000"/>
-                  </a:schemeClr>
-                </a:solidFill>
-              </a:rPr>
-              <a:t>Ren</a:t>
-            </a:r>
-            <a:r>
-              <a:rPr lang="en-GB" dirty="0"/>
-              <a:t>, and J. </a:t>
-            </a:r>
-            <a:r>
-              <a:rPr lang="en-GB" b="1" dirty="0">
-                <a:solidFill>
-                  <a:schemeClr val="accent2">
-                    <a:lumMod val="50000"/>
-                  </a:schemeClr>
-                </a:solidFill>
-              </a:rPr>
-              <a:t>Sun</a:t>
-            </a:r>
-            <a:r>
-              <a:rPr lang="en-GB" dirty="0"/>
-              <a:t> “Deep Residual Learning for Image Recognition”, 2015.</a:t>
-            </a:r>
-          </a:p>
-          <a:p>
-            <a:endParaRPr lang="en-GB" dirty="0"/>
-          </a:p>
-          <a:p>
-            <a:endParaRPr lang="en-GB" dirty="0"/>
+              <a:rPr lang="en-GB" dirty="0"/>
+              <a:t>Let us</a:t>
+            </a:r>
+          </a:p>
+          <a:p>
+            <a:pPr marL="514350" indent="-514350">
+              <a:buFont typeface="+mj-lt"/>
+              <a:buAutoNum type="arabicPeriod"/>
+            </a:pPr>
+            <a:r>
+              <a:rPr lang="en-GB" dirty="0"/>
+              <a:t>Prepare the MNIST dataset,</a:t>
+            </a:r>
+          </a:p>
+          <a:p>
+            <a:pPr marL="514350" indent="-514350">
+              <a:buFont typeface="+mj-lt"/>
+              <a:buAutoNum type="arabicPeriod"/>
+            </a:pPr>
+            <a:r>
+              <a:rPr lang="en-GB" dirty="0"/>
+              <a:t>Download the pre-trained version of a </a:t>
+            </a:r>
+            <a:r>
+              <a:rPr lang="en-GB" dirty="0" err="1"/>
+              <a:t>ResNet</a:t>
+            </a:r>
+            <a:r>
+              <a:rPr lang="en-GB" dirty="0"/>
+              <a:t>,</a:t>
+            </a:r>
+          </a:p>
+          <a:p>
+            <a:pPr marL="514350" indent="-514350">
+              <a:buFont typeface="+mj-lt"/>
+              <a:buAutoNum type="arabicPeriod"/>
+            </a:pPr>
+            <a:r>
+              <a:rPr lang="en-GB" dirty="0"/>
+              <a:t>Replace the initial layer so network uses MNIST images,</a:t>
+            </a:r>
+          </a:p>
+          <a:p>
+            <a:pPr marL="514350" indent="-514350">
+              <a:buFont typeface="+mj-lt"/>
+              <a:buAutoNum type="arabicPeriod"/>
+            </a:pPr>
+            <a:r>
+              <a:rPr lang="en-GB" dirty="0"/>
+              <a:t>Replace final layer to match number of MNIST classes,</a:t>
+            </a:r>
+          </a:p>
+          <a:p>
+            <a:pPr marL="514350" indent="-514350">
+              <a:buFont typeface="+mj-lt"/>
+              <a:buAutoNum type="arabicPeriod"/>
+            </a:pPr>
+            <a:r>
+              <a:rPr lang="en-SG" b="1" dirty="0"/>
+              <a:t>Freeze</a:t>
+            </a:r>
+            <a:r>
+              <a:rPr lang="en-SG" dirty="0"/>
+              <a:t> all layers except the new ones!</a:t>
+            </a:r>
+          </a:p>
+          <a:p>
+            <a:pPr marL="0" indent="0">
+              <a:buNone/>
+            </a:pPr>
+            <a:endParaRPr lang="en-SG" dirty="0"/>
+          </a:p>
+        </p:txBody>
+      </p:sp>
+      <p:sp>
+        <p:nvSpPr>
+          <p:cNvPr id="7" name="Content Placeholder 6">
+            <a:extLst>
+              <a:ext uri="{FF2B5EF4-FFF2-40B4-BE49-F238E27FC236}">
+                <a16:creationId xmlns:a16="http://schemas.microsoft.com/office/drawing/2014/main" id="{75C1F860-85BD-A03B-AF25-C7AE8458FD58}"/>
+              </a:ext>
+            </a:extLst>
+          </p:cNvPr>
+          <p:cNvSpPr>
+            <a:spLocks noGrp="1"/>
+          </p:cNvSpPr>
+          <p:nvPr>
+            <p:ph sz="half" idx="2"/>
+          </p:nvPr>
+        </p:nvSpPr>
+        <p:spPr/>
+        <p:txBody>
+          <a:bodyPr>
+            <a:normAutofit/>
+          </a:bodyPr>
+          <a:lstStyle/>
+          <a:p>
+            <a:pPr marL="514350" indent="-514350">
+              <a:buFont typeface="+mj-lt"/>
+              <a:buAutoNum type="arabicPeriod" startAt="6"/>
+            </a:pPr>
+            <a:r>
+              <a:rPr lang="en-GB" b="1" dirty="0"/>
+              <a:t>And finally, train these new layers that currently have random values in their trainable parameters, using the MNIST dataset!</a:t>
+            </a:r>
+          </a:p>
+          <a:p>
+            <a:pPr marL="0" indent="0">
+              <a:buNone/>
+            </a:pPr>
+            <a:endParaRPr lang="en-SG" dirty="0"/>
           </a:p>
         </p:txBody>
       </p:sp>
     </p:spTree>
     <p:extLst>
       <p:ext uri="{BB962C8B-B14F-4D97-AF65-F5344CB8AC3E}">
-        <p14:creationId xmlns:p14="http://schemas.microsoft.com/office/powerpoint/2010/main" val="1782110643"/>
+        <p14:creationId xmlns:p14="http://schemas.microsoft.com/office/powerpoint/2010/main" val="2000086281"/>
       </p:ext>
     </p:extLst>
   </p:cSld>
@@ -15247,159 +15872,126 @@
           <a:chExt cx="0" cy="0"/>
         </a:xfrm>
       </p:grpSpPr>
-      <p:sp>
-        <p:nvSpPr>
-          <p:cNvPr id="2" name="Title 1">
-            <a:extLst>
-              <a:ext uri="{FF2B5EF4-FFF2-40B4-BE49-F238E27FC236}">
-                <a16:creationId xmlns:a16="http://schemas.microsoft.com/office/drawing/2014/main" id="{F6E33F64-ACBF-414C-8E71-06E4F9517B15}"/>
-              </a:ext>
-            </a:extLst>
-          </p:cNvPr>
-          <p:cNvSpPr>
-            <a:spLocks noGrp="1"/>
-          </p:cNvSpPr>
-          <p:nvPr>
-            <p:ph type="title"/>
-          </p:nvPr>
-        </p:nvSpPr>
-        <p:spPr/>
-        <p:txBody>
-          <a:bodyPr/>
-          <a:lstStyle/>
-          <a:p>
-            <a:r>
-              <a:rPr lang="en-US" dirty="0"/>
-              <a:t>Learn more about these topics</a:t>
-            </a:r>
-            <a:endParaRPr lang="en-GB" dirty="0"/>
-          </a:p>
-        </p:txBody>
-      </p:sp>
-      <p:sp>
-        <p:nvSpPr>
-          <p:cNvPr id="3" name="Content Placeholder 2">
-            <a:extLst>
-              <a:ext uri="{FF2B5EF4-FFF2-40B4-BE49-F238E27FC236}">
-                <a16:creationId xmlns:a16="http://schemas.microsoft.com/office/drawing/2014/main" id="{C71C8DD6-14D1-44DF-9843-EFEDF44E39A2}"/>
-              </a:ext>
-            </a:extLst>
-          </p:cNvPr>
-          <p:cNvSpPr>
-            <a:spLocks noGrp="1"/>
-          </p:cNvSpPr>
-          <p:nvPr>
-            <p:ph idx="1"/>
-          </p:nvPr>
-        </p:nvSpPr>
+      <p:pic>
+        <p:nvPicPr>
+          <p:cNvPr id="10" name="Picture 9">
+            <a:extLst>
+              <a:ext uri="{FF2B5EF4-FFF2-40B4-BE49-F238E27FC236}">
+                <a16:creationId xmlns:a16="http://schemas.microsoft.com/office/drawing/2014/main" id="{4883BC96-1309-6EBF-7307-A16A308242A3}"/>
+              </a:ext>
+            </a:extLst>
+          </p:cNvPr>
+          <p:cNvPicPr>
+            <a:picLocks noChangeAspect="1"/>
+          </p:cNvPicPr>
+          <p:nvPr/>
+        </p:nvPicPr>
+        <p:blipFill>
+          <a:blip r:embed="rId2"/>
+          <a:stretch>
+            <a:fillRect/>
+          </a:stretch>
+        </p:blipFill>
         <p:spPr>
           <a:xfrm>
-            <a:off x="838200" y="1825624"/>
-            <a:ext cx="10916138" cy="5032375"/>
+            <a:off x="1287567" y="0"/>
+            <a:ext cx="9616865" cy="6858000"/>
           </a:xfrm>
+          <a:prstGeom prst="rect">
+            <a:avLst/>
+          </a:prstGeom>
         </p:spPr>
-        <p:txBody>
-          <a:bodyPr>
-            <a:normAutofit/>
+      </p:pic>
+      <p:pic>
+        <p:nvPicPr>
+          <p:cNvPr id="14" name="Picture 13">
+            <a:extLst>
+              <a:ext uri="{FF2B5EF4-FFF2-40B4-BE49-F238E27FC236}">
+                <a16:creationId xmlns:a16="http://schemas.microsoft.com/office/drawing/2014/main" id="{643A04D3-C578-F514-E7D3-1A76D2B5A513}"/>
+              </a:ext>
+            </a:extLst>
+          </p:cNvPr>
+          <p:cNvPicPr>
+            <a:picLocks noChangeAspect="1"/>
+          </p:cNvPicPr>
+          <p:nvPr/>
+        </p:nvPicPr>
+        <p:blipFill>
+          <a:blip r:embed="rId3"/>
+          <a:stretch>
+            <a:fillRect/>
+          </a:stretch>
+        </p:blipFill>
+        <p:spPr>
+          <a:xfrm>
+            <a:off x="6838461" y="5447966"/>
+            <a:ext cx="3953427" cy="1276528"/>
+          </a:xfrm>
+          <a:prstGeom prst="rect">
+            <a:avLst/>
+          </a:prstGeom>
+        </p:spPr>
+      </p:pic>
+      <p:sp>
+        <p:nvSpPr>
+          <p:cNvPr id="15" name="TextBox 14">
+            <a:extLst>
+              <a:ext uri="{FF2B5EF4-FFF2-40B4-BE49-F238E27FC236}">
+                <a16:creationId xmlns:a16="http://schemas.microsoft.com/office/drawing/2014/main" id="{E6BCB383-605C-A7E9-70CB-A41DD640BCA9}"/>
+              </a:ext>
+            </a:extLst>
+          </p:cNvPr>
+          <p:cNvSpPr txBox="1"/>
+          <p:nvPr/>
+        </p:nvSpPr>
+        <p:spPr>
+          <a:xfrm>
+            <a:off x="6966837" y="4483463"/>
+            <a:ext cx="4044874" cy="830997"/>
+          </a:xfrm>
+          <a:prstGeom prst="rect">
+            <a:avLst/>
+          </a:prstGeom>
+          <a:noFill/>
+        </p:spPr>
+        <p:txBody>
+          <a:bodyPr wrap="square" rtlCol="0">
+            <a:spAutoFit/>
           </a:bodyPr>
           <a:lstStyle/>
           <a:p>
-            <a:pPr marL="0" indent="0">
-              <a:buNone/>
-            </a:pPr>
-            <a:r>
-              <a:rPr lang="en-US" dirty="0"/>
-              <a:t>Out of class, supporting papers, for those of you who are curious.</a:t>
-            </a:r>
-          </a:p>
-          <a:p>
-            <a:r>
-              <a:rPr lang="en-SG" dirty="0"/>
-              <a:t>[Huang2016] G. Huang, Z. Liu, L. van der </a:t>
-            </a:r>
-            <a:r>
-              <a:rPr lang="en-SG" dirty="0" err="1"/>
-              <a:t>Maaten</a:t>
-            </a:r>
-            <a:r>
-              <a:rPr lang="en-SG" dirty="0"/>
-              <a:t>, K. Q. Weinberger, “Densely Connected Convolutional Networks”, 2016.</a:t>
-            </a:r>
-          </a:p>
-          <a:p>
-            <a:r>
-              <a:rPr lang="en-SG" dirty="0"/>
-              <a:t>[Szegedy2014] C. </a:t>
-            </a:r>
-            <a:r>
-              <a:rPr lang="en-SG" b="1" dirty="0" err="1">
+            <a:pPr algn="ctr"/>
+            <a:r>
+              <a:rPr lang="en-GB" sz="2400" b="1" dirty="0">
                 <a:solidFill>
-                  <a:schemeClr val="accent2">
-                    <a:lumMod val="50000"/>
-                  </a:schemeClr>
+                  <a:schemeClr val="accent2"/>
                 </a:solidFill>
               </a:rPr>
-              <a:t>Szegedy</a:t>
-            </a:r>
-            <a:r>
-              <a:rPr lang="en-SG" dirty="0"/>
-              <a:t> et al., “Going deeper with convolutions”, 2014.</a:t>
-            </a:r>
-          </a:p>
-          <a:p>
-            <a:r>
-              <a:rPr lang="en-GB" dirty="0"/>
-              <a:t>[Tan2019] M. Tan and Q. V. </a:t>
-            </a:r>
-            <a:r>
-              <a:rPr lang="en-GB" b="1" dirty="0">
+              <a:t>Wait that works very nicely?!</a:t>
+            </a:r>
+          </a:p>
+          <a:p>
+            <a:pPr algn="ctr"/>
+            <a:r>
+              <a:rPr lang="en-GB" sz="2400" b="1" dirty="0">
                 <a:solidFill>
-                  <a:schemeClr val="accent2">
-                    <a:lumMod val="50000"/>
-                  </a:schemeClr>
+                  <a:schemeClr val="accent2"/>
                 </a:solidFill>
               </a:rPr>
-              <a:t>Le</a:t>
-            </a:r>
-            <a:r>
-              <a:rPr lang="en-GB" dirty="0"/>
-              <a:t>, “</a:t>
-            </a:r>
-            <a:r>
-              <a:rPr lang="en-GB" dirty="0" err="1"/>
-              <a:t>EfficientNet</a:t>
-            </a:r>
-            <a:r>
-              <a:rPr lang="en-GB" dirty="0"/>
-              <a:t>: Rethinking Model Scaling for Convolutional Neural Networks”, 2019.</a:t>
-            </a:r>
-          </a:p>
-          <a:p>
-            <a:r>
-              <a:rPr lang="en-GB" dirty="0"/>
-              <a:t>[Yosinski2014] J. </a:t>
-            </a:r>
-            <a:r>
-              <a:rPr lang="en-GB" dirty="0" err="1"/>
-              <a:t>Yosinski</a:t>
-            </a:r>
-            <a:r>
-              <a:rPr lang="en-GB" dirty="0"/>
-              <a:t> et al., “How transferable are features in deep neural networks?” 2014.</a:t>
-            </a:r>
-          </a:p>
-          <a:p>
-            <a:endParaRPr lang="en-GB" dirty="0"/>
-          </a:p>
-          <a:p>
-            <a:endParaRPr lang="en-GB" dirty="0"/>
+              <a:t>That feels borderline illegal!</a:t>
+            </a:r>
+            <a:endParaRPr lang="en-SG" sz="2400" b="1" dirty="0">
+              <a:solidFill>
+                <a:schemeClr val="accent2"/>
+              </a:solidFill>
+            </a:endParaRPr>
           </a:p>
         </p:txBody>
       </p:sp>
     </p:spTree>
     <p:extLst>
       <p:ext uri="{BB962C8B-B14F-4D97-AF65-F5344CB8AC3E}">
-        <p14:creationId xmlns:p14="http://schemas.microsoft.com/office/powerpoint/2010/main" val="2400758646"/>
+        <p14:creationId xmlns:p14="http://schemas.microsoft.com/office/powerpoint/2010/main" val="2143040470"/>
       </p:ext>
     </p:extLst>
   </p:cSld>
@@ -15557,7 +16149,7 @@
           <p:cNvPr id="2" name="Title 1">
             <a:extLst>
               <a:ext uri="{FF2B5EF4-FFF2-40B4-BE49-F238E27FC236}">
-                <a16:creationId xmlns:a16="http://schemas.microsoft.com/office/drawing/2014/main" id="{01BA4A12-42C1-4189-603A-5E1F4771759C}"/>
+                <a16:creationId xmlns:a16="http://schemas.microsoft.com/office/drawing/2014/main" id="{E432D4A4-02EB-726C-FC94-DD69E4E76295}"/>
               </a:ext>
             </a:extLst>
           </p:cNvPr>
@@ -15575,7 +16167,7 @@
           <a:p>
             <a:r>
               <a:rPr lang="en-GB" dirty="0"/>
-              <a:t>Learn more about these topics</a:t>
+              <a:t>Finetuning and unfreezing layers</a:t>
             </a:r>
             <a:endParaRPr lang="en-SG" dirty="0"/>
           </a:p>
@@ -15586,7 +16178,7 @@
           <p:cNvPr id="3" name="Content Placeholder 2">
             <a:extLst>
               <a:ext uri="{FF2B5EF4-FFF2-40B4-BE49-F238E27FC236}">
-                <a16:creationId xmlns:a16="http://schemas.microsoft.com/office/drawing/2014/main" id="{E475B357-0886-EDDA-5F55-77F580FB4D9B}"/>
+                <a16:creationId xmlns:a16="http://schemas.microsoft.com/office/drawing/2014/main" id="{9BBF8595-437B-05D4-0FCE-C31C3FD4C3C6}"/>
               </a:ext>
             </a:extLst>
           </p:cNvPr>
@@ -15613,142 +16205,66 @@
               <a:buNone/>
             </a:pPr>
             <a:r>
-              <a:rPr lang="en-US" dirty="0"/>
-              <a:t>Tracking important names (Track their works and follow them on Scholar, Twitter, or whatever works for you!)</a:t>
-            </a:r>
-          </a:p>
-          <a:p>
-            <a:r>
               <a:rPr lang="en-GB" b="1" dirty="0"/>
-              <a:t>Karen </a:t>
-            </a:r>
-            <a:r>
-              <a:rPr lang="en-GB" b="1" dirty="0" err="1">
+              <a:t>Definition (</a:t>
+            </a:r>
+            <a:r>
+              <a:rPr lang="en-GB" b="1" dirty="0">
                 <a:solidFill>
-                  <a:schemeClr val="accent2">
-                    <a:lumMod val="50000"/>
-                  </a:schemeClr>
+                  <a:srgbClr val="00B050"/>
                 </a:solidFill>
               </a:rPr>
-              <a:t>Simonyan</a:t>
+              <a:t>fine-tuning</a:t>
             </a:r>
             <a:r>
               <a:rPr lang="en-GB" b="1" dirty="0"/>
-              <a:t>: </a:t>
-            </a:r>
-            <a:r>
-              <a:rPr lang="en-GB" b="1" dirty="0" err="1"/>
-              <a:t>Fromer</a:t>
-            </a:r>
-            <a:r>
-              <a:rPr lang="en-GB" b="1" dirty="0"/>
-              <a:t> researcher</a:t>
-            </a:r>
-            <a:r>
-              <a:rPr lang="en-GB" dirty="0"/>
-              <a:t> at </a:t>
-            </a:r>
-            <a:r>
-              <a:rPr lang="en-GB" b="1" dirty="0"/>
-              <a:t>Facebook</a:t>
-            </a:r>
-            <a:r>
-              <a:rPr lang="en-GB" dirty="0"/>
-              <a:t> </a:t>
-            </a:r>
-            <a:r>
-              <a:rPr lang="en-GB" b="1" dirty="0"/>
-              <a:t>AI, </a:t>
-            </a:r>
-            <a:r>
-              <a:rPr lang="en-GB" dirty="0"/>
-              <a:t>now</a:t>
-            </a:r>
-            <a:r>
-              <a:rPr lang="en-GB" b="1" dirty="0"/>
-              <a:t> Co-Founder</a:t>
-            </a:r>
-            <a:r>
-              <a:rPr lang="en-GB" dirty="0"/>
               <a:t> and </a:t>
-            </a:r>
-            <a:r>
-              <a:rPr lang="en-GB" b="1" dirty="0"/>
-              <a:t>Chief</a:t>
-            </a:r>
-            <a:r>
-              <a:rPr lang="en-GB" dirty="0"/>
-              <a:t> </a:t>
-            </a:r>
-            <a:r>
-              <a:rPr lang="en-GB" b="1" dirty="0"/>
-              <a:t>Scientist</a:t>
-            </a:r>
-            <a:r>
-              <a:rPr lang="en-GB" dirty="0"/>
-              <a:t> at </a:t>
-            </a:r>
-            <a:r>
-              <a:rPr lang="en-GB" b="1" dirty="0"/>
-              <a:t>Inflection</a:t>
-            </a:r>
-            <a:r>
-              <a:rPr lang="en-GB" dirty="0"/>
-              <a:t> </a:t>
-            </a:r>
-            <a:r>
-              <a:rPr lang="en-GB" b="1" dirty="0"/>
-              <a:t>AI</a:t>
-            </a:r>
-            <a:r>
-              <a:rPr lang="en-GB" dirty="0"/>
-              <a:t>.</a:t>
-            </a:r>
-            <a:br>
-              <a:rPr lang="en-GB" dirty="0"/>
-            </a:br>
-            <a:r>
-              <a:rPr lang="en-GB" dirty="0">
-                <a:hlinkClick r:id="rId2"/>
-              </a:rPr>
-              <a:t>https://scholar.google.com/citations?user=L7lMQkQAAAAJ&amp;hl=fr</a:t>
-            </a:r>
-            <a:br>
-              <a:rPr lang="en-GB" dirty="0"/>
-            </a:br>
-            <a:r>
-              <a:rPr lang="en-GB" dirty="0">
-                <a:hlinkClick r:id="rId3"/>
-              </a:rPr>
-              <a:t>https://www.robots.ox.ac.uk/~karen/</a:t>
-            </a:r>
-            <a:r>
-              <a:rPr lang="en-GB" dirty="0"/>
-              <a:t> </a:t>
-            </a:r>
-          </a:p>
-          <a:p>
-            <a:r>
-              <a:rPr lang="en-GB" b="1" dirty="0"/>
-              <a:t>Andrew</a:t>
-            </a:r>
-            <a:r>
-              <a:rPr lang="en-GB" dirty="0"/>
-              <a:t> </a:t>
             </a:r>
             <a:r>
               <a:rPr lang="en-GB" b="1" dirty="0">
                 <a:solidFill>
-                  <a:schemeClr val="accent2">
-                    <a:lumMod val="50000"/>
-                  </a:schemeClr>
+                  <a:srgbClr val="00B050"/>
                 </a:solidFill>
               </a:rPr>
-              <a:t>Zisserman</a:t>
+              <a:t>unfreezing</a:t>
             </a:r>
             <a:r>
               <a:rPr lang="en-GB" b="1" dirty="0"/>
-              <a:t>:</a:t>
+              <a:t> layers):</a:t>
+            </a:r>
+          </a:p>
+          <a:p>
+            <a:pPr marL="0" indent="0">
+              <a:buNone/>
+            </a:pPr>
+            <a:r>
+              <a:rPr lang="en-GB" dirty="0"/>
+              <a:t>Introduced in [Yosinski2014], </a:t>
+            </a:r>
+            <a:r>
+              <a:rPr lang="en-GB" b="1" dirty="0">
+                <a:solidFill>
+                  <a:srgbClr val="00B050"/>
+                </a:solidFill>
+              </a:rPr>
+              <a:t>fine-tuning</a:t>
+            </a:r>
+            <a:r>
+              <a:rPr lang="en-GB" dirty="0"/>
+              <a:t>, suggests to use a pre-trained network as a starting point, as before.</a:t>
+            </a:r>
+          </a:p>
+          <a:p>
+            <a:pPr marL="0" indent="0">
+              <a:buNone/>
+            </a:pPr>
+            <a:r>
+              <a:rPr lang="en-GB" dirty="0"/>
+              <a:t>However, the network is further trained by progressively </a:t>
+            </a:r>
+            <a:r>
+              <a:rPr lang="en-GB" b="1" dirty="0"/>
+              <a:t>unfreezing</a:t>
             </a:r>
             <a:r>
               <a:rPr lang="en-GB" dirty="0"/>
@@ -15756,15 +16272,7 @@
             </a:r>
             <a:r>
               <a:rPr lang="en-GB" b="1" dirty="0"/>
-              <a:t>Professor</a:t>
-            </a:r>
-            <a:r>
-              <a:rPr lang="en-GB" dirty="0"/>
-              <a:t> at the </a:t>
-            </a:r>
-            <a:r>
-              <a:rPr lang="en-GB" b="1" dirty="0"/>
-              <a:t>University</a:t>
+              <a:t>some</a:t>
             </a:r>
             <a:r>
               <a:rPr lang="en-GB" dirty="0"/>
@@ -15780,74 +16288,55 @@
             </a:r>
             <a:r>
               <a:rPr lang="en-GB" b="1" dirty="0"/>
-              <a:t>Oxford</a:t>
-            </a:r>
-            <a:r>
-              <a:rPr lang="en-GB" dirty="0"/>
-              <a:t> and </a:t>
+              <a:t>its</a:t>
+            </a:r>
+            <a:r>
+              <a:rPr lang="en-GB" dirty="0"/>
+              <a:t> </a:t>
             </a:r>
             <a:r>
               <a:rPr lang="en-GB" b="1" dirty="0"/>
-              <a:t>Principal</a:t>
-            </a:r>
-            <a:r>
-              <a:rPr lang="en-GB" dirty="0"/>
-              <a:t> </a:t>
-            </a:r>
-            <a:r>
-              <a:rPr lang="en-GB" b="1" dirty="0"/>
-              <a:t>Researcher</a:t>
-            </a:r>
-            <a:r>
-              <a:rPr lang="en-GB" dirty="0"/>
-              <a:t> at </a:t>
-            </a:r>
-            <a:r>
-              <a:rPr lang="en-GB" b="1" dirty="0">
-                <a:solidFill>
-                  <a:schemeClr val="accent2">
-                    <a:lumMod val="50000"/>
-                  </a:schemeClr>
-                </a:solidFill>
-              </a:rPr>
-              <a:t>DeepMind</a:t>
-            </a:r>
-            <a:r>
-              <a:rPr lang="en-GB" dirty="0"/>
-              <a:t>.</a:t>
-            </a:r>
-            <a:br>
-              <a:rPr lang="en-GB" dirty="0"/>
-            </a:br>
-            <a:r>
-              <a:rPr lang="en-GB" dirty="0">
-                <a:hlinkClick r:id="rId4"/>
-              </a:rPr>
-              <a:t>https://scholar.google.com/citations?user=UZ5wscMAAAAJ&amp;hl=en</a:t>
-            </a:r>
-            <a:br>
-              <a:rPr lang="en-GB" dirty="0"/>
-            </a:br>
-            <a:r>
-              <a:rPr lang="en-GB" dirty="0">
-                <a:hlinkClick r:id="rId5"/>
-              </a:rPr>
-              <a:t>https://www.robots.ox.ac.uk/~az/</a:t>
-            </a:r>
-            <a:r>
-              <a:rPr lang="en-GB" dirty="0"/>
-              <a:t> </a:t>
-            </a:r>
-          </a:p>
-          <a:p>
-            <a:endParaRPr lang="en-SG" dirty="0"/>
+              <a:t>layers</a:t>
+            </a:r>
+            <a:r>
+              <a:rPr lang="en-GB" dirty="0"/>
+              <a:t>, therefore allowing the weights in those layers to be updated during re-training.</a:t>
+            </a:r>
+          </a:p>
+          <a:p>
+            <a:pPr marL="0" indent="0">
+              <a:buNone/>
+            </a:pPr>
+            <a:r>
+              <a:rPr lang="en-GB" dirty="0"/>
+              <a:t>Usually, we will start by freezing all layers except the last few ones, and will progressively retrain layers, unfreezing more and more of them.</a:t>
+            </a:r>
+          </a:p>
+          <a:p>
+            <a:pPr marL="0" indent="0">
+              <a:buNone/>
+            </a:pPr>
+            <a:r>
+              <a:rPr lang="en-GB" dirty="0"/>
+              <a:t>Doing so, the network can be adapted to the new problem and often achieve better performance.</a:t>
+            </a:r>
+          </a:p>
+          <a:p>
+            <a:pPr marL="0" indent="0">
+              <a:buNone/>
+            </a:pPr>
+            <a:r>
+              <a:rPr lang="en-GB" i="1" dirty="0"/>
+              <a:t>(Works, but we leave it to students to try it out!)</a:t>
+            </a:r>
+            <a:endParaRPr lang="en-SG" i="1" dirty="0"/>
           </a:p>
         </p:txBody>
       </p:sp>
     </p:spTree>
     <p:extLst>
       <p:ext uri="{BB962C8B-B14F-4D97-AF65-F5344CB8AC3E}">
-        <p14:creationId xmlns:p14="http://schemas.microsoft.com/office/powerpoint/2010/main" val="2337881207"/>
+        <p14:creationId xmlns:p14="http://schemas.microsoft.com/office/powerpoint/2010/main" val="4063861739"/>
       </p:ext>
     </p:extLst>
   </p:cSld>
@@ -15879,6 +16368,940 @@
           <p:cNvPr id="2" name="Title 1">
             <a:extLst>
               <a:ext uri="{FF2B5EF4-FFF2-40B4-BE49-F238E27FC236}">
+                <a16:creationId xmlns:a16="http://schemas.microsoft.com/office/drawing/2014/main" id="{11A08BA8-9DEC-4471-8590-434E8D8BB4A0}"/>
+              </a:ext>
+            </a:extLst>
+          </p:cNvPr>
+          <p:cNvSpPr>
+            <a:spLocks noGrp="1"/>
+          </p:cNvSpPr>
+          <p:nvPr>
+            <p:ph type="title"/>
+          </p:nvPr>
+        </p:nvSpPr>
+        <p:spPr/>
+        <p:txBody>
+          <a:bodyPr/>
+          <a:lstStyle/>
+          <a:p>
+            <a:r>
+              <a:rPr lang="en-US" dirty="0"/>
+              <a:t>Conclusion (Week 4)</a:t>
+            </a:r>
+            <a:endParaRPr lang="en-GB" dirty="0"/>
+          </a:p>
+        </p:txBody>
+      </p:sp>
+      <p:sp>
+        <p:nvSpPr>
+          <p:cNvPr id="3" name="Content Placeholder 2">
+            <a:extLst>
+              <a:ext uri="{FF2B5EF4-FFF2-40B4-BE49-F238E27FC236}">
+                <a16:creationId xmlns:a16="http://schemas.microsoft.com/office/drawing/2014/main" id="{47E3549C-D723-41E6-8478-270ACE043694}"/>
+              </a:ext>
+            </a:extLst>
+          </p:cNvPr>
+          <p:cNvSpPr>
+            <a:spLocks noGrp="1"/>
+          </p:cNvSpPr>
+          <p:nvPr>
+            <p:ph sz="half" idx="1"/>
+          </p:nvPr>
+        </p:nvSpPr>
+        <p:spPr>
+          <a:xfrm>
+            <a:off x="838200" y="1825624"/>
+            <a:ext cx="5257800" cy="5032375"/>
+          </a:xfrm>
+        </p:spPr>
+        <p:txBody>
+          <a:bodyPr>
+            <a:normAutofit/>
+          </a:bodyPr>
+          <a:lstStyle/>
+          <a:p>
+            <a:r>
+              <a:rPr lang="en-US" dirty="0"/>
+              <a:t>Encoding images as matrices and tensors</a:t>
+            </a:r>
+          </a:p>
+          <a:p>
+            <a:r>
+              <a:rPr lang="en-US" dirty="0"/>
+              <a:t>The convolution operation, in full (kernel, padding, stride, dilation)</a:t>
+            </a:r>
+          </a:p>
+          <a:p>
+            <a:r>
+              <a:rPr lang="en-US" dirty="0"/>
+              <a:t>Image processing using convolutions</a:t>
+            </a:r>
+          </a:p>
+          <a:p>
+            <a:r>
+              <a:rPr lang="en-US" dirty="0"/>
+              <a:t>Building a convolutional layer and a Convolution Neural Network.</a:t>
+            </a:r>
+          </a:p>
+          <a:p>
+            <a:r>
+              <a:rPr lang="en-US" dirty="0"/>
+              <a:t>On the performance of Convolution vs. Linear</a:t>
+            </a:r>
+            <a:endParaRPr lang="en-GB" dirty="0"/>
+          </a:p>
+        </p:txBody>
+      </p:sp>
+      <p:sp>
+        <p:nvSpPr>
+          <p:cNvPr id="4" name="Content Placeholder 3">
+            <a:extLst>
+              <a:ext uri="{FF2B5EF4-FFF2-40B4-BE49-F238E27FC236}">
+                <a16:creationId xmlns:a16="http://schemas.microsoft.com/office/drawing/2014/main" id="{7E420A50-DCDA-4FEF-986F-775F53063E3A}"/>
+              </a:ext>
+            </a:extLst>
+          </p:cNvPr>
+          <p:cNvSpPr>
+            <a:spLocks noGrp="1"/>
+          </p:cNvSpPr>
+          <p:nvPr>
+            <p:ph sz="half" idx="2"/>
+          </p:nvPr>
+        </p:nvSpPr>
+        <p:spPr>
+          <a:xfrm>
+            <a:off x="6172200" y="1825624"/>
+            <a:ext cx="5181600" cy="5032375"/>
+          </a:xfrm>
+        </p:spPr>
+        <p:txBody>
+          <a:bodyPr>
+            <a:normAutofit/>
+          </a:bodyPr>
+          <a:lstStyle/>
+          <a:p>
+            <a:r>
+              <a:rPr lang="en-US" dirty="0"/>
+              <a:t>More operations on images (pooling, </a:t>
+            </a:r>
+            <a:r>
+              <a:rPr lang="en-US" dirty="0" err="1"/>
+              <a:t>batchnorm</a:t>
+            </a:r>
+            <a:r>
+              <a:rPr lang="en-US" dirty="0"/>
+              <a:t>, dropout)</a:t>
+            </a:r>
+          </a:p>
+          <a:p>
+            <a:r>
+              <a:rPr lang="en-US" dirty="0"/>
+              <a:t>Data augmentation</a:t>
+            </a:r>
+          </a:p>
+          <a:p>
+            <a:r>
+              <a:rPr lang="en-US" dirty="0"/>
+              <a:t>Some milestone models and their key ideas (residuals, parallelizing, dynamic scaling, etc.)</a:t>
+            </a:r>
+          </a:p>
+          <a:p>
+            <a:r>
+              <a:rPr lang="en-US" dirty="0"/>
+              <a:t>A ramp to 50.035 Computer Vision on Term 7!</a:t>
+            </a:r>
+          </a:p>
+          <a:p>
+            <a:r>
+              <a:rPr lang="en-US" dirty="0"/>
+              <a:t>Transfer learning and fine-tuning</a:t>
+            </a:r>
+            <a:endParaRPr lang="en-GB" dirty="0"/>
+          </a:p>
+        </p:txBody>
+      </p:sp>
+    </p:spTree>
+    <p:extLst>
+      <p:ext uri="{BB962C8B-B14F-4D97-AF65-F5344CB8AC3E}">
+        <p14:creationId xmlns:p14="http://schemas.microsoft.com/office/powerpoint/2010/main" val="1036081419"/>
+      </p:ext>
+    </p:extLst>
+  </p:cSld>
+  <p:clrMapOvr>
+    <a:masterClrMapping/>
+  </p:clrMapOvr>
+</p:sld>
+</file>
+
+<file path=ppt/slides/slide62.xml><?xml version="1.0" encoding="utf-8"?>
+<p:sld xmlns:a="http://schemas.openxmlformats.org/drawingml/2006/main" xmlns:r="http://schemas.openxmlformats.org/officeDocument/2006/relationships" xmlns:p="http://schemas.openxmlformats.org/presentationml/2006/main">
+  <p:cSld>
+    <p:spTree>
+      <p:nvGrpSpPr>
+        <p:cNvPr id="1" name=""/>
+        <p:cNvGrpSpPr/>
+        <p:nvPr/>
+      </p:nvGrpSpPr>
+      <p:grpSpPr>
+        <a:xfrm>
+          <a:off x="0" y="0"/>
+          <a:ext cx="0" cy="0"/>
+          <a:chOff x="0" y="0"/>
+          <a:chExt cx="0" cy="0"/>
+        </a:xfrm>
+      </p:grpSpPr>
+      <p:sp>
+        <p:nvSpPr>
+          <p:cNvPr id="2" name="Title 1">
+            <a:extLst>
+              <a:ext uri="{FF2B5EF4-FFF2-40B4-BE49-F238E27FC236}">
+                <a16:creationId xmlns:a16="http://schemas.microsoft.com/office/drawing/2014/main" id="{F6E33F64-ACBF-414C-8E71-06E4F9517B15}"/>
+              </a:ext>
+            </a:extLst>
+          </p:cNvPr>
+          <p:cNvSpPr>
+            <a:spLocks noGrp="1"/>
+          </p:cNvSpPr>
+          <p:nvPr>
+            <p:ph type="title"/>
+          </p:nvPr>
+        </p:nvSpPr>
+        <p:spPr/>
+        <p:txBody>
+          <a:bodyPr/>
+          <a:lstStyle/>
+          <a:p>
+            <a:r>
+              <a:rPr lang="en-US" dirty="0"/>
+              <a:t>Learn more about these topics</a:t>
+            </a:r>
+            <a:endParaRPr lang="en-GB" dirty="0"/>
+          </a:p>
+        </p:txBody>
+      </p:sp>
+      <p:sp>
+        <p:nvSpPr>
+          <p:cNvPr id="3" name="Content Placeholder 2">
+            <a:extLst>
+              <a:ext uri="{FF2B5EF4-FFF2-40B4-BE49-F238E27FC236}">
+                <a16:creationId xmlns:a16="http://schemas.microsoft.com/office/drawing/2014/main" id="{C71C8DD6-14D1-44DF-9843-EFEDF44E39A2}"/>
+              </a:ext>
+            </a:extLst>
+          </p:cNvPr>
+          <p:cNvSpPr>
+            <a:spLocks noGrp="1"/>
+          </p:cNvSpPr>
+          <p:nvPr>
+            <p:ph idx="1"/>
+          </p:nvPr>
+        </p:nvSpPr>
+        <p:spPr>
+          <a:xfrm>
+            <a:off x="838200" y="1825624"/>
+            <a:ext cx="10916138" cy="5032375"/>
+          </a:xfrm>
+        </p:spPr>
+        <p:txBody>
+          <a:bodyPr>
+            <a:normAutofit/>
+          </a:bodyPr>
+          <a:lstStyle/>
+          <a:p>
+            <a:pPr marL="0" indent="0">
+              <a:buNone/>
+            </a:pPr>
+            <a:r>
+              <a:rPr lang="en-US" dirty="0"/>
+              <a:t>Out of class, supporting papers, for those of you who are curious.</a:t>
+            </a:r>
+          </a:p>
+          <a:p>
+            <a:r>
+              <a:rPr lang="en-GB" dirty="0"/>
+              <a:t>[Krizhevsky2012] A. </a:t>
+            </a:r>
+            <a:r>
+              <a:rPr lang="en-GB" b="1" dirty="0" err="1">
+                <a:solidFill>
+                  <a:schemeClr val="accent2">
+                    <a:lumMod val="50000"/>
+                  </a:schemeClr>
+                </a:solidFill>
+              </a:rPr>
+              <a:t>Krizhevsky</a:t>
+            </a:r>
+            <a:r>
+              <a:rPr lang="en-GB" dirty="0"/>
+              <a:t>, I. </a:t>
+            </a:r>
+            <a:r>
+              <a:rPr lang="en-GB" b="1" dirty="0" err="1">
+                <a:solidFill>
+                  <a:schemeClr val="accent2">
+                    <a:lumMod val="50000"/>
+                  </a:schemeClr>
+                </a:solidFill>
+              </a:rPr>
+              <a:t>Sutskever</a:t>
+            </a:r>
+            <a:r>
+              <a:rPr lang="en-GB" dirty="0"/>
+              <a:t>, and G. </a:t>
+            </a:r>
+            <a:r>
+              <a:rPr lang="en-GB" b="1" dirty="0">
+                <a:solidFill>
+                  <a:schemeClr val="accent2">
+                    <a:lumMod val="50000"/>
+                  </a:schemeClr>
+                </a:solidFill>
+              </a:rPr>
+              <a:t>Hinton</a:t>
+            </a:r>
+            <a:r>
+              <a:rPr lang="en-GB" dirty="0"/>
+              <a:t>, “ImageNet Classification with Deep Convolutional Neural Networks”, 2012.</a:t>
+            </a:r>
+            <a:endParaRPr lang="en-US" dirty="0"/>
+          </a:p>
+          <a:p>
+            <a:r>
+              <a:rPr lang="en-US" dirty="0"/>
+              <a:t>[</a:t>
+            </a:r>
+            <a:r>
+              <a:rPr lang="en-GB" dirty="0"/>
+              <a:t>Simonyan2014</a:t>
+            </a:r>
+            <a:r>
+              <a:rPr lang="en-US" dirty="0"/>
+              <a:t>] </a:t>
+            </a:r>
+            <a:r>
+              <a:rPr lang="en-GB" dirty="0"/>
+              <a:t>K. </a:t>
+            </a:r>
+            <a:r>
+              <a:rPr lang="en-GB" b="1" dirty="0" err="1">
+                <a:solidFill>
+                  <a:schemeClr val="accent2">
+                    <a:lumMod val="50000"/>
+                  </a:schemeClr>
+                </a:solidFill>
+              </a:rPr>
+              <a:t>Simonyan</a:t>
+            </a:r>
+            <a:r>
+              <a:rPr lang="en-GB" dirty="0"/>
+              <a:t> and A. </a:t>
+            </a:r>
+            <a:r>
+              <a:rPr lang="en-GB" b="1" dirty="0">
+                <a:solidFill>
+                  <a:schemeClr val="accent2">
+                    <a:lumMod val="50000"/>
+                  </a:schemeClr>
+                </a:solidFill>
+              </a:rPr>
+              <a:t>Zisserman</a:t>
+            </a:r>
+            <a:r>
+              <a:rPr lang="en-GB" dirty="0"/>
+              <a:t> “Very Deep Convolutional Networks for Large-Scale Image Recognition”, 2014.</a:t>
+            </a:r>
+          </a:p>
+          <a:p>
+            <a:r>
+              <a:rPr lang="en-GB" dirty="0"/>
+              <a:t>[He2015] K. </a:t>
+            </a:r>
+            <a:r>
+              <a:rPr lang="en-GB" b="1" dirty="0">
+                <a:solidFill>
+                  <a:schemeClr val="accent2">
+                    <a:lumMod val="50000"/>
+                  </a:schemeClr>
+                </a:solidFill>
+              </a:rPr>
+              <a:t>He</a:t>
+            </a:r>
+            <a:r>
+              <a:rPr lang="en-GB" dirty="0"/>
+              <a:t>, X. Zhang, S. </a:t>
+            </a:r>
+            <a:r>
+              <a:rPr lang="en-GB" b="1" dirty="0">
+                <a:solidFill>
+                  <a:schemeClr val="accent2">
+                    <a:lumMod val="50000"/>
+                  </a:schemeClr>
+                </a:solidFill>
+              </a:rPr>
+              <a:t>Ren</a:t>
+            </a:r>
+            <a:r>
+              <a:rPr lang="en-GB" dirty="0"/>
+              <a:t>, and J. </a:t>
+            </a:r>
+            <a:r>
+              <a:rPr lang="en-GB" b="1" dirty="0">
+                <a:solidFill>
+                  <a:schemeClr val="accent2">
+                    <a:lumMod val="50000"/>
+                  </a:schemeClr>
+                </a:solidFill>
+              </a:rPr>
+              <a:t>Sun</a:t>
+            </a:r>
+            <a:r>
+              <a:rPr lang="en-GB" dirty="0"/>
+              <a:t> “Deep Residual Learning for Image Recognition”, 2015.</a:t>
+            </a:r>
+          </a:p>
+          <a:p>
+            <a:endParaRPr lang="en-GB" dirty="0"/>
+          </a:p>
+          <a:p>
+            <a:endParaRPr lang="en-GB" dirty="0"/>
+          </a:p>
+        </p:txBody>
+      </p:sp>
+    </p:spTree>
+    <p:extLst>
+      <p:ext uri="{BB962C8B-B14F-4D97-AF65-F5344CB8AC3E}">
+        <p14:creationId xmlns:p14="http://schemas.microsoft.com/office/powerpoint/2010/main" val="1782110643"/>
+      </p:ext>
+    </p:extLst>
+  </p:cSld>
+  <p:clrMapOvr>
+    <a:masterClrMapping/>
+  </p:clrMapOvr>
+</p:sld>
+</file>
+
+<file path=ppt/slides/slide63.xml><?xml version="1.0" encoding="utf-8"?>
+<p:sld xmlns:a="http://schemas.openxmlformats.org/drawingml/2006/main" xmlns:r="http://schemas.openxmlformats.org/officeDocument/2006/relationships" xmlns:p="http://schemas.openxmlformats.org/presentationml/2006/main">
+  <p:cSld>
+    <p:spTree>
+      <p:nvGrpSpPr>
+        <p:cNvPr id="1" name=""/>
+        <p:cNvGrpSpPr/>
+        <p:nvPr/>
+      </p:nvGrpSpPr>
+      <p:grpSpPr>
+        <a:xfrm>
+          <a:off x="0" y="0"/>
+          <a:ext cx="0" cy="0"/>
+          <a:chOff x="0" y="0"/>
+          <a:chExt cx="0" cy="0"/>
+        </a:xfrm>
+      </p:grpSpPr>
+      <p:sp>
+        <p:nvSpPr>
+          <p:cNvPr id="2" name="Title 1">
+            <a:extLst>
+              <a:ext uri="{FF2B5EF4-FFF2-40B4-BE49-F238E27FC236}">
+                <a16:creationId xmlns:a16="http://schemas.microsoft.com/office/drawing/2014/main" id="{F6E33F64-ACBF-414C-8E71-06E4F9517B15}"/>
+              </a:ext>
+            </a:extLst>
+          </p:cNvPr>
+          <p:cNvSpPr>
+            <a:spLocks noGrp="1"/>
+          </p:cNvSpPr>
+          <p:nvPr>
+            <p:ph type="title"/>
+          </p:nvPr>
+        </p:nvSpPr>
+        <p:spPr/>
+        <p:txBody>
+          <a:bodyPr/>
+          <a:lstStyle/>
+          <a:p>
+            <a:r>
+              <a:rPr lang="en-US" dirty="0"/>
+              <a:t>Learn more about these topics</a:t>
+            </a:r>
+            <a:endParaRPr lang="en-GB" dirty="0"/>
+          </a:p>
+        </p:txBody>
+      </p:sp>
+      <p:sp>
+        <p:nvSpPr>
+          <p:cNvPr id="3" name="Content Placeholder 2">
+            <a:extLst>
+              <a:ext uri="{FF2B5EF4-FFF2-40B4-BE49-F238E27FC236}">
+                <a16:creationId xmlns:a16="http://schemas.microsoft.com/office/drawing/2014/main" id="{C71C8DD6-14D1-44DF-9843-EFEDF44E39A2}"/>
+              </a:ext>
+            </a:extLst>
+          </p:cNvPr>
+          <p:cNvSpPr>
+            <a:spLocks noGrp="1"/>
+          </p:cNvSpPr>
+          <p:nvPr>
+            <p:ph idx="1"/>
+          </p:nvPr>
+        </p:nvSpPr>
+        <p:spPr>
+          <a:xfrm>
+            <a:off x="838200" y="1825624"/>
+            <a:ext cx="10916138" cy="5032375"/>
+          </a:xfrm>
+        </p:spPr>
+        <p:txBody>
+          <a:bodyPr>
+            <a:normAutofit/>
+          </a:bodyPr>
+          <a:lstStyle/>
+          <a:p>
+            <a:pPr marL="0" indent="0">
+              <a:buNone/>
+            </a:pPr>
+            <a:r>
+              <a:rPr lang="en-US" dirty="0"/>
+              <a:t>Out of class, supporting papers, for those of you who are curious.</a:t>
+            </a:r>
+          </a:p>
+          <a:p>
+            <a:r>
+              <a:rPr lang="en-SG" dirty="0"/>
+              <a:t>[Huang2016] G. Huang, Z. Liu, L. van der </a:t>
+            </a:r>
+            <a:r>
+              <a:rPr lang="en-SG" dirty="0" err="1"/>
+              <a:t>Maaten</a:t>
+            </a:r>
+            <a:r>
+              <a:rPr lang="en-SG" dirty="0"/>
+              <a:t>, K. Q. Weinberger, “Densely Connected Convolutional Networks”, 2016.</a:t>
+            </a:r>
+          </a:p>
+          <a:p>
+            <a:r>
+              <a:rPr lang="en-SG" dirty="0"/>
+              <a:t>[Szegedy2014] C. </a:t>
+            </a:r>
+            <a:r>
+              <a:rPr lang="en-SG" b="1" dirty="0" err="1">
+                <a:solidFill>
+                  <a:schemeClr val="accent2">
+                    <a:lumMod val="50000"/>
+                  </a:schemeClr>
+                </a:solidFill>
+              </a:rPr>
+              <a:t>Szegedy</a:t>
+            </a:r>
+            <a:r>
+              <a:rPr lang="en-SG" dirty="0"/>
+              <a:t> et al., “Going deeper with convolutions”, 2014.</a:t>
+            </a:r>
+          </a:p>
+          <a:p>
+            <a:r>
+              <a:rPr lang="en-GB" dirty="0"/>
+              <a:t>[Tan2019] M. Tan and Q. V. </a:t>
+            </a:r>
+            <a:r>
+              <a:rPr lang="en-GB" b="1" dirty="0">
+                <a:solidFill>
+                  <a:schemeClr val="accent2">
+                    <a:lumMod val="50000"/>
+                  </a:schemeClr>
+                </a:solidFill>
+              </a:rPr>
+              <a:t>Le</a:t>
+            </a:r>
+            <a:r>
+              <a:rPr lang="en-GB" dirty="0"/>
+              <a:t>, “</a:t>
+            </a:r>
+            <a:r>
+              <a:rPr lang="en-GB" dirty="0" err="1"/>
+              <a:t>EfficientNet</a:t>
+            </a:r>
+            <a:r>
+              <a:rPr lang="en-GB" dirty="0"/>
+              <a:t>: Rethinking Model Scaling for Convolutional Neural Networks”, 2019.</a:t>
+            </a:r>
+          </a:p>
+          <a:p>
+            <a:r>
+              <a:rPr lang="en-GB" dirty="0"/>
+              <a:t>[Yosinski2014] J. </a:t>
+            </a:r>
+            <a:r>
+              <a:rPr lang="en-GB" dirty="0" err="1"/>
+              <a:t>Yosinski</a:t>
+            </a:r>
+            <a:r>
+              <a:rPr lang="en-GB" dirty="0"/>
+              <a:t> et al., “How transferable are features in deep neural networks?” 2014.</a:t>
+            </a:r>
+          </a:p>
+          <a:p>
+            <a:endParaRPr lang="en-GB" dirty="0"/>
+          </a:p>
+          <a:p>
+            <a:endParaRPr lang="en-GB" dirty="0"/>
+          </a:p>
+        </p:txBody>
+      </p:sp>
+    </p:spTree>
+    <p:extLst>
+      <p:ext uri="{BB962C8B-B14F-4D97-AF65-F5344CB8AC3E}">
+        <p14:creationId xmlns:p14="http://schemas.microsoft.com/office/powerpoint/2010/main" val="2400758646"/>
+      </p:ext>
+    </p:extLst>
+  </p:cSld>
+  <p:clrMapOvr>
+    <a:masterClrMapping/>
+  </p:clrMapOvr>
+</p:sld>
+</file>
+
+<file path=ppt/slides/slide64.xml><?xml version="1.0" encoding="utf-8"?>
+<p:sld xmlns:a="http://schemas.openxmlformats.org/drawingml/2006/main" xmlns:r="http://schemas.openxmlformats.org/officeDocument/2006/relationships" xmlns:p="http://schemas.openxmlformats.org/presentationml/2006/main">
+  <p:cSld>
+    <p:spTree>
+      <p:nvGrpSpPr>
+        <p:cNvPr id="1" name=""/>
+        <p:cNvGrpSpPr/>
+        <p:nvPr/>
+      </p:nvGrpSpPr>
+      <p:grpSpPr>
+        <a:xfrm>
+          <a:off x="0" y="0"/>
+          <a:ext cx="0" cy="0"/>
+          <a:chOff x="0" y="0"/>
+          <a:chExt cx="0" cy="0"/>
+        </a:xfrm>
+      </p:grpSpPr>
+      <p:sp>
+        <p:nvSpPr>
+          <p:cNvPr id="2" name="Title 1">
+            <a:extLst>
+              <a:ext uri="{FF2B5EF4-FFF2-40B4-BE49-F238E27FC236}">
+                <a16:creationId xmlns:a16="http://schemas.microsoft.com/office/drawing/2014/main" id="{01BA4A12-42C1-4189-603A-5E1F4771759C}"/>
+              </a:ext>
+            </a:extLst>
+          </p:cNvPr>
+          <p:cNvSpPr>
+            <a:spLocks noGrp="1"/>
+          </p:cNvSpPr>
+          <p:nvPr>
+            <p:ph type="title"/>
+          </p:nvPr>
+        </p:nvSpPr>
+        <p:spPr/>
+        <p:txBody>
+          <a:bodyPr/>
+          <a:lstStyle/>
+          <a:p>
+            <a:r>
+              <a:rPr lang="en-GB" dirty="0"/>
+              <a:t>Learn more about these topics</a:t>
+            </a:r>
+            <a:endParaRPr lang="en-SG" dirty="0"/>
+          </a:p>
+        </p:txBody>
+      </p:sp>
+      <p:sp>
+        <p:nvSpPr>
+          <p:cNvPr id="3" name="Content Placeholder 2">
+            <a:extLst>
+              <a:ext uri="{FF2B5EF4-FFF2-40B4-BE49-F238E27FC236}">
+                <a16:creationId xmlns:a16="http://schemas.microsoft.com/office/drawing/2014/main" id="{E475B357-0886-EDDA-5F55-77F580FB4D9B}"/>
+              </a:ext>
+            </a:extLst>
+          </p:cNvPr>
+          <p:cNvSpPr>
+            <a:spLocks noGrp="1"/>
+          </p:cNvSpPr>
+          <p:nvPr>
+            <p:ph idx="1"/>
+          </p:nvPr>
+        </p:nvSpPr>
+        <p:spPr>
+          <a:xfrm>
+            <a:off x="838200" y="1825624"/>
+            <a:ext cx="10515600" cy="5032375"/>
+          </a:xfrm>
+        </p:spPr>
+        <p:txBody>
+          <a:bodyPr>
+            <a:normAutofit/>
+          </a:bodyPr>
+          <a:lstStyle/>
+          <a:p>
+            <a:pPr marL="0" indent="0">
+              <a:buNone/>
+            </a:pPr>
+            <a:r>
+              <a:rPr lang="en-US" dirty="0"/>
+              <a:t>Tracking important names (Track their works and follow them on Scholar, Twitter, or whatever works for you!)</a:t>
+            </a:r>
+          </a:p>
+          <a:p>
+            <a:r>
+              <a:rPr lang="en-GB" b="1" dirty="0"/>
+              <a:t>Karen </a:t>
+            </a:r>
+            <a:r>
+              <a:rPr lang="en-GB" b="1" dirty="0" err="1">
+                <a:solidFill>
+                  <a:schemeClr val="accent2">
+                    <a:lumMod val="50000"/>
+                  </a:schemeClr>
+                </a:solidFill>
+              </a:rPr>
+              <a:t>Simonyan</a:t>
+            </a:r>
+            <a:r>
+              <a:rPr lang="en-GB" b="1" dirty="0"/>
+              <a:t>: </a:t>
+            </a:r>
+            <a:r>
+              <a:rPr lang="en-GB" b="1" dirty="0" err="1"/>
+              <a:t>Fromer</a:t>
+            </a:r>
+            <a:r>
+              <a:rPr lang="en-GB" b="1" dirty="0"/>
+              <a:t> researcher</a:t>
+            </a:r>
+            <a:r>
+              <a:rPr lang="en-GB" dirty="0"/>
+              <a:t> at </a:t>
+            </a:r>
+            <a:r>
+              <a:rPr lang="en-GB" b="1" dirty="0"/>
+              <a:t>Facebook</a:t>
+            </a:r>
+            <a:r>
+              <a:rPr lang="en-GB" dirty="0"/>
+              <a:t> </a:t>
+            </a:r>
+            <a:r>
+              <a:rPr lang="en-GB" b="1" dirty="0"/>
+              <a:t>AI, </a:t>
+            </a:r>
+            <a:r>
+              <a:rPr lang="en-GB" dirty="0"/>
+              <a:t>now</a:t>
+            </a:r>
+            <a:r>
+              <a:rPr lang="en-GB" b="1" dirty="0"/>
+              <a:t> Co-Founder</a:t>
+            </a:r>
+            <a:r>
+              <a:rPr lang="en-GB" dirty="0"/>
+              <a:t> and </a:t>
+            </a:r>
+            <a:r>
+              <a:rPr lang="en-GB" b="1" dirty="0"/>
+              <a:t>Chief</a:t>
+            </a:r>
+            <a:r>
+              <a:rPr lang="en-GB" dirty="0"/>
+              <a:t> </a:t>
+            </a:r>
+            <a:r>
+              <a:rPr lang="en-GB" b="1" dirty="0"/>
+              <a:t>Scientist</a:t>
+            </a:r>
+            <a:r>
+              <a:rPr lang="en-GB" dirty="0"/>
+              <a:t> at </a:t>
+            </a:r>
+            <a:r>
+              <a:rPr lang="en-GB" b="1" dirty="0"/>
+              <a:t>Inflection</a:t>
+            </a:r>
+            <a:r>
+              <a:rPr lang="en-GB" dirty="0"/>
+              <a:t> </a:t>
+            </a:r>
+            <a:r>
+              <a:rPr lang="en-GB" b="1" dirty="0"/>
+              <a:t>AI</a:t>
+            </a:r>
+            <a:r>
+              <a:rPr lang="en-GB" dirty="0"/>
+              <a:t>.</a:t>
+            </a:r>
+            <a:br>
+              <a:rPr lang="en-GB" dirty="0"/>
+            </a:br>
+            <a:r>
+              <a:rPr lang="en-GB" dirty="0">
+                <a:hlinkClick r:id="rId2"/>
+              </a:rPr>
+              <a:t>https://scholar.google.com/citations?user=L7lMQkQAAAAJ&amp;hl=fr</a:t>
+            </a:r>
+            <a:br>
+              <a:rPr lang="en-GB" dirty="0"/>
+            </a:br>
+            <a:r>
+              <a:rPr lang="en-GB" dirty="0">
+                <a:hlinkClick r:id="rId3"/>
+              </a:rPr>
+              <a:t>https://www.robots.ox.ac.uk/~karen/</a:t>
+            </a:r>
+            <a:r>
+              <a:rPr lang="en-GB" dirty="0"/>
+              <a:t> </a:t>
+            </a:r>
+          </a:p>
+          <a:p>
+            <a:r>
+              <a:rPr lang="en-GB" b="1" dirty="0"/>
+              <a:t>Andrew</a:t>
+            </a:r>
+            <a:r>
+              <a:rPr lang="en-GB" dirty="0"/>
+              <a:t> </a:t>
+            </a:r>
+            <a:r>
+              <a:rPr lang="en-GB" b="1" dirty="0">
+                <a:solidFill>
+                  <a:schemeClr val="accent2">
+                    <a:lumMod val="50000"/>
+                  </a:schemeClr>
+                </a:solidFill>
+              </a:rPr>
+              <a:t>Zisserman</a:t>
+            </a:r>
+            <a:r>
+              <a:rPr lang="en-GB" b="1" dirty="0"/>
+              <a:t>:</a:t>
+            </a:r>
+            <a:r>
+              <a:rPr lang="en-GB" dirty="0"/>
+              <a:t> </a:t>
+            </a:r>
+            <a:r>
+              <a:rPr lang="en-GB" b="1" dirty="0"/>
+              <a:t>Professor</a:t>
+            </a:r>
+            <a:r>
+              <a:rPr lang="en-GB" dirty="0"/>
+              <a:t> at the </a:t>
+            </a:r>
+            <a:r>
+              <a:rPr lang="en-GB" b="1" dirty="0"/>
+              <a:t>University</a:t>
+            </a:r>
+            <a:r>
+              <a:rPr lang="en-GB" dirty="0"/>
+              <a:t> </a:t>
+            </a:r>
+            <a:r>
+              <a:rPr lang="en-GB" b="1" dirty="0"/>
+              <a:t>of</a:t>
+            </a:r>
+            <a:r>
+              <a:rPr lang="en-GB" dirty="0"/>
+              <a:t> </a:t>
+            </a:r>
+            <a:r>
+              <a:rPr lang="en-GB" b="1" dirty="0"/>
+              <a:t>Oxford</a:t>
+            </a:r>
+            <a:r>
+              <a:rPr lang="en-GB" dirty="0"/>
+              <a:t> and </a:t>
+            </a:r>
+            <a:r>
+              <a:rPr lang="en-GB" b="1" dirty="0"/>
+              <a:t>Principal</a:t>
+            </a:r>
+            <a:r>
+              <a:rPr lang="en-GB" dirty="0"/>
+              <a:t> </a:t>
+            </a:r>
+            <a:r>
+              <a:rPr lang="en-GB" b="1" dirty="0"/>
+              <a:t>Researcher</a:t>
+            </a:r>
+            <a:r>
+              <a:rPr lang="en-GB" dirty="0"/>
+              <a:t> at </a:t>
+            </a:r>
+            <a:r>
+              <a:rPr lang="en-GB" b="1" dirty="0">
+                <a:solidFill>
+                  <a:schemeClr val="accent2">
+                    <a:lumMod val="50000"/>
+                  </a:schemeClr>
+                </a:solidFill>
+              </a:rPr>
+              <a:t>DeepMind</a:t>
+            </a:r>
+            <a:r>
+              <a:rPr lang="en-GB" dirty="0"/>
+              <a:t>.</a:t>
+            </a:r>
+            <a:br>
+              <a:rPr lang="en-GB" dirty="0"/>
+            </a:br>
+            <a:r>
+              <a:rPr lang="en-GB" dirty="0">
+                <a:hlinkClick r:id="rId4"/>
+              </a:rPr>
+              <a:t>https://scholar.google.com/citations?user=UZ5wscMAAAAJ&amp;hl=en</a:t>
+            </a:r>
+            <a:br>
+              <a:rPr lang="en-GB" dirty="0"/>
+            </a:br>
+            <a:r>
+              <a:rPr lang="en-GB" dirty="0">
+                <a:hlinkClick r:id="rId5"/>
+              </a:rPr>
+              <a:t>https://www.robots.ox.ac.uk/~az/</a:t>
+            </a:r>
+            <a:r>
+              <a:rPr lang="en-GB" dirty="0"/>
+              <a:t> </a:t>
+            </a:r>
+          </a:p>
+          <a:p>
+            <a:endParaRPr lang="en-SG" dirty="0"/>
+          </a:p>
+        </p:txBody>
+      </p:sp>
+    </p:spTree>
+    <p:extLst>
+      <p:ext uri="{BB962C8B-B14F-4D97-AF65-F5344CB8AC3E}">
+        <p14:creationId xmlns:p14="http://schemas.microsoft.com/office/powerpoint/2010/main" val="2337881207"/>
+      </p:ext>
+    </p:extLst>
+  </p:cSld>
+  <p:clrMapOvr>
+    <a:masterClrMapping/>
+  </p:clrMapOvr>
+</p:sld>
+</file>
+
+<file path=ppt/slides/slide65.xml><?xml version="1.0" encoding="utf-8"?>
+<p:sld xmlns:a="http://schemas.openxmlformats.org/drawingml/2006/main" xmlns:r="http://schemas.openxmlformats.org/officeDocument/2006/relationships" xmlns:p="http://schemas.openxmlformats.org/presentationml/2006/main">
+  <p:cSld>
+    <p:spTree>
+      <p:nvGrpSpPr>
+        <p:cNvPr id="1" name=""/>
+        <p:cNvGrpSpPr/>
+        <p:nvPr/>
+      </p:nvGrpSpPr>
+      <p:grpSpPr>
+        <a:xfrm>
+          <a:off x="0" y="0"/>
+          <a:ext cx="0" cy="0"/>
+          <a:chOff x="0" y="0"/>
+          <a:chExt cx="0" cy="0"/>
+        </a:xfrm>
+      </p:grpSpPr>
+      <p:sp>
+        <p:nvSpPr>
+          <p:cNvPr id="2" name="Title 1">
+            <a:extLst>
+              <a:ext uri="{FF2B5EF4-FFF2-40B4-BE49-F238E27FC236}">
                 <a16:creationId xmlns:a16="http://schemas.microsoft.com/office/drawing/2014/main" id="{01BA4A12-42C1-4189-603A-5E1F4771759C}"/>
               </a:ext>
             </a:extLst>
@@ -16228,7 +17651,7 @@
 </p:sld>
 </file>
 
-<file path=ppt/slides/slide62.xml><?xml version="1.0" encoding="utf-8"?>
+<file path=ppt/slides/slide66.xml><?xml version="1.0" encoding="utf-8"?>
 <p:sld xmlns:a="http://schemas.openxmlformats.org/drawingml/2006/main" xmlns:r="http://schemas.openxmlformats.org/officeDocument/2006/relationships" xmlns:p="http://schemas.openxmlformats.org/presentationml/2006/main">
   <p:cSld>
     <p:spTree>

--- a/W4/3. W4S3 final/W4S3.pptx
+++ b/W4/3. W4S3 final/W4S3.pptx
@@ -323,10 +323,25 @@
   <pc:docChgLst>
     <pc:chgData name="Matthieu De Mari" userId="dfb708c9-d8dc-439f-9a3b-c772bf4a311c" providerId="ADAL" clId="{81E9B007-0C2C-493E-9B93-55A62C9C1F12}"/>
     <pc:docChg chg="undo custSel addSld delSld modSld sldOrd modSection">
-      <pc:chgData name="Matthieu De Mari" userId="dfb708c9-d8dc-439f-9a3b-c772bf4a311c" providerId="ADAL" clId="{81E9B007-0C2C-493E-9B93-55A62C9C1F12}" dt="2026-03-03T10:58:19.174" v="2187" actId="20577"/>
+      <pc:chgData name="Matthieu De Mari" userId="dfb708c9-d8dc-439f-9a3b-c772bf4a311c" providerId="ADAL" clId="{81E9B007-0C2C-493E-9B93-55A62C9C1F12}" dt="2026-03-15T14:53:47.264" v="2215" actId="20577"/>
       <pc:docMkLst>
         <pc:docMk/>
       </pc:docMkLst>
+      <pc:sldChg chg="modSp mod">
+        <pc:chgData name="Matthieu De Mari" userId="dfb708c9-d8dc-439f-9a3b-c772bf4a311c" providerId="ADAL" clId="{81E9B007-0C2C-493E-9B93-55A62C9C1F12}" dt="2026-03-15T14:53:47.264" v="2215" actId="20577"/>
+        <pc:sldMkLst>
+          <pc:docMk/>
+          <pc:sldMk cId="1036081419" sldId="346"/>
+        </pc:sldMkLst>
+        <pc:spChg chg="mod">
+          <ac:chgData name="Matthieu De Mari" userId="dfb708c9-d8dc-439f-9a3b-c772bf4a311c" providerId="ADAL" clId="{81E9B007-0C2C-493E-9B93-55A62C9C1F12}" dt="2026-03-15T14:53:47.264" v="2215" actId="20577"/>
+          <ac:spMkLst>
+            <pc:docMk/>
+            <pc:sldMk cId="1036081419" sldId="346"/>
+            <ac:spMk id="4" creationId="{7E420A50-DCDA-4FEF-986F-775F53063E3A}"/>
+          </ac:spMkLst>
+        </pc:spChg>
+      </pc:sldChg>
       <pc:sldChg chg="modSp mod">
         <pc:chgData name="Matthieu De Mari" userId="dfb708c9-d8dc-439f-9a3b-c772bf4a311c" providerId="ADAL" clId="{81E9B007-0C2C-493E-9B93-55A62C9C1F12}" dt="2026-02-18T12:13:35.291" v="1424" actId="20577"/>
         <pc:sldMkLst>
@@ -622,14 +637,6 @@
             <ac:spMk id="4" creationId="{76E28ACE-9F17-186D-BD8A-ADCED80C3ADF}"/>
           </ac:spMkLst>
         </pc:spChg>
-        <pc:picChg chg="del">
-          <ac:chgData name="Matthieu De Mari" userId="dfb708c9-d8dc-439f-9a3b-c772bf4a311c" providerId="ADAL" clId="{81E9B007-0C2C-493E-9B93-55A62C9C1F12}" dt="2026-03-03T10:43:12.060" v="1449" actId="478"/>
-          <ac:picMkLst>
-            <pc:docMk/>
-            <pc:sldMk cId="622754831" sldId="627"/>
-            <ac:picMk id="8" creationId="{3643E417-DD86-D969-F75D-BD91E5DC4087}"/>
-          </ac:picMkLst>
-        </pc:picChg>
       </pc:sldChg>
       <pc:sldChg chg="addSp delSp modSp add mod chgLayout">
         <pc:chgData name="Matthieu De Mari" userId="dfb708c9-d8dc-439f-9a3b-c772bf4a311c" providerId="ADAL" clId="{81E9B007-0C2C-493E-9B93-55A62C9C1F12}" dt="2026-03-03T10:44:50.545" v="1493" actId="20577"/>
@@ -661,14 +668,6 @@
             <ac:spMk id="4" creationId="{38AEBE44-9AA0-0BD2-9DC3-65317E2DDB4F}"/>
           </ac:spMkLst>
         </pc:spChg>
-        <pc:picChg chg="del">
-          <ac:chgData name="Matthieu De Mari" userId="dfb708c9-d8dc-439f-9a3b-c772bf4a311c" providerId="ADAL" clId="{81E9B007-0C2C-493E-9B93-55A62C9C1F12}" dt="2026-03-03T10:44:11.775" v="1455" actId="478"/>
-          <ac:picMkLst>
-            <pc:docMk/>
-            <pc:sldMk cId="618793995" sldId="628"/>
-            <ac:picMk id="7" creationId="{9AC78AEE-88FF-E204-0618-9A70BC84D55B}"/>
-          </ac:picMkLst>
-        </pc:picChg>
       </pc:sldChg>
       <pc:sldChg chg="modSp add mod">
         <pc:chgData name="Matthieu De Mari" userId="dfb708c9-d8dc-439f-9a3b-c772bf4a311c" providerId="ADAL" clId="{81E9B007-0C2C-493E-9B93-55A62C9C1F12}" dt="2026-03-03T10:56:56.031" v="2062" actId="27636"/>
@@ -787,7 +786,7 @@
           <a:p>
             <a:fld id="{61478373-EB31-4867-8CF0-FA31364748A5}" type="datetimeFigureOut">
               <a:rPr lang="en-GB" smtClean="0"/>
-              <a:t>03/03/2026</a:t>
+              <a:t>15/03/2026</a:t>
             </a:fld>
             <a:endParaRPr lang="en-GB"/>
           </a:p>
@@ -1204,7 +1203,7 @@
           <a:p>
             <a:fld id="{E85DF616-B21E-4EF6-A6A5-95E2FB3EB1A1}" type="datetimeFigureOut">
               <a:rPr lang="en-GB" smtClean="0"/>
-              <a:t>03/03/2026</a:t>
+              <a:t>15/03/2026</a:t>
             </a:fld>
             <a:endParaRPr lang="en-GB"/>
           </a:p>
@@ -1404,7 +1403,7 @@
           <a:p>
             <a:fld id="{E85DF616-B21E-4EF6-A6A5-95E2FB3EB1A1}" type="datetimeFigureOut">
               <a:rPr lang="en-GB" smtClean="0"/>
-              <a:t>03/03/2026</a:t>
+              <a:t>15/03/2026</a:t>
             </a:fld>
             <a:endParaRPr lang="en-GB"/>
           </a:p>
@@ -1614,7 +1613,7 @@
           <a:p>
             <a:fld id="{E85DF616-B21E-4EF6-A6A5-95E2FB3EB1A1}" type="datetimeFigureOut">
               <a:rPr lang="en-GB" smtClean="0"/>
-              <a:t>03/03/2026</a:t>
+              <a:t>15/03/2026</a:t>
             </a:fld>
             <a:endParaRPr lang="en-GB"/>
           </a:p>
@@ -1814,7 +1813,7 @@
           <a:p>
             <a:fld id="{E85DF616-B21E-4EF6-A6A5-95E2FB3EB1A1}" type="datetimeFigureOut">
               <a:rPr lang="en-GB" smtClean="0"/>
-              <a:t>03/03/2026</a:t>
+              <a:t>15/03/2026</a:t>
             </a:fld>
             <a:endParaRPr lang="en-GB"/>
           </a:p>
@@ -2090,7 +2089,7 @@
           <a:p>
             <a:fld id="{E85DF616-B21E-4EF6-A6A5-95E2FB3EB1A1}" type="datetimeFigureOut">
               <a:rPr lang="en-GB" smtClean="0"/>
-              <a:t>03/03/2026</a:t>
+              <a:t>15/03/2026</a:t>
             </a:fld>
             <a:endParaRPr lang="en-GB"/>
           </a:p>
@@ -2358,7 +2357,7 @@
           <a:p>
             <a:fld id="{E85DF616-B21E-4EF6-A6A5-95E2FB3EB1A1}" type="datetimeFigureOut">
               <a:rPr lang="en-GB" smtClean="0"/>
-              <a:t>03/03/2026</a:t>
+              <a:t>15/03/2026</a:t>
             </a:fld>
             <a:endParaRPr lang="en-GB"/>
           </a:p>
@@ -2773,7 +2772,7 @@
           <a:p>
             <a:fld id="{E85DF616-B21E-4EF6-A6A5-95E2FB3EB1A1}" type="datetimeFigureOut">
               <a:rPr lang="en-GB" smtClean="0"/>
-              <a:t>03/03/2026</a:t>
+              <a:t>15/03/2026</a:t>
             </a:fld>
             <a:endParaRPr lang="en-GB"/>
           </a:p>
@@ -2915,7 +2914,7 @@
           <a:p>
             <a:fld id="{E85DF616-B21E-4EF6-A6A5-95E2FB3EB1A1}" type="datetimeFigureOut">
               <a:rPr lang="en-GB" smtClean="0"/>
-              <a:t>03/03/2026</a:t>
+              <a:t>15/03/2026</a:t>
             </a:fld>
             <a:endParaRPr lang="en-GB"/>
           </a:p>
@@ -3028,7 +3027,7 @@
           <a:p>
             <a:fld id="{E85DF616-B21E-4EF6-A6A5-95E2FB3EB1A1}" type="datetimeFigureOut">
               <a:rPr lang="en-GB" smtClean="0"/>
-              <a:t>03/03/2026</a:t>
+              <a:t>15/03/2026</a:t>
             </a:fld>
             <a:endParaRPr lang="en-GB"/>
           </a:p>
@@ -3341,7 +3340,7 @@
           <a:p>
             <a:fld id="{E85DF616-B21E-4EF6-A6A5-95E2FB3EB1A1}" type="datetimeFigureOut">
               <a:rPr lang="en-GB" smtClean="0"/>
-              <a:t>03/03/2026</a:t>
+              <a:t>15/03/2026</a:t>
             </a:fld>
             <a:endParaRPr lang="en-GB"/>
           </a:p>
@@ -3630,7 +3629,7 @@
           <a:p>
             <a:fld id="{E85DF616-B21E-4EF6-A6A5-95E2FB3EB1A1}" type="datetimeFigureOut">
               <a:rPr lang="en-GB" smtClean="0"/>
-              <a:t>03/03/2026</a:t>
+              <a:t>15/03/2026</a:t>
             </a:fld>
             <a:endParaRPr lang="en-GB"/>
           </a:p>
@@ -3873,7 +3872,7 @@
           <a:p>
             <a:fld id="{E85DF616-B21E-4EF6-A6A5-95E2FB3EB1A1}" type="datetimeFigureOut">
               <a:rPr lang="en-GB" smtClean="0"/>
-              <a:t>03/03/2026</a:t>
+              <a:t>15/03/2026</a:t>
             </a:fld>
             <a:endParaRPr lang="en-GB"/>
           </a:p>
@@ -11933,8 +11932,8 @@
           </a:p>
         </p:txBody>
       </p:sp>
-      <mc:AlternateContent xmlns:mc="http://schemas.openxmlformats.org/markup-compatibility/2006">
-        <mc:Choice xmlns:a14="http://schemas.microsoft.com/office/drawing/2010/main" Requires="a14">
+      <mc:AlternateContent xmlns:mc="http://schemas.openxmlformats.org/markup-compatibility/2006" xmlns:a14="http://schemas.microsoft.com/office/drawing/2010/main">
+        <mc:Choice Requires="a14">
           <p:sp>
             <p:nvSpPr>
               <p:cNvPr id="4" name="Content Placeholder 3">
@@ -12016,55 +12015,75 @@
                 <a14:m>
                   <m:oMath xmlns:m="http://schemas.openxmlformats.org/officeDocument/2006/math">
                     <m:r>
-                      <a:rPr lang="en-GB" i="1"/>
+                      <a:rPr lang="en-GB" i="1">
+                        <a:latin typeface="Cambria Math" panose="02040503050406030204" pitchFamily="18" charset="0"/>
+                      </a:rPr>
                       <m:t>𝐿</m:t>
                     </m:r>
                     <m:r>
-                      <a:rPr lang="en-GB"/>
+                      <a:rPr lang="en-GB">
+                        <a:latin typeface="Cambria Math" panose="02040503050406030204" pitchFamily="18" charset="0"/>
+                      </a:rPr>
                       <m:t>=</m:t>
                     </m:r>
                     <m:sSub>
                       <m:sSubPr>
                         <m:ctrlPr>
-                          <a:rPr lang="ar-AE" i="1"/>
+                          <a:rPr lang="ar-AE" i="1">
+                            <a:latin typeface="Cambria Math" panose="02040503050406030204" pitchFamily="18" charset="0"/>
+                          </a:rPr>
                         </m:ctrlPr>
                       </m:sSubPr>
                       <m:e>
                         <m:r>
-                          <a:rPr lang="ar-AE" i="1"/>
+                          <a:rPr lang="ar-AE" i="1">
+                            <a:latin typeface="Cambria Math" panose="02040503050406030204" pitchFamily="18" charset="0"/>
+                          </a:rPr>
                           <m:t>𝐿</m:t>
                         </m:r>
                       </m:e>
                       <m:sub>
                         <m:r>
-                          <a:rPr lang="ar-AE" i="1"/>
+                          <a:rPr lang="ar-AE" i="1">
+                            <a:latin typeface="Cambria Math" panose="02040503050406030204" pitchFamily="18" charset="0"/>
+                          </a:rPr>
                           <m:t>𝑚𝑎𝑖𝑛</m:t>
                         </m:r>
                       </m:sub>
                     </m:sSub>
                     <m:r>
-                      <a:rPr lang="ar-AE"/>
+                      <a:rPr lang="ar-AE">
+                        <a:latin typeface="Cambria Math" panose="02040503050406030204" pitchFamily="18" charset="0"/>
+                      </a:rPr>
                       <m:t>+</m:t>
                     </m:r>
                     <m:r>
-                      <a:rPr lang="ar-AE" i="1"/>
+                      <a:rPr lang="ar-AE" i="1">
+                        <a:latin typeface="Cambria Math" panose="02040503050406030204" pitchFamily="18" charset="0"/>
+                      </a:rPr>
                       <m:t>𝛼</m:t>
                     </m:r>
                     <m:sSub>
                       <m:sSubPr>
                         <m:ctrlPr>
-                          <a:rPr lang="ar-AE" i="1"/>
+                          <a:rPr lang="ar-AE" i="1">
+                            <a:latin typeface="Cambria Math" panose="02040503050406030204" pitchFamily="18" charset="0"/>
+                          </a:rPr>
                         </m:ctrlPr>
                       </m:sSubPr>
                       <m:e>
                         <m:r>
-                          <a:rPr lang="ar-AE" i="1"/>
+                          <a:rPr lang="ar-AE" i="1">
+                            <a:latin typeface="Cambria Math" panose="02040503050406030204" pitchFamily="18" charset="0"/>
+                          </a:rPr>
                           <m:t>𝐿</m:t>
                         </m:r>
                       </m:e>
                       <m:sub>
                         <m:r>
-                          <a:rPr lang="ar-AE" i="1"/>
+                          <a:rPr lang="ar-AE" i="1">
+                            <a:latin typeface="Cambria Math" panose="02040503050406030204" pitchFamily="18" charset="0"/>
+                          </a:rPr>
                           <m:t>𝑎𝑢𝑥</m:t>
                         </m:r>
                       </m:sub>
@@ -12106,7 +12125,7 @@
             </p:txBody>
           </p:sp>
         </mc:Choice>
-        <mc:Fallback>
+        <mc:Fallback xmlns="">
           <p:sp>
             <p:nvSpPr>
               <p:cNvPr id="4" name="Content Placeholder 3">
@@ -12710,8 +12729,8 @@
           </a:p>
         </p:txBody>
       </p:sp>
-      <mc:AlternateContent xmlns:mc="http://schemas.openxmlformats.org/markup-compatibility/2006">
-        <mc:Choice xmlns:a14="http://schemas.microsoft.com/office/drawing/2010/main" Requires="a14">
+      <mc:AlternateContent xmlns:mc="http://schemas.openxmlformats.org/markup-compatibility/2006" xmlns:a14="http://schemas.microsoft.com/office/drawing/2010/main">
+        <mc:Choice Requires="a14">
           <p:sp>
             <p:nvSpPr>
               <p:cNvPr id="3" name="Content Placeholder 2">
@@ -12750,7 +12769,9 @@
                 <a14:m>
                   <m:oMath xmlns:m="http://schemas.openxmlformats.org/officeDocument/2006/math">
                     <m:r>
-                      <a:rPr lang="en-GB" i="1"/>
+                      <a:rPr lang="en-GB" i="1">
+                        <a:latin typeface="Cambria Math" panose="02040503050406030204" pitchFamily="18" charset="0"/>
+                      </a:rPr>
                       <m:t>𝜙</m:t>
                     </m:r>
                   </m:oMath>
@@ -12771,30 +12792,40 @@
                       <m:t>depth</m:t>
                     </m:r>
                     <m:r>
-                      <a:rPr lang="en-GB"/>
+                      <a:rPr lang="en-GB">
+                        <a:latin typeface="Cambria Math" panose="02040503050406030204" pitchFamily="18" charset="0"/>
+                      </a:rPr>
                       <m:t>=</m:t>
                     </m:r>
                     <m:sSup>
                       <m:sSupPr>
                         <m:ctrlPr>
-                          <a:rPr lang="ar-AE" i="1"/>
+                          <a:rPr lang="ar-AE" i="1">
+                            <a:latin typeface="Cambria Math" panose="02040503050406030204" pitchFamily="18" charset="0"/>
+                          </a:rPr>
                         </m:ctrlPr>
                       </m:sSupPr>
                       <m:e>
                         <m:r>
-                          <a:rPr lang="ar-AE" i="1"/>
+                          <a:rPr lang="ar-AE" i="1">
+                            <a:latin typeface="Cambria Math" panose="02040503050406030204" pitchFamily="18" charset="0"/>
+                          </a:rPr>
                           <m:t>𝛼</m:t>
                         </m:r>
                       </m:e>
                       <m:sup>
                         <m:r>
-                          <a:rPr lang="ar-AE" i="1"/>
+                          <a:rPr lang="ar-AE" i="1">
+                            <a:latin typeface="Cambria Math" panose="02040503050406030204" pitchFamily="18" charset="0"/>
+                          </a:rPr>
                           <m:t>𝜙</m:t>
                         </m:r>
                       </m:sup>
                     </m:sSup>
                     <m:r>
-                      <a:rPr lang="ar-AE"/>
+                      <a:rPr lang="ar-AE">
+                        <a:latin typeface="Cambria Math" panose="02040503050406030204" pitchFamily="18" charset="0"/>
+                      </a:rPr>
                       <m:t>, </m:t>
                     </m:r>
                     <m:r>
@@ -12805,30 +12836,40 @@
                       <m:t>width</m:t>
                     </m:r>
                     <m:r>
-                      <a:rPr lang="en-GB"/>
+                      <a:rPr lang="en-GB">
+                        <a:latin typeface="Cambria Math" panose="02040503050406030204" pitchFamily="18" charset="0"/>
+                      </a:rPr>
                       <m:t>=</m:t>
                     </m:r>
                     <m:sSup>
                       <m:sSupPr>
                         <m:ctrlPr>
-                          <a:rPr lang="ar-AE" i="1"/>
+                          <a:rPr lang="ar-AE" i="1">
+                            <a:latin typeface="Cambria Math" panose="02040503050406030204" pitchFamily="18" charset="0"/>
+                          </a:rPr>
                         </m:ctrlPr>
                       </m:sSupPr>
                       <m:e>
                         <m:r>
-                          <a:rPr lang="ar-AE" i="1"/>
+                          <a:rPr lang="ar-AE" i="1">
+                            <a:latin typeface="Cambria Math" panose="02040503050406030204" pitchFamily="18" charset="0"/>
+                          </a:rPr>
                           <m:t>𝛽</m:t>
                         </m:r>
                       </m:e>
                       <m:sup>
                         <m:r>
-                          <a:rPr lang="ar-AE" i="1"/>
+                          <a:rPr lang="ar-AE" i="1">
+                            <a:latin typeface="Cambria Math" panose="02040503050406030204" pitchFamily="18" charset="0"/>
+                          </a:rPr>
                           <m:t>𝜙</m:t>
                         </m:r>
                       </m:sup>
                     </m:sSup>
                     <m:r>
-                      <a:rPr lang="ar-AE"/>
+                      <a:rPr lang="ar-AE">
+                        <a:latin typeface="Cambria Math" panose="02040503050406030204" pitchFamily="18" charset="0"/>
+                      </a:rPr>
                       <m:t>, </m:t>
                     </m:r>
                     <m:r>
@@ -12839,24 +12880,32 @@
                       <m:t>resolution</m:t>
                     </m:r>
                     <m:r>
-                      <a:rPr lang="en-GB"/>
+                      <a:rPr lang="en-GB">
+                        <a:latin typeface="Cambria Math" panose="02040503050406030204" pitchFamily="18" charset="0"/>
+                      </a:rPr>
                       <m:t>=</m:t>
                     </m:r>
                     <m:sSup>
                       <m:sSupPr>
                         <m:ctrlPr>
-                          <a:rPr lang="ar-AE" i="1"/>
+                          <a:rPr lang="ar-AE" i="1">
+                            <a:latin typeface="Cambria Math" panose="02040503050406030204" pitchFamily="18" charset="0"/>
+                          </a:rPr>
                         </m:ctrlPr>
                       </m:sSupPr>
                       <m:e>
                         <m:r>
-                          <a:rPr lang="ar-AE" i="1"/>
+                          <a:rPr lang="ar-AE" i="1">
+                            <a:latin typeface="Cambria Math" panose="02040503050406030204" pitchFamily="18" charset="0"/>
+                          </a:rPr>
                           <m:t>𝛾</m:t>
                         </m:r>
                       </m:e>
                       <m:sup>
                         <m:r>
-                          <a:rPr lang="ar-AE" i="1"/>
+                          <a:rPr lang="ar-AE" i="1">
+                            <a:latin typeface="Cambria Math" panose="02040503050406030204" pitchFamily="18" charset="0"/>
+                          </a:rPr>
                           <m:t>𝜙</m:t>
                         </m:r>
                       </m:sup>
@@ -12976,7 +13025,9 @@
                 <a14:m>
                   <m:oMath xmlns:m="http://schemas.openxmlformats.org/officeDocument/2006/math">
                     <m:r>
-                      <a:rPr lang="en-GB" i="1"/>
+                      <a:rPr lang="en-GB" i="1">
+                        <a:latin typeface="Cambria Math" panose="02040503050406030204" pitchFamily="18" charset="0"/>
+                      </a:rPr>
                       <m:t>𝜙</m:t>
                     </m:r>
                   </m:oMath>
@@ -13045,7 +13096,7 @@
             </p:txBody>
           </p:sp>
         </mc:Choice>
-        <mc:Fallback>
+        <mc:Fallback xmlns="">
           <p:sp>
             <p:nvSpPr>
               <p:cNvPr id="3" name="Content Placeholder 2">
@@ -16502,7 +16553,15 @@
           <a:p>
             <a:r>
               <a:rPr lang="en-US" dirty="0"/>
-              <a:t>Some milestone models and their key ideas (residuals, parallelizing, dynamic scaling, etc.)</a:t>
+              <a:t>Some milestone models and their key ideas (residuals, parallelizing/inception, </a:t>
+            </a:r>
+            <a:r>
+              <a:rPr lang="en-US"/>
+              <a:t>multiple outputs, dynamic </a:t>
+            </a:r>
+            <a:r>
+              <a:rPr lang="en-US" dirty="0"/>
+              <a:t>scaling, etc.)</a:t>
             </a:r>
           </a:p>
           <a:p>
